--- a/Question1_Coffee/Question1.pptx
+++ b/Question1_Coffee/Question1.pptx
@@ -1,6 +1,6 @@
 
 <file path=ppt/presentation.xml><?xml version="1.0" encoding="utf-8"?>
-<p:presentation xmlns:a="http://schemas.openxmlformats.org/drawingml/2006/main" xmlns:p="http://schemas.openxmlformats.org/presentationml/2006/main" xmlns:r="http://schemas.openxmlformats.org/officeDocument/2006/relationships" autoCompressPictures="0" saveSubsetFonts="1">
+<p:presentation xmlns:a="http://schemas.openxmlformats.org/drawingml/2006/main" xmlns:r="http://schemas.openxmlformats.org/officeDocument/2006/relationships" xmlns:p="http://schemas.openxmlformats.org/presentationml/2006/main" saveSubsetFonts="1" autoCompressPictures="0">
   <p:sldMasterIdLst>
     <p:sldMasterId id="2147483648" r:id="rId1"/>
   </p:sldMasterIdLst>
@@ -23,8 +23,8 @@
     <a:defPPr>
       <a:defRPr lang="en-US"/>
     </a:defPPr>
-    <a:lvl1pPr algn="l" defTabSz="457200" eaLnBrk="1" hangingPunct="1" latinLnBrk="0" marL="0" rtl="0">
-      <a:defRPr kern="1200" sz="1800">
+    <a:lvl1pPr marL="0" algn="l" defTabSz="457200" rtl="0" eaLnBrk="1" latinLnBrk="0" hangingPunct="1">
+      <a:defRPr sz="1800" kern="1200">
         <a:solidFill>
           <a:schemeClr val="tx1"/>
         </a:solidFill>
@@ -33,8 +33,8 @@
         <a:cs typeface="+mn-cs"/>
       </a:defRPr>
     </a:lvl1pPr>
-    <a:lvl2pPr algn="l" defTabSz="457200" eaLnBrk="1" hangingPunct="1" latinLnBrk="0" marL="457200" rtl="0">
-      <a:defRPr kern="1200" sz="1800">
+    <a:lvl2pPr marL="457200" algn="l" defTabSz="457200" rtl="0" eaLnBrk="1" latinLnBrk="0" hangingPunct="1">
+      <a:defRPr sz="1800" kern="1200">
         <a:solidFill>
           <a:schemeClr val="tx1"/>
         </a:solidFill>
@@ -43,8 +43,8 @@
         <a:cs typeface="+mn-cs"/>
       </a:defRPr>
     </a:lvl2pPr>
-    <a:lvl3pPr algn="l" defTabSz="457200" eaLnBrk="1" hangingPunct="1" latinLnBrk="0" marL="914400" rtl="0">
-      <a:defRPr kern="1200" sz="1800">
+    <a:lvl3pPr marL="914400" algn="l" defTabSz="457200" rtl="0" eaLnBrk="1" latinLnBrk="0" hangingPunct="1">
+      <a:defRPr sz="1800" kern="1200">
         <a:solidFill>
           <a:schemeClr val="tx1"/>
         </a:solidFill>
@@ -53,8 +53,8 @@
         <a:cs typeface="+mn-cs"/>
       </a:defRPr>
     </a:lvl3pPr>
-    <a:lvl4pPr algn="l" defTabSz="457200" eaLnBrk="1" hangingPunct="1" latinLnBrk="0" marL="1371600" rtl="0">
-      <a:defRPr kern="1200" sz="1800">
+    <a:lvl4pPr marL="1371600" algn="l" defTabSz="457200" rtl="0" eaLnBrk="1" latinLnBrk="0" hangingPunct="1">
+      <a:defRPr sz="1800" kern="1200">
         <a:solidFill>
           <a:schemeClr val="tx1"/>
         </a:solidFill>
@@ -63,8 +63,8 @@
         <a:cs typeface="+mn-cs"/>
       </a:defRPr>
     </a:lvl4pPr>
-    <a:lvl5pPr algn="l" defTabSz="457200" eaLnBrk="1" hangingPunct="1" latinLnBrk="0" marL="1828800" rtl="0">
-      <a:defRPr kern="1200" sz="1800">
+    <a:lvl5pPr marL="1828800" algn="l" defTabSz="457200" rtl="0" eaLnBrk="1" latinLnBrk="0" hangingPunct="1">
+      <a:defRPr sz="1800" kern="1200">
         <a:solidFill>
           <a:schemeClr val="tx1"/>
         </a:solidFill>
@@ -73,8 +73,8 @@
         <a:cs typeface="+mn-cs"/>
       </a:defRPr>
     </a:lvl5pPr>
-    <a:lvl6pPr algn="l" defTabSz="457200" eaLnBrk="1" hangingPunct="1" latinLnBrk="0" marL="2286000" rtl="0">
-      <a:defRPr kern="1200" sz="1800">
+    <a:lvl6pPr marL="2286000" algn="l" defTabSz="457200" rtl="0" eaLnBrk="1" latinLnBrk="0" hangingPunct="1">
+      <a:defRPr sz="1800" kern="1200">
         <a:solidFill>
           <a:schemeClr val="tx1"/>
         </a:solidFill>
@@ -83,8 +83,8 @@
         <a:cs typeface="+mn-cs"/>
       </a:defRPr>
     </a:lvl6pPr>
-    <a:lvl7pPr algn="l" defTabSz="457200" eaLnBrk="1" hangingPunct="1" latinLnBrk="0" marL="2743200" rtl="0">
-      <a:defRPr kern="1200" sz="1800">
+    <a:lvl7pPr marL="2743200" algn="l" defTabSz="457200" rtl="0" eaLnBrk="1" latinLnBrk="0" hangingPunct="1">
+      <a:defRPr sz="1800" kern="1200">
         <a:solidFill>
           <a:schemeClr val="tx1"/>
         </a:solidFill>
@@ -93,8 +93,8 @@
         <a:cs typeface="+mn-cs"/>
       </a:defRPr>
     </a:lvl7pPr>
-    <a:lvl8pPr algn="l" defTabSz="457200" eaLnBrk="1" hangingPunct="1" latinLnBrk="0" marL="3200400" rtl="0">
-      <a:defRPr kern="1200" sz="1800">
+    <a:lvl8pPr marL="3200400" algn="l" defTabSz="457200" rtl="0" eaLnBrk="1" latinLnBrk="0" hangingPunct="1">
+      <a:defRPr sz="1800" kern="1200">
         <a:solidFill>
           <a:schemeClr val="tx1"/>
         </a:solidFill>
@@ -103,8 +103,8 @@
         <a:cs typeface="+mn-cs"/>
       </a:defRPr>
     </a:lvl8pPr>
-    <a:lvl9pPr algn="l" defTabSz="457200" eaLnBrk="1" hangingPunct="1" latinLnBrk="0" marL="3657600" rtl="0">
-      <a:defRPr kern="1200" sz="1800">
+    <a:lvl9pPr marL="3657600" algn="l" defTabSz="457200" rtl="0" eaLnBrk="1" latinLnBrk="0" hangingPunct="1">
+      <a:defRPr sz="1800" kern="1200">
         <a:solidFill>
           <a:schemeClr val="tx1"/>
         </a:solidFill>
@@ -312,7 +312,7 @@
           <a:p>
             <a:fld id="{241EB5C9-1307-BA42-ABA2-0BC069CD8E7F}" type="datetimeFigureOut">
               <a:rPr lang="en-US" smtClean="0"/>
-              <a:t>1/2/22</a:t>
+              <a:t>6/19/26</a:t>
             </a:fld>
             <a:endParaRPr lang="en-US"/>
           </a:p>
@@ -480,7 +480,7 @@
           <a:p>
             <a:fld id="{241EB5C9-1307-BA42-ABA2-0BC069CD8E7F}" type="datetimeFigureOut">
               <a:rPr lang="en-US" smtClean="0"/>
-              <a:t>1/2/22</a:t>
+              <a:t>6/19/26</a:t>
             </a:fld>
             <a:endParaRPr lang="en-US"/>
           </a:p>
@@ -658,7 +658,7 @@
           <a:p>
             <a:fld id="{241EB5C9-1307-BA42-ABA2-0BC069CD8E7F}" type="datetimeFigureOut">
               <a:rPr lang="en-US" smtClean="0"/>
-              <a:t>1/2/22</a:t>
+              <a:t>6/19/26</a:t>
             </a:fld>
             <a:endParaRPr lang="en-US"/>
           </a:p>
@@ -826,7 +826,7 @@
           <a:p>
             <a:fld id="{241EB5C9-1307-BA42-ABA2-0BC069CD8E7F}" type="datetimeFigureOut">
               <a:rPr lang="en-US" smtClean="0"/>
-              <a:t>1/2/22</a:t>
+              <a:t>6/19/26</a:t>
             </a:fld>
             <a:endParaRPr lang="en-US"/>
           </a:p>
@@ -1071,7 +1071,7 @@
           <a:p>
             <a:fld id="{241EB5C9-1307-BA42-ABA2-0BC069CD8E7F}" type="datetimeFigureOut">
               <a:rPr lang="en-US" smtClean="0"/>
-              <a:t>1/2/22</a:t>
+              <a:t>6/19/26</a:t>
             </a:fld>
             <a:endParaRPr lang="en-US"/>
           </a:p>
@@ -1356,7 +1356,7 @@
           <a:p>
             <a:fld id="{241EB5C9-1307-BA42-ABA2-0BC069CD8E7F}" type="datetimeFigureOut">
               <a:rPr lang="en-US" smtClean="0"/>
-              <a:t>1/2/22</a:t>
+              <a:t>6/19/26</a:t>
             </a:fld>
             <a:endParaRPr lang="en-US"/>
           </a:p>
@@ -1775,7 +1775,7 @@
           <a:p>
             <a:fld id="{241EB5C9-1307-BA42-ABA2-0BC069CD8E7F}" type="datetimeFigureOut">
               <a:rPr lang="en-US" smtClean="0"/>
-              <a:t>1/2/22</a:t>
+              <a:t>6/19/26</a:t>
             </a:fld>
             <a:endParaRPr lang="en-US"/>
           </a:p>
@@ -1892,7 +1892,7 @@
           <a:p>
             <a:fld id="{241EB5C9-1307-BA42-ABA2-0BC069CD8E7F}" type="datetimeFigureOut">
               <a:rPr lang="en-US" smtClean="0"/>
-              <a:t>1/2/22</a:t>
+              <a:t>6/19/26</a:t>
             </a:fld>
             <a:endParaRPr lang="en-US"/>
           </a:p>
@@ -1987,7 +1987,7 @@
           <a:p>
             <a:fld id="{241EB5C9-1307-BA42-ABA2-0BC069CD8E7F}" type="datetimeFigureOut">
               <a:rPr lang="en-US" smtClean="0"/>
-              <a:t>1/2/22</a:t>
+              <a:t>6/19/26</a:t>
             </a:fld>
             <a:endParaRPr lang="en-US"/>
           </a:p>
@@ -2262,7 +2262,7 @@
           <a:p>
             <a:fld id="{241EB5C9-1307-BA42-ABA2-0BC069CD8E7F}" type="datetimeFigureOut">
               <a:rPr lang="en-US" smtClean="0"/>
-              <a:t>1/2/22</a:t>
+              <a:t>6/19/26</a:t>
             </a:fld>
             <a:endParaRPr lang="en-US"/>
           </a:p>
@@ -2514,7 +2514,7 @@
           <a:p>
             <a:fld id="{241EB5C9-1307-BA42-ABA2-0BC069CD8E7F}" type="datetimeFigureOut">
               <a:rPr lang="en-US" smtClean="0"/>
-              <a:t>1/2/22</a:t>
+              <a:t>6/19/26</a:t>
             </a:fld>
             <a:endParaRPr lang="en-US"/>
           </a:p>
@@ -2576,7 +2576,7 @@
 </file>
 
 <file path=ppt/slideMasters/slideMaster1.xml><?xml version="1.0" encoding="utf-8"?>
-<p:sldMaster xmlns:a="http://schemas.openxmlformats.org/drawingml/2006/main" xmlns:p="http://schemas.openxmlformats.org/presentationml/2006/main" xmlns:r="http://schemas.openxmlformats.org/officeDocument/2006/relationships">
+<p:sldMaster xmlns:a="http://schemas.openxmlformats.org/drawingml/2006/main" xmlns:r="http://schemas.openxmlformats.org/officeDocument/2006/relationships" xmlns:p="http://schemas.openxmlformats.org/presentationml/2006/main">
   <p:cSld>
     <p:bg>
       <p:bgRef idx="1001">
@@ -2617,7 +2617,7 @@
           </a:prstGeom>
         </p:spPr>
         <p:txBody>
-          <a:bodyPr anchor="ctr" bIns="45720" lIns="91440" rIns="91440" rtlCol="0" tIns="45720" vert="horz">
+          <a:bodyPr vert="horz" lIns="91440" tIns="45720" rIns="91440" bIns="45720" rtlCol="0" anchor="ctr">
             <a:normAutofit/>
           </a:bodyPr>
           <a:lstStyle/>
@@ -2636,7 +2636,7 @@
             <a:spLocks noGrp="1"/>
           </p:cNvSpPr>
           <p:nvPr>
-            <p:ph idx="1" type="body"/>
+            <p:ph type="body" idx="1"/>
           </p:nvPr>
         </p:nvSpPr>
         <p:spPr>
@@ -2649,7 +2649,7 @@
           </a:prstGeom>
         </p:spPr>
         <p:txBody>
-          <a:bodyPr bIns="45720" lIns="91440" rIns="91440" rtlCol="0" tIns="45720" vert="horz">
+          <a:bodyPr vert="horz" lIns="91440" tIns="45720" rIns="91440" bIns="45720" rtlCol="0">
             <a:normAutofit/>
           </a:bodyPr>
           <a:lstStyle/>
@@ -2697,7 +2697,7 @@
             <a:spLocks noGrp="1"/>
           </p:cNvSpPr>
           <p:nvPr>
-            <p:ph idx="2" sz="half" type="dt"/>
+            <p:ph type="dt" sz="half" idx="2"/>
           </p:nvPr>
         </p:nvSpPr>
         <p:spPr>
@@ -2710,7 +2710,7 @@
           </a:prstGeom>
         </p:spPr>
         <p:txBody>
-          <a:bodyPr anchor="ctr" bIns="45720" lIns="91440" rIns="91440" rtlCol="0" tIns="45720" vert="horz"/>
+          <a:bodyPr vert="horz" lIns="91440" tIns="45720" rIns="91440" bIns="45720" rtlCol="0" anchor="ctr"/>
           <a:lstStyle>
             <a:lvl1pPr algn="l">
               <a:defRPr sz="900">
@@ -2725,7 +2725,7 @@
           <a:p>
             <a:fld id="{241EB5C9-1307-BA42-ABA2-0BC069CD8E7F}" type="datetimeFigureOut">
               <a:rPr lang="en-US" smtClean="0"/>
-              <a:t>1/2/22</a:t>
+              <a:t>6/19/26</a:t>
             </a:fld>
             <a:endParaRPr lang="en-US"/>
           </a:p>
@@ -2738,7 +2738,7 @@
             <a:spLocks noGrp="1"/>
           </p:cNvSpPr>
           <p:nvPr>
-            <p:ph idx="3" sz="quarter" type="ftr"/>
+            <p:ph type="ftr" sz="quarter" idx="3"/>
           </p:nvPr>
         </p:nvSpPr>
         <p:spPr>
@@ -2751,7 +2751,7 @@
           </a:prstGeom>
         </p:spPr>
         <p:txBody>
-          <a:bodyPr anchor="ctr" bIns="45720" lIns="91440" rIns="91440" rtlCol="0" tIns="45720" vert="horz"/>
+          <a:bodyPr vert="horz" lIns="91440" tIns="45720" rIns="91440" bIns="45720" rtlCol="0" anchor="ctr"/>
           <a:lstStyle>
             <a:lvl1pPr algn="ctr">
               <a:defRPr sz="900">
@@ -2775,7 +2775,7 @@
             <a:spLocks noGrp="1"/>
           </p:cNvSpPr>
           <p:nvPr>
-            <p:ph idx="4" sz="quarter" type="sldNum"/>
+            <p:ph type="sldNum" sz="quarter" idx="4"/>
           </p:nvPr>
         </p:nvSpPr>
         <p:spPr>
@@ -2788,7 +2788,7 @@
           </a:prstGeom>
         </p:spPr>
         <p:txBody>
-          <a:bodyPr anchor="ctr" bIns="45720" lIns="91440" rIns="91440" rtlCol="0" tIns="45720" vert="horz"/>
+          <a:bodyPr vert="horz" lIns="91440" tIns="45720" rIns="91440" bIns="45720" rtlCol="0" anchor="ctr"/>
           <a:lstStyle>
             <a:lvl1pPr algn="r">
               <a:defRPr sz="900">
@@ -2816,7 +2816,7 @@
       </p:ext>
     </p:extLst>
   </p:cSld>
-  <p:clrMap accent1="accent1" accent2="accent2" accent3="accent3" accent4="accent4" accent5="accent5" accent6="accent6" bg1="lt1" bg2="lt2" folHlink="folHlink" hlink="hlink" tx1="dk1" tx2="dk2"/>
+  <p:clrMap bg1="lt1" tx1="dk1" bg2="lt2" tx2="dk2" accent1="accent1" accent2="accent2" accent3="accent3" accent4="accent4" accent5="accent5" accent6="accent6" hlink="hlink" folHlink="folHlink"/>
   <p:sldLayoutIdLst>
     <p:sldLayoutId id="2147483649" r:id="rId1"/>
     <p:sldLayoutId id="2147483650" r:id="rId2"/>
@@ -2832,12 +2832,12 @@
   </p:sldLayoutIdLst>
   <p:txStyles>
     <p:titleStyle>
-      <a:lvl1pPr algn="ctr" defTabSz="342900" eaLnBrk="1" hangingPunct="1" latinLnBrk="0" rtl="0">
+      <a:lvl1pPr algn="ctr" defTabSz="342900" rtl="0" eaLnBrk="1" latinLnBrk="0" hangingPunct="1">
         <a:spcBef>
           <a:spcPct val="0"/>
         </a:spcBef>
         <a:buNone/>
-        <a:defRPr kern="1200" sz="3300">
+        <a:defRPr sz="3300" kern="1200">
           <a:solidFill>
             <a:schemeClr val="tx1"/>
           </a:solidFill>
@@ -2848,13 +2848,13 @@
       </a:lvl1pPr>
     </p:titleStyle>
     <p:bodyStyle>
-      <a:lvl1pPr algn="l" defTabSz="342900" eaLnBrk="1" hangingPunct="1" indent="-342900" latinLnBrk="0" marL="342900" rtl="0">
+      <a:lvl1pPr marL="342900" indent="-342900" algn="l" defTabSz="342900" rtl="0" eaLnBrk="1" latinLnBrk="0" hangingPunct="1">
         <a:spcBef>
           <a:spcPct val="20000"/>
         </a:spcBef>
         <a:buFont typeface="Arial"/>
         <a:buChar char="•"/>
-        <a:defRPr kern="1200" sz="2400">
+        <a:defRPr sz="2400" kern="1200">
           <a:solidFill>
             <a:schemeClr val="tx1"/>
           </a:solidFill>
@@ -2863,13 +2863,13 @@
           <a:cs typeface="+mn-cs"/>
         </a:defRPr>
       </a:lvl1pPr>
-      <a:lvl2pPr algn="l" defTabSz="342900" eaLnBrk="1" hangingPunct="1" indent="-342900" latinLnBrk="0" marL="685800" rtl="0">
+      <a:lvl2pPr marL="685800" indent="-342900" algn="l" defTabSz="342900" rtl="0" eaLnBrk="1" latinLnBrk="0" hangingPunct="1">
         <a:spcBef>
           <a:spcPct val="20000"/>
         </a:spcBef>
         <a:buFont typeface="Arial"/>
         <a:buChar char="–"/>
-        <a:defRPr kern="1200" sz="2100">
+        <a:defRPr sz="2100" kern="1200">
           <a:solidFill>
             <a:schemeClr val="tx1"/>
           </a:solidFill>
@@ -2878,13 +2878,13 @@
           <a:cs typeface="+mn-cs"/>
         </a:defRPr>
       </a:lvl2pPr>
-      <a:lvl3pPr algn="l" defTabSz="342900" eaLnBrk="1" hangingPunct="1" indent="-342900" latinLnBrk="0" marL="1028700" rtl="0">
+      <a:lvl3pPr marL="1028700" indent="-342900" algn="l" defTabSz="342900" rtl="0" eaLnBrk="1" latinLnBrk="0" hangingPunct="1">
         <a:spcBef>
           <a:spcPct val="20000"/>
         </a:spcBef>
         <a:buFont typeface="Arial"/>
         <a:buChar char="•"/>
-        <a:defRPr kern="1200" sz="1800">
+        <a:defRPr sz="1800" kern="1200">
           <a:solidFill>
             <a:schemeClr val="tx1"/>
           </a:solidFill>
@@ -2893,13 +2893,13 @@
           <a:cs typeface="+mn-cs"/>
         </a:defRPr>
       </a:lvl3pPr>
-      <a:lvl4pPr algn="l" defTabSz="342900" eaLnBrk="1" hangingPunct="1" indent="-342900" latinLnBrk="0" marL="1371600" rtl="0">
+      <a:lvl4pPr marL="1371600" indent="-342900" algn="l" defTabSz="342900" rtl="0" eaLnBrk="1" latinLnBrk="0" hangingPunct="1">
         <a:spcBef>
           <a:spcPct val="20000"/>
         </a:spcBef>
         <a:buFont typeface="Arial"/>
         <a:buChar char="–"/>
-        <a:defRPr kern="1200" sz="1500">
+        <a:defRPr sz="1500" kern="1200">
           <a:solidFill>
             <a:schemeClr val="tx1"/>
           </a:solidFill>
@@ -2908,13 +2908,13 @@
           <a:cs typeface="+mn-cs"/>
         </a:defRPr>
       </a:lvl4pPr>
-      <a:lvl5pPr algn="l" defTabSz="342900" eaLnBrk="1" hangingPunct="1" indent="-342900" latinLnBrk="0" marL="1714500" rtl="0">
+      <a:lvl5pPr marL="1714500" indent="-342900" algn="l" defTabSz="342900" rtl="0" eaLnBrk="1" latinLnBrk="0" hangingPunct="1">
         <a:spcBef>
           <a:spcPct val="20000"/>
         </a:spcBef>
         <a:buFont typeface="Arial"/>
         <a:buChar char="»"/>
-        <a:defRPr kern="1200" sz="1500">
+        <a:defRPr sz="1500" kern="1200">
           <a:solidFill>
             <a:schemeClr val="tx1"/>
           </a:solidFill>
@@ -2923,13 +2923,13 @@
           <a:cs typeface="+mn-cs"/>
         </a:defRPr>
       </a:lvl5pPr>
-      <a:lvl6pPr algn="l" defTabSz="342900" eaLnBrk="1" hangingPunct="1" indent="-342900" latinLnBrk="0" marL="2057400" rtl="0">
+      <a:lvl6pPr marL="2057400" indent="-342900" algn="l" defTabSz="342900" rtl="0" eaLnBrk="1" latinLnBrk="0" hangingPunct="1">
         <a:spcBef>
           <a:spcPct val="20000"/>
         </a:spcBef>
         <a:buFont typeface="Arial"/>
         <a:buChar char="•"/>
-        <a:defRPr kern="1200" sz="1500">
+        <a:defRPr sz="1500" kern="1200">
           <a:solidFill>
             <a:schemeClr val="tx1"/>
           </a:solidFill>
@@ -2938,13 +2938,13 @@
           <a:cs typeface="+mn-cs"/>
         </a:defRPr>
       </a:lvl6pPr>
-      <a:lvl7pPr algn="l" defTabSz="342900" eaLnBrk="1" hangingPunct="1" indent="-342900" latinLnBrk="0" marL="2400300" rtl="0">
+      <a:lvl7pPr marL="2400300" indent="-342900" algn="l" defTabSz="342900" rtl="0" eaLnBrk="1" latinLnBrk="0" hangingPunct="1">
         <a:spcBef>
           <a:spcPct val="20000"/>
         </a:spcBef>
         <a:buFont typeface="Arial"/>
         <a:buChar char="•"/>
-        <a:defRPr kern="1200" sz="1500">
+        <a:defRPr sz="1500" kern="1200">
           <a:solidFill>
             <a:schemeClr val="tx1"/>
           </a:solidFill>
@@ -2953,13 +2953,13 @@
           <a:cs typeface="+mn-cs"/>
         </a:defRPr>
       </a:lvl7pPr>
-      <a:lvl8pPr algn="l" defTabSz="342900" eaLnBrk="1" hangingPunct="1" indent="-342900" latinLnBrk="0" marL="2743200" rtl="0">
+      <a:lvl8pPr marL="2743200" indent="-342900" algn="l" defTabSz="342900" rtl="0" eaLnBrk="1" latinLnBrk="0" hangingPunct="1">
         <a:spcBef>
           <a:spcPct val="20000"/>
         </a:spcBef>
         <a:buFont typeface="Arial"/>
         <a:buChar char="•"/>
-        <a:defRPr kern="1200" sz="1500">
+        <a:defRPr sz="1500" kern="1200">
           <a:solidFill>
             <a:schemeClr val="tx1"/>
           </a:solidFill>
@@ -2968,13 +2968,13 @@
           <a:cs typeface="+mn-cs"/>
         </a:defRPr>
       </a:lvl8pPr>
-      <a:lvl9pPr algn="l" defTabSz="342900" eaLnBrk="1" hangingPunct="1" indent="-342900" latinLnBrk="0" marL="3086100" rtl="0">
+      <a:lvl9pPr marL="3086100" indent="-342900" algn="l" defTabSz="342900" rtl="0" eaLnBrk="1" latinLnBrk="0" hangingPunct="1">
         <a:spcBef>
           <a:spcPct val="20000"/>
         </a:spcBef>
         <a:buFont typeface="Arial"/>
         <a:buChar char="•"/>
-        <a:defRPr kern="1200" sz="1500">
+        <a:defRPr sz="1500" kern="1200">
           <a:solidFill>
             <a:schemeClr val="tx1"/>
           </a:solidFill>
@@ -2988,8 +2988,8 @@
       <a:defPPr>
         <a:defRPr lang="en-US"/>
       </a:defPPr>
-      <a:lvl1pPr algn="l" defTabSz="342900" eaLnBrk="1" hangingPunct="1" latinLnBrk="0" marL="0" rtl="0">
-        <a:defRPr kern="1200" sz="1350">
+      <a:lvl1pPr marL="0" algn="l" defTabSz="342900" rtl="0" eaLnBrk="1" latinLnBrk="0" hangingPunct="1">
+        <a:defRPr sz="1350" kern="1200">
           <a:solidFill>
             <a:schemeClr val="tx1"/>
           </a:solidFill>
@@ -2998,8 +2998,8 @@
           <a:cs typeface="+mn-cs"/>
         </a:defRPr>
       </a:lvl1pPr>
-      <a:lvl2pPr algn="l" defTabSz="342900" eaLnBrk="1" hangingPunct="1" latinLnBrk="0" marL="342900" rtl="0">
-        <a:defRPr kern="1200" sz="1350">
+      <a:lvl2pPr marL="342900" algn="l" defTabSz="342900" rtl="0" eaLnBrk="1" latinLnBrk="0" hangingPunct="1">
+        <a:defRPr sz="1350" kern="1200">
           <a:solidFill>
             <a:schemeClr val="tx1"/>
           </a:solidFill>
@@ -3008,8 +3008,8 @@
           <a:cs typeface="+mn-cs"/>
         </a:defRPr>
       </a:lvl2pPr>
-      <a:lvl3pPr algn="l" defTabSz="342900" eaLnBrk="1" hangingPunct="1" latinLnBrk="0" marL="685800" rtl="0">
-        <a:defRPr kern="1200" sz="1350">
+      <a:lvl3pPr marL="685800" algn="l" defTabSz="342900" rtl="0" eaLnBrk="1" latinLnBrk="0" hangingPunct="1">
+        <a:defRPr sz="1350" kern="1200">
           <a:solidFill>
             <a:schemeClr val="tx1"/>
           </a:solidFill>
@@ -3018,8 +3018,8 @@
           <a:cs typeface="+mn-cs"/>
         </a:defRPr>
       </a:lvl3pPr>
-      <a:lvl4pPr algn="l" defTabSz="342900" eaLnBrk="1" hangingPunct="1" latinLnBrk="0" marL="1028700" rtl="0">
-        <a:defRPr kern="1200" sz="1350">
+      <a:lvl4pPr marL="1028700" algn="l" defTabSz="342900" rtl="0" eaLnBrk="1" latinLnBrk="0" hangingPunct="1">
+        <a:defRPr sz="1350" kern="1200">
           <a:solidFill>
             <a:schemeClr val="tx1"/>
           </a:solidFill>
@@ -3028,8 +3028,8 @@
           <a:cs typeface="+mn-cs"/>
         </a:defRPr>
       </a:lvl4pPr>
-      <a:lvl5pPr algn="l" defTabSz="342900" eaLnBrk="1" hangingPunct="1" latinLnBrk="0" marL="1371600" rtl="0">
-        <a:defRPr kern="1200" sz="1350">
+      <a:lvl5pPr marL="1371600" algn="l" defTabSz="342900" rtl="0" eaLnBrk="1" latinLnBrk="0" hangingPunct="1">
+        <a:defRPr sz="1350" kern="1200">
           <a:solidFill>
             <a:schemeClr val="tx1"/>
           </a:solidFill>
@@ -3038,8 +3038,8 @@
           <a:cs typeface="+mn-cs"/>
         </a:defRPr>
       </a:lvl5pPr>
-      <a:lvl6pPr algn="l" defTabSz="342900" eaLnBrk="1" hangingPunct="1" latinLnBrk="0" marL="1714500" rtl="0">
-        <a:defRPr kern="1200" sz="1350">
+      <a:lvl6pPr marL="1714500" algn="l" defTabSz="342900" rtl="0" eaLnBrk="1" latinLnBrk="0" hangingPunct="1">
+        <a:defRPr sz="1350" kern="1200">
           <a:solidFill>
             <a:schemeClr val="tx1"/>
           </a:solidFill>
@@ -3048,8 +3048,8 @@
           <a:cs typeface="+mn-cs"/>
         </a:defRPr>
       </a:lvl6pPr>
-      <a:lvl7pPr algn="l" defTabSz="342900" eaLnBrk="1" hangingPunct="1" latinLnBrk="0" marL="2057400" rtl="0">
-        <a:defRPr kern="1200" sz="1350">
+      <a:lvl7pPr marL="2057400" algn="l" defTabSz="342900" rtl="0" eaLnBrk="1" latinLnBrk="0" hangingPunct="1">
+        <a:defRPr sz="1350" kern="1200">
           <a:solidFill>
             <a:schemeClr val="tx1"/>
           </a:solidFill>
@@ -3058,8 +3058,8 @@
           <a:cs typeface="+mn-cs"/>
         </a:defRPr>
       </a:lvl7pPr>
-      <a:lvl8pPr algn="l" defTabSz="342900" eaLnBrk="1" hangingPunct="1" latinLnBrk="0" marL="2400300" rtl="0">
-        <a:defRPr kern="1200" sz="1350">
+      <a:lvl8pPr marL="2400300" algn="l" defTabSz="342900" rtl="0" eaLnBrk="1" latinLnBrk="0" hangingPunct="1">
+        <a:defRPr sz="1350" kern="1200">
           <a:solidFill>
             <a:schemeClr val="tx1"/>
           </a:solidFill>
@@ -3068,8 +3068,8 @@
           <a:cs typeface="+mn-cs"/>
         </a:defRPr>
       </a:lvl8pPr>
-      <a:lvl9pPr algn="l" defTabSz="342900" eaLnBrk="1" hangingPunct="1" latinLnBrk="0" marL="2743200" rtl="0">
-        <a:defRPr kern="1200" sz="1350">
+      <a:lvl9pPr marL="2743200" algn="l" defTabSz="342900" rtl="0" eaLnBrk="1" latinLnBrk="0" hangingPunct="1">
+        <a:defRPr sz="1350" kern="1200">
           <a:solidFill>
             <a:schemeClr val="tx1"/>
           </a:solidFill>
@@ -3120,11 +3120,10 @@
           <a:bodyPr/>
           <a:lstStyle/>
           <a:p>
-            <a:pPr lvl="0" indent="0" marL="0">
+            <a:pPr marL="0" lvl="0" indent="0">
               <a:buNone/>
             </a:pPr>
             <a:r>
-              <a:rPr/>
               <a:t>Question 1 — Coffee Hub: what to stock</a:t>
             </a:r>
           </a:p>
@@ -3137,7 +3136,7 @@
             <a:spLocks noGrp="1"/>
           </p:cNvSpPr>
           <p:nvPr>
-            <p:ph idx="1" type="subTitle"/>
+            <p:ph type="subTitle" idx="1"/>
           </p:nvPr>
         </p:nvSpPr>
         <p:spPr>
@@ -3150,11 +3149,10 @@
           <a:bodyPr/>
           <a:lstStyle/>
           <a:p>
-            <a:pPr lvl="0" indent="0" marL="0">
+            <a:pPr marL="0" lvl="0" indent="0">
               <a:buNone/>
             </a:pPr>
             <a:r>
-              <a:rPr/>
               <a:t>Student 25052977</a:t>
             </a:r>
           </a:p>
@@ -3167,7 +3165,7 @@
             <a:spLocks noGrp="1"/>
           </p:cNvSpPr>
           <p:nvPr>
-            <p:ph idx="10" sz="half" type="dt"/>
+            <p:ph type="dt" sz="half" idx="10"/>
           </p:nvPr>
         </p:nvSpPr>
         <p:spPr/>
@@ -3175,11 +3173,10 @@
           <a:bodyPr/>
           <a:lstStyle/>
           <a:p>
-            <a:pPr lvl="0" indent="0" marL="0">
+            <a:pPr marL="0" lvl="0" indent="0">
               <a:buNone/>
             </a:pPr>
             <a:r>
-              <a:rPr/>
               <a:t>19 June 2026</a:t>
             </a:r>
           </a:p>
@@ -3187,6 +3184,9 @@
       </p:sp>
     </p:spTree>
   </p:cSld>
+  <p:clrMapOvr>
+    <a:masterClrMapping/>
+  </p:clrMapOvr>
 </p:sld>
 </file>
 
@@ -3222,11 +3222,10 @@
           <a:bodyPr/>
           <a:lstStyle/>
           <a:p>
-            <a:pPr lvl="0" indent="0" marL="0">
+            <a:pPr marL="0" lvl="0" indent="0">
               <a:buNone/>
             </a:pPr>
             <a:r>
-              <a:rPr/>
               <a:t>What locals like — recommended shortlist</a:t>
             </a:r>
           </a:p>
@@ -3240,11 +3239,16 @@
           </p:cNvGraphicFramePr>
           <p:nvPr>
             <p:ph idx="1"/>
+            <p:extLst>
+              <p:ext uri="{D42A27DB-BD31-4B8C-83A1-F6EECF244321}">
+                <p14:modId xmlns:p14="http://schemas.microsoft.com/office/powerpoint/2010/main" val="741874629"/>
+              </p:ext>
+            </p:extLst>
           </p:nvPr>
         </p:nvGraphicFramePr>
         <p:xfrm>
           <a:off x="457200" y="1193800"/>
-          <a:ext cx="8229600" cy="3390900"/>
+          <a:ext cx="8216900" cy="3505200"/>
         </p:xfrm>
         <a:graphic>
           <a:graphicData uri="http://schemas.openxmlformats.org/drawingml/2006/table">
@@ -3253,13 +3257,55 @@
                 <a:tableStyleId>{5C22544A-7EE6-4342-B048-85BDC9FD1C3A}</a:tableStyleId>
               </a:tblPr>
               <a:tblGrid>
-                <a:gridCol w="2933700"/>
-                <a:gridCol w="1905000"/>
-                <a:gridCol w="1028700"/>
-                <a:gridCol w="508000"/>
-                <a:gridCol w="736600"/>
-                <a:gridCol w="660400"/>
-                <a:gridCol w="444500"/>
+                <a:gridCol w="2933700">
+                  <a:extLst>
+                    <a:ext uri="{9D8B030D-6E8A-4147-A177-3AD203B41FA5}">
+                      <a16:colId xmlns:a16="http://schemas.microsoft.com/office/drawing/2014/main" val="20000"/>
+                    </a:ext>
+                  </a:extLst>
+                </a:gridCol>
+                <a:gridCol w="1905000">
+                  <a:extLst>
+                    <a:ext uri="{9D8B030D-6E8A-4147-A177-3AD203B41FA5}">
+                      <a16:colId xmlns:a16="http://schemas.microsoft.com/office/drawing/2014/main" val="20001"/>
+                    </a:ext>
+                  </a:extLst>
+                </a:gridCol>
+                <a:gridCol w="1028700">
+                  <a:extLst>
+                    <a:ext uri="{9D8B030D-6E8A-4147-A177-3AD203B41FA5}">
+                      <a16:colId xmlns:a16="http://schemas.microsoft.com/office/drawing/2014/main" val="20002"/>
+                    </a:ext>
+                  </a:extLst>
+                </a:gridCol>
+                <a:gridCol w="508000">
+                  <a:extLst>
+                    <a:ext uri="{9D8B030D-6E8A-4147-A177-3AD203B41FA5}">
+                      <a16:colId xmlns:a16="http://schemas.microsoft.com/office/drawing/2014/main" val="20003"/>
+                    </a:ext>
+                  </a:extLst>
+                </a:gridCol>
+                <a:gridCol w="736600">
+                  <a:extLst>
+                    <a:ext uri="{9D8B030D-6E8A-4147-A177-3AD203B41FA5}">
+                      <a16:colId xmlns:a16="http://schemas.microsoft.com/office/drawing/2014/main" val="20004"/>
+                    </a:ext>
+                  </a:extLst>
+                </a:gridCol>
+                <a:gridCol w="660400">
+                  <a:extLst>
+                    <a:ext uri="{9D8B030D-6E8A-4147-A177-3AD203B41FA5}">
+                      <a16:colId xmlns:a16="http://schemas.microsoft.com/office/drawing/2014/main" val="20005"/>
+                    </a:ext>
+                  </a:extLst>
+                </a:gridCol>
+                <a:gridCol w="444500">
+                  <a:extLst>
+                    <a:ext uri="{9D8B030D-6E8A-4147-A177-3AD203B41FA5}">
+                      <a16:colId xmlns:a16="http://schemas.microsoft.com/office/drawing/2014/main" val="20006"/>
+                    </a:ext>
+                  </a:extLst>
+                </a:gridCol>
               </a:tblGrid>
               <a:tr h="0">
                 <a:tc>
@@ -3267,11 +3313,11 @@
                     <a:bodyPr/>
                     <a:lstStyle/>
                     <a:p>
-                      <a:pPr lvl="0" indent="0" marL="0" algn="l">
-                        <a:buNone/>
-                      </a:pPr>
-                      <a:r>
-                        <a:rPr/>
+                      <a:pPr marL="0" lvl="0" indent="0" algn="l">
+                        <a:buNone/>
+                      </a:pPr>
+                      <a:r>
+                        <a:rPr sz="1100"/>
                         <a:t>Coffee</a:t>
                       </a:r>
                     </a:p>
@@ -3283,11 +3329,11 @@
                     <a:bodyPr/>
                     <a:lstStyle/>
                     <a:p>
-                      <a:pPr lvl="0" indent="0" marL="0" algn="l">
-                        <a:buNone/>
-                      </a:pPr>
-                      <a:r>
-                        <a:rPr/>
+                      <a:pPr marL="0" lvl="0" indent="0" algn="l">
+                        <a:buNone/>
+                      </a:pPr>
+                      <a:r>
+                        <a:rPr sz="1100"/>
                         <a:t>Roaster</a:t>
                       </a:r>
                     </a:p>
@@ -3299,11 +3345,11 @@
                     <a:bodyPr/>
                     <a:lstStyle/>
                     <a:p>
-                      <a:pPr lvl="0" indent="0" marL="0" algn="l">
-                        <a:buNone/>
-                      </a:pPr>
-                      <a:r>
-                        <a:rPr/>
+                      <a:pPr marL="0" lvl="0" indent="0" algn="l">
+                        <a:buNone/>
+                      </a:pPr>
+                      <a:r>
+                        <a:rPr sz="1100"/>
                         <a:t>Country</a:t>
                       </a:r>
                     </a:p>
@@ -3315,11 +3361,11 @@
                     <a:bodyPr/>
                     <a:lstStyle/>
                     <a:p>
-                      <a:pPr lvl="0" indent="0" marL="0" algn="r">
-                        <a:buNone/>
-                      </a:pPr>
-                      <a:r>
-                        <a:rPr/>
+                      <a:pPr marL="0" lvl="0" indent="0" algn="r">
+                        <a:buNone/>
+                      </a:pPr>
+                      <a:r>
+                        <a:rPr sz="1100"/>
                         <a:t>Rating</a:t>
                       </a:r>
                     </a:p>
@@ -3331,11 +3377,11 @@
                     <a:bodyPr/>
                     <a:lstStyle/>
                     <a:p>
-                      <a:pPr lvl="0" indent="0" marL="0" algn="r">
-                        <a:buNone/>
-                      </a:pPr>
-                      <a:r>
-                        <a:rPr/>
+                      <a:pPr marL="0" lvl="0" indent="0" algn="r">
+                        <a:buNone/>
+                      </a:pPr>
+                      <a:r>
+                        <a:rPr sz="1100"/>
                         <a:t>Cost/100g</a:t>
                       </a:r>
                     </a:p>
@@ -3347,11 +3393,11 @@
                     <a:bodyPr/>
                     <a:lstStyle/>
                     <a:p>
-                      <a:pPr lvl="0" indent="0" marL="0" algn="r">
-                        <a:buNone/>
-                      </a:pPr>
-                      <a:r>
-                        <a:rPr/>
+                      <a:pPr marL="0" lvl="0" indent="0" algn="r">
+                        <a:buNone/>
+                      </a:pPr>
+                      <a:r>
+                        <a:rPr sz="1100"/>
                         <a:t>Keywords</a:t>
                       </a:r>
                     </a:p>
@@ -3363,17 +3409,22 @@
                     <a:bodyPr/>
                     <a:lstStyle/>
                     <a:p>
-                      <a:pPr lvl="0" indent="0" marL="0" algn="r">
-                        <a:buNone/>
-                      </a:pPr>
-                      <a:r>
-                        <a:rPr/>
+                      <a:pPr marL="0" lvl="0" indent="0" algn="r">
+                        <a:buNone/>
+                      </a:pPr>
+                      <a:r>
+                        <a:rPr sz="1100"/>
                         <a:t>Value</a:t>
                       </a:r>
                     </a:p>
                   </a:txBody>
                   <a:tcPr/>
                 </a:tc>
+                <a:extLst>
+                  <a:ext uri="{0D108BD9-81ED-4DB2-BD59-A6C34878D82A}">
+                    <a16:rowId xmlns:a16="http://schemas.microsoft.com/office/drawing/2014/main" val="10000"/>
+                  </a:ext>
+                </a:extLst>
               </a:tr>
               <a:tr h="0">
                 <a:tc>
@@ -3381,106 +3432,118 @@
                     <a:bodyPr/>
                     <a:lstStyle/>
                     <a:p>
-                      <a:pPr lvl="0" indent="0" marL="0" algn="l">
-                        <a:buNone/>
-                      </a:pPr>
-                      <a:r>
-                        <a:rPr/>
+                      <a:pPr marL="0" lvl="0" indent="0" algn="l">
+                        <a:buNone/>
+                      </a:pPr>
+                      <a:r>
+                        <a:rPr sz="1100" dirty="0"/>
                         <a:t>Panama Finca San Sebastian</a:t>
                       </a:r>
                     </a:p>
                   </a:txBody>
-                </a:tc>
-                <a:tc>
-                  <a:txBody>
-                    <a:bodyPr/>
-                    <a:lstStyle/>
-                    <a:p>
-                      <a:pPr lvl="0" indent="0" marL="0" algn="l">
-                        <a:buNone/>
-                      </a:pPr>
-                      <a:r>
-                        <a:rPr/>
+                  <a:tcPr/>
+                </a:tc>
+                <a:tc>
+                  <a:txBody>
+                    <a:bodyPr/>
+                    <a:lstStyle/>
+                    <a:p>
+                      <a:pPr marL="0" lvl="0" indent="0" algn="l">
+                        <a:buNone/>
+                      </a:pPr>
+                      <a:r>
+                        <a:rPr sz="1100"/>
                         <a:t>Jackrabbit Java</a:t>
                       </a:r>
                     </a:p>
                   </a:txBody>
-                </a:tc>
-                <a:tc>
-                  <a:txBody>
-                    <a:bodyPr/>
-                    <a:lstStyle/>
-                    <a:p>
-                      <a:pPr lvl="0" indent="0" marL="0" algn="l">
-                        <a:buNone/>
-                      </a:pPr>
-                      <a:r>
-                        <a:rPr/>
+                  <a:tcPr/>
+                </a:tc>
+                <a:tc>
+                  <a:txBody>
+                    <a:bodyPr/>
+                    <a:lstStyle/>
+                    <a:p>
+                      <a:pPr marL="0" lvl="0" indent="0" algn="l">
+                        <a:buNone/>
+                      </a:pPr>
+                      <a:r>
+                        <a:rPr sz="1100"/>
                         <a:t>United States</a:t>
                       </a:r>
                     </a:p>
                   </a:txBody>
-                </a:tc>
-                <a:tc>
-                  <a:txBody>
-                    <a:bodyPr/>
-                    <a:lstStyle/>
-                    <a:p>
-                      <a:pPr lvl="0" indent="0" marL="0" algn="r">
-                        <a:buNone/>
-                      </a:pPr>
-                      <a:r>
-                        <a:rPr/>
+                  <a:tcPr/>
+                </a:tc>
+                <a:tc>
+                  <a:txBody>
+                    <a:bodyPr/>
+                    <a:lstStyle/>
+                    <a:p>
+                      <a:pPr marL="0" lvl="0" indent="0" algn="r">
+                        <a:buNone/>
+                      </a:pPr>
+                      <a:r>
+                        <a:rPr sz="1100"/>
                         <a:t>94</a:t>
                       </a:r>
                     </a:p>
                   </a:txBody>
-                </a:tc>
-                <a:tc>
-                  <a:txBody>
-                    <a:bodyPr/>
-                    <a:lstStyle/>
-                    <a:p>
-                      <a:pPr lvl="0" indent="0" marL="0" algn="r">
-                        <a:buNone/>
-                      </a:pPr>
-                      <a:r>
-                        <a:rPr/>
+                  <a:tcPr/>
+                </a:tc>
+                <a:tc>
+                  <a:txBody>
+                    <a:bodyPr/>
+                    <a:lstStyle/>
+                    <a:p>
+                      <a:pPr marL="0" lvl="0" indent="0" algn="r">
+                        <a:buNone/>
+                      </a:pPr>
+                      <a:r>
+                        <a:rPr sz="1100"/>
                         <a:t>3.53</a:t>
                       </a:r>
                     </a:p>
                   </a:txBody>
-                </a:tc>
-                <a:tc>
-                  <a:txBody>
-                    <a:bodyPr/>
-                    <a:lstStyle/>
-                    <a:p>
-                      <a:pPr lvl="0" indent="0" marL="0" algn="r">
-                        <a:buNone/>
-                      </a:pPr>
-                      <a:r>
-                        <a:rPr/>
+                  <a:tcPr/>
+                </a:tc>
+                <a:tc>
+                  <a:txBody>
+                    <a:bodyPr/>
+                    <a:lstStyle/>
+                    <a:p>
+                      <a:pPr marL="0" lvl="0" indent="0" algn="r">
+                        <a:buNone/>
+                      </a:pPr>
+                      <a:r>
+                        <a:rPr sz="1100"/>
                         <a:t>19</a:t>
                       </a:r>
                     </a:p>
                   </a:txBody>
-                </a:tc>
-                <a:tc>
-                  <a:txBody>
-                    <a:bodyPr/>
-                    <a:lstStyle/>
-                    <a:p>
-                      <a:pPr lvl="0" indent="0" marL="0" algn="r">
-                        <a:buNone/>
-                      </a:pPr>
-                      <a:r>
-                        <a:rPr/>
+                  <a:tcPr/>
+                </a:tc>
+                <a:tc>
+                  <a:txBody>
+                    <a:bodyPr/>
+                    <a:lstStyle/>
+                    <a:p>
+                      <a:pPr marL="0" lvl="0" indent="0" algn="r">
+                        <a:buNone/>
+                      </a:pPr>
+                      <a:r>
+                        <a:rPr sz="1100"/>
                         <a:t>26.63</a:t>
                       </a:r>
                     </a:p>
                   </a:txBody>
-                </a:tc>
+                  <a:tcPr/>
+                </a:tc>
+                <a:extLst>
+                  <a:ext uri="{0D108BD9-81ED-4DB2-BD59-A6C34878D82A}">
+                    <a16:rowId xmlns:a16="http://schemas.microsoft.com/office/drawing/2014/main" val="10001"/>
+                  </a:ext>
+                </a:extLst>
               </a:tr>
               <a:tr h="0">
                 <a:tc>
@@ -3488,106 +3551,118 @@
                     <a:bodyPr/>
                     <a:lstStyle/>
                     <a:p>
-                      <a:pPr lvl="0" indent="0" marL="0" algn="l">
-                        <a:buNone/>
-                      </a:pPr>
-                      <a:r>
-                        <a:rPr/>
+                      <a:pPr marL="0" lvl="0" indent="0" algn="l">
+                        <a:buNone/>
+                      </a:pPr>
+                      <a:r>
+                        <a:rPr sz="1100"/>
                         <a:t>Finca Tasta Peru</a:t>
                       </a:r>
                     </a:p>
                   </a:txBody>
-                </a:tc>
-                <a:tc>
-                  <a:txBody>
-                    <a:bodyPr/>
-                    <a:lstStyle/>
-                    <a:p>
-                      <a:pPr lvl="0" indent="0" marL="0" algn="l">
-                        <a:buNone/>
-                      </a:pPr>
-                      <a:r>
-                        <a:rPr/>
+                  <a:tcPr/>
+                </a:tc>
+                <a:tc>
+                  <a:txBody>
+                    <a:bodyPr/>
+                    <a:lstStyle/>
+                    <a:p>
+                      <a:pPr marL="0" lvl="0" indent="0" algn="l">
+                        <a:buNone/>
+                      </a:pPr>
+                      <a:r>
+                        <a:rPr sz="1100"/>
                         <a:t>Bird Rock Coffee Roasters</a:t>
                       </a:r>
                     </a:p>
                   </a:txBody>
-                </a:tc>
-                <a:tc>
-                  <a:txBody>
-                    <a:bodyPr/>
-                    <a:lstStyle/>
-                    <a:p>
-                      <a:pPr lvl="0" indent="0" marL="0" algn="l">
-                        <a:buNone/>
-                      </a:pPr>
-                      <a:r>
-                        <a:rPr/>
+                  <a:tcPr/>
+                </a:tc>
+                <a:tc>
+                  <a:txBody>
+                    <a:bodyPr/>
+                    <a:lstStyle/>
+                    <a:p>
+                      <a:pPr marL="0" lvl="0" indent="0" algn="l">
+                        <a:buNone/>
+                      </a:pPr>
+                      <a:r>
+                        <a:rPr sz="1100"/>
                         <a:t>United States</a:t>
                       </a:r>
                     </a:p>
                   </a:txBody>
-                </a:tc>
-                <a:tc>
-                  <a:txBody>
-                    <a:bodyPr/>
-                    <a:lstStyle/>
-                    <a:p>
-                      <a:pPr lvl="0" indent="0" marL="0" algn="r">
-                        <a:buNone/>
-                      </a:pPr>
-                      <a:r>
-                        <a:rPr/>
+                  <a:tcPr/>
+                </a:tc>
+                <a:tc>
+                  <a:txBody>
+                    <a:bodyPr/>
+                    <a:lstStyle/>
+                    <a:p>
+                      <a:pPr marL="0" lvl="0" indent="0" algn="r">
+                        <a:buNone/>
+                      </a:pPr>
+                      <a:r>
+                        <a:rPr sz="1100"/>
                         <a:t>93</a:t>
                       </a:r>
                     </a:p>
                   </a:txBody>
-                </a:tc>
-                <a:tc>
-                  <a:txBody>
-                    <a:bodyPr/>
-                    <a:lstStyle/>
-                    <a:p>
-                      <a:pPr lvl="0" indent="0" marL="0" algn="r">
-                        <a:buNone/>
-                      </a:pPr>
-                      <a:r>
-                        <a:rPr/>
+                  <a:tcPr/>
+                </a:tc>
+                <a:tc>
+                  <a:txBody>
+                    <a:bodyPr/>
+                    <a:lstStyle/>
+                    <a:p>
+                      <a:pPr marL="0" lvl="0" indent="0" algn="r">
+                        <a:buNone/>
+                      </a:pPr>
+                      <a:r>
+                        <a:rPr sz="1100"/>
                         <a:t>6.91</a:t>
                       </a:r>
                     </a:p>
                   </a:txBody>
-                </a:tc>
-                <a:tc>
-                  <a:txBody>
-                    <a:bodyPr/>
-                    <a:lstStyle/>
-                    <a:p>
-                      <a:pPr lvl="0" indent="0" marL="0" algn="r">
-                        <a:buNone/>
-                      </a:pPr>
-                      <a:r>
-                        <a:rPr/>
+                  <a:tcPr/>
+                </a:tc>
+                <a:tc>
+                  <a:txBody>
+                    <a:bodyPr/>
+                    <a:lstStyle/>
+                    <a:p>
+                      <a:pPr marL="0" lvl="0" indent="0" algn="r">
+                        <a:buNone/>
+                      </a:pPr>
+                      <a:r>
+                        <a:rPr sz="1100"/>
                         <a:t>19</a:t>
                       </a:r>
                     </a:p>
                   </a:txBody>
-                </a:tc>
-                <a:tc>
-                  <a:txBody>
-                    <a:bodyPr/>
-                    <a:lstStyle/>
-                    <a:p>
-                      <a:pPr lvl="0" indent="0" marL="0" algn="r">
-                        <a:buNone/>
-                      </a:pPr>
-                      <a:r>
-                        <a:rPr/>
+                  <a:tcPr/>
+                </a:tc>
+                <a:tc>
+                  <a:txBody>
+                    <a:bodyPr/>
+                    <a:lstStyle/>
+                    <a:p>
+                      <a:pPr marL="0" lvl="0" indent="0" algn="r">
+                        <a:buNone/>
+                      </a:pPr>
+                      <a:r>
+                        <a:rPr sz="1100"/>
                         <a:t>13.46</a:t>
                       </a:r>
                     </a:p>
                   </a:txBody>
-                </a:tc>
+                  <a:tcPr/>
+                </a:tc>
+                <a:extLst>
+                  <a:ext uri="{0D108BD9-81ED-4DB2-BD59-A6C34878D82A}">
+                    <a16:rowId xmlns:a16="http://schemas.microsoft.com/office/drawing/2014/main" val="10002"/>
+                  </a:ext>
+                </a:extLst>
               </a:tr>
               <a:tr h="0">
                 <a:tc>
@@ -3595,106 +3670,118 @@
                     <a:bodyPr/>
                     <a:lstStyle/>
                     <a:p>
-                      <a:pPr lvl="0" indent="0" marL="0" algn="l">
-                        <a:buNone/>
-                      </a:pPr>
-                      <a:r>
-                        <a:rPr/>
+                      <a:pPr marL="0" lvl="0" indent="0" algn="l">
+                        <a:buNone/>
+                      </a:pPr>
+                      <a:r>
+                        <a:rPr sz="1100"/>
                         <a:t>Panama Baru Geisha Natural by Joseph</a:t>
                       </a:r>
                     </a:p>
                   </a:txBody>
-                </a:tc>
-                <a:tc>
-                  <a:txBody>
-                    <a:bodyPr/>
-                    <a:lstStyle/>
-                    <a:p>
-                      <a:pPr lvl="0" indent="0" marL="0" algn="l">
-                        <a:buNone/>
-                      </a:pPr>
-                      <a:r>
-                        <a:rPr/>
+                  <a:tcPr/>
+                </a:tc>
+                <a:tc>
+                  <a:txBody>
+                    <a:bodyPr/>
+                    <a:lstStyle/>
+                    <a:p>
+                      <a:pPr marL="0" lvl="0" indent="0" algn="l">
+                        <a:buNone/>
+                      </a:pPr>
+                      <a:r>
+                        <a:rPr sz="1100"/>
                         <a:t>Kakalove Cafe</a:t>
                       </a:r>
                     </a:p>
                   </a:txBody>
-                </a:tc>
-                <a:tc>
-                  <a:txBody>
-                    <a:bodyPr/>
-                    <a:lstStyle/>
-                    <a:p>
-                      <a:pPr lvl="0" indent="0" marL="0" algn="l">
-                        <a:buNone/>
-                      </a:pPr>
-                      <a:r>
-                        <a:rPr/>
+                  <a:tcPr/>
+                </a:tc>
+                <a:tc>
+                  <a:txBody>
+                    <a:bodyPr/>
+                    <a:lstStyle/>
+                    <a:p>
+                      <a:pPr marL="0" lvl="0" indent="0" algn="l">
+                        <a:buNone/>
+                      </a:pPr>
+                      <a:r>
+                        <a:rPr sz="1100"/>
                         <a:t>Taiwan</a:t>
                       </a:r>
                     </a:p>
                   </a:txBody>
-                </a:tc>
-                <a:tc>
-                  <a:txBody>
-                    <a:bodyPr/>
-                    <a:lstStyle/>
-                    <a:p>
-                      <a:pPr lvl="0" indent="0" marL="0" algn="r">
-                        <a:buNone/>
-                      </a:pPr>
-                      <a:r>
-                        <a:rPr/>
+                  <a:tcPr/>
+                </a:tc>
+                <a:tc>
+                  <a:txBody>
+                    <a:bodyPr/>
+                    <a:lstStyle/>
+                    <a:p>
+                      <a:pPr marL="0" lvl="0" indent="0" algn="r">
+                        <a:buNone/>
+                      </a:pPr>
+                      <a:r>
+                        <a:rPr sz="1100"/>
                         <a:t>94</a:t>
                       </a:r>
                     </a:p>
                   </a:txBody>
-                </a:tc>
-                <a:tc>
-                  <a:txBody>
-                    <a:bodyPr/>
-                    <a:lstStyle/>
-                    <a:p>
-                      <a:pPr lvl="0" indent="0" marL="0" algn="r">
-                        <a:buNone/>
-                      </a:pPr>
-                      <a:r>
-                        <a:rPr/>
+                  <a:tcPr/>
+                </a:tc>
+                <a:tc>
+                  <a:txBody>
+                    <a:bodyPr/>
+                    <a:lstStyle/>
+                    <a:p>
+                      <a:pPr marL="0" lvl="0" indent="0" algn="r">
+                        <a:buNone/>
+                      </a:pPr>
+                      <a:r>
+                        <a:rPr sz="1100"/>
                         <a:t>13.45</a:t>
                       </a:r>
                     </a:p>
                   </a:txBody>
-                </a:tc>
-                <a:tc>
-                  <a:txBody>
-                    <a:bodyPr/>
-                    <a:lstStyle/>
-                    <a:p>
-                      <a:pPr lvl="0" indent="0" marL="0" algn="r">
-                        <a:buNone/>
-                      </a:pPr>
-                      <a:r>
-                        <a:rPr/>
+                  <a:tcPr/>
+                </a:tc>
+                <a:tc>
+                  <a:txBody>
+                    <a:bodyPr/>
+                    <a:lstStyle/>
+                    <a:p>
+                      <a:pPr marL="0" lvl="0" indent="0" algn="r">
+                        <a:buNone/>
+                      </a:pPr>
+                      <a:r>
+                        <a:rPr sz="1100"/>
                         <a:t>19</a:t>
                       </a:r>
                     </a:p>
                   </a:txBody>
-                </a:tc>
-                <a:tc>
-                  <a:txBody>
-                    <a:bodyPr/>
-                    <a:lstStyle/>
-                    <a:p>
-                      <a:pPr lvl="0" indent="0" marL="0" algn="r">
-                        <a:buNone/>
-                      </a:pPr>
-                      <a:r>
-                        <a:rPr/>
+                  <a:tcPr/>
+                </a:tc>
+                <a:tc>
+                  <a:txBody>
+                    <a:bodyPr/>
+                    <a:lstStyle/>
+                    <a:p>
+                      <a:pPr marL="0" lvl="0" indent="0" algn="r">
+                        <a:buNone/>
+                      </a:pPr>
+                      <a:r>
+                        <a:rPr sz="1100"/>
                         <a:t>6.99</a:t>
                       </a:r>
                     </a:p>
                   </a:txBody>
-                </a:tc>
+                  <a:tcPr/>
+                </a:tc>
+                <a:extLst>
+                  <a:ext uri="{0D108BD9-81ED-4DB2-BD59-A6C34878D82A}">
+                    <a16:rowId xmlns:a16="http://schemas.microsoft.com/office/drawing/2014/main" val="10003"/>
+                  </a:ext>
+                </a:extLst>
               </a:tr>
               <a:tr h="0">
                 <a:tc>
@@ -3702,106 +3789,118 @@
                     <a:bodyPr/>
                     <a:lstStyle/>
                     <a:p>
-                      <a:pPr lvl="0" indent="0" marL="0" algn="l">
-                        <a:buNone/>
-                      </a:pPr>
-                      <a:r>
-                        <a:rPr/>
+                      <a:pPr marL="0" lvl="0" indent="0" algn="l">
+                        <a:buNone/>
+                      </a:pPr>
+                      <a:r>
+                        <a:rPr sz="1100"/>
                         <a:t>Yemen Microlot</a:t>
                       </a:r>
                     </a:p>
                   </a:txBody>
-                </a:tc>
-                <a:tc>
-                  <a:txBody>
-                    <a:bodyPr/>
-                    <a:lstStyle/>
-                    <a:p>
-                      <a:pPr lvl="0" indent="0" marL="0" algn="l">
-                        <a:buNone/>
-                      </a:pPr>
-                      <a:r>
-                        <a:rPr/>
+                  <a:tcPr/>
+                </a:tc>
+                <a:tc>
+                  <a:txBody>
+                    <a:bodyPr/>
+                    <a:lstStyle/>
+                    <a:p>
+                      <a:pPr marL="0" lvl="0" indent="0" algn="l">
+                        <a:buNone/>
+                      </a:pPr>
+                      <a:r>
+                        <a:rPr sz="1100"/>
                         <a:t>Dragonfly Coffee Roasters</a:t>
                       </a:r>
                     </a:p>
                   </a:txBody>
-                </a:tc>
-                <a:tc>
-                  <a:txBody>
-                    <a:bodyPr/>
-                    <a:lstStyle/>
-                    <a:p>
-                      <a:pPr lvl="0" indent="0" marL="0" algn="l">
-                        <a:buNone/>
-                      </a:pPr>
-                      <a:r>
-                        <a:rPr/>
+                  <a:tcPr/>
+                </a:tc>
+                <a:tc>
+                  <a:txBody>
+                    <a:bodyPr/>
+                    <a:lstStyle/>
+                    <a:p>
+                      <a:pPr marL="0" lvl="0" indent="0" algn="l">
+                        <a:buNone/>
+                      </a:pPr>
+                      <a:r>
+                        <a:rPr sz="1100"/>
                         <a:t>United States</a:t>
                       </a:r>
                     </a:p>
                   </a:txBody>
-                </a:tc>
-                <a:tc>
-                  <a:txBody>
-                    <a:bodyPr/>
-                    <a:lstStyle/>
-                    <a:p>
-                      <a:pPr lvl="0" indent="0" marL="0" algn="r">
-                        <a:buNone/>
-                      </a:pPr>
-                      <a:r>
-                        <a:rPr/>
+                  <a:tcPr/>
+                </a:tc>
+                <a:tc>
+                  <a:txBody>
+                    <a:bodyPr/>
+                    <a:lstStyle/>
+                    <a:p>
+                      <a:pPr marL="0" lvl="0" indent="0" algn="r">
+                        <a:buNone/>
+                      </a:pPr>
+                      <a:r>
+                        <a:rPr sz="1100"/>
                         <a:t>96</a:t>
                       </a:r>
                     </a:p>
                   </a:txBody>
-                </a:tc>
-                <a:tc>
-                  <a:txBody>
-                    <a:bodyPr/>
-                    <a:lstStyle/>
-                    <a:p>
-                      <a:pPr lvl="0" indent="0" marL="0" algn="r">
-                        <a:buNone/>
-                      </a:pPr>
-                      <a:r>
-                        <a:rPr/>
+                  <a:tcPr/>
+                </a:tc>
+                <a:tc>
+                  <a:txBody>
+                    <a:bodyPr/>
+                    <a:lstStyle/>
+                    <a:p>
+                      <a:pPr marL="0" lvl="0" indent="0" algn="r">
+                        <a:buNone/>
+                      </a:pPr>
+                      <a:r>
+                        <a:rPr sz="1100"/>
                         <a:t>33.07</a:t>
                       </a:r>
                     </a:p>
                   </a:txBody>
-                </a:tc>
-                <a:tc>
-                  <a:txBody>
-                    <a:bodyPr/>
-                    <a:lstStyle/>
-                    <a:p>
-                      <a:pPr lvl="0" indent="0" marL="0" algn="r">
-                        <a:buNone/>
-                      </a:pPr>
-                      <a:r>
-                        <a:rPr/>
+                  <a:tcPr/>
+                </a:tc>
+                <a:tc>
+                  <a:txBody>
+                    <a:bodyPr/>
+                    <a:lstStyle/>
+                    <a:p>
+                      <a:pPr marL="0" lvl="0" indent="0" algn="r">
+                        <a:buNone/>
+                      </a:pPr>
+                      <a:r>
+                        <a:rPr sz="1100"/>
                         <a:t>19</a:t>
                       </a:r>
                     </a:p>
                   </a:txBody>
-                </a:tc>
-                <a:tc>
-                  <a:txBody>
-                    <a:bodyPr/>
-                    <a:lstStyle/>
-                    <a:p>
-                      <a:pPr lvl="0" indent="0" marL="0" algn="r">
-                        <a:buNone/>
-                      </a:pPr>
-                      <a:r>
-                        <a:rPr/>
+                  <a:tcPr/>
+                </a:tc>
+                <a:tc>
+                  <a:txBody>
+                    <a:bodyPr/>
+                    <a:lstStyle/>
+                    <a:p>
+                      <a:pPr marL="0" lvl="0" indent="0" algn="r">
+                        <a:buNone/>
+                      </a:pPr>
+                      <a:r>
+                        <a:rPr sz="1100"/>
                         <a:t>2.90</a:t>
                       </a:r>
                     </a:p>
                   </a:txBody>
-                </a:tc>
+                  <a:tcPr/>
+                </a:tc>
+                <a:extLst>
+                  <a:ext uri="{0D108BD9-81ED-4DB2-BD59-A6C34878D82A}">
+                    <a16:rowId xmlns:a16="http://schemas.microsoft.com/office/drawing/2014/main" val="10004"/>
+                  </a:ext>
+                </a:extLst>
               </a:tr>
               <a:tr h="0">
                 <a:tc>
@@ -3809,106 +3908,118 @@
                     <a:bodyPr/>
                     <a:lstStyle/>
                     <a:p>
-                      <a:pPr lvl="0" indent="0" marL="0" algn="l">
-                        <a:buNone/>
-                      </a:pPr>
-                      <a:r>
-                        <a:rPr/>
+                      <a:pPr marL="0" lvl="0" indent="0" algn="l">
+                        <a:buNone/>
+                      </a:pPr>
+                      <a:r>
+                        <a:rPr sz="1100"/>
                         <a:t>Ethiopia</a:t>
                       </a:r>
                     </a:p>
                   </a:txBody>
-                </a:tc>
-                <a:tc>
-                  <a:txBody>
-                    <a:bodyPr/>
-                    <a:lstStyle/>
-                    <a:p>
-                      <a:pPr lvl="0" indent="0" marL="0" algn="l">
-                        <a:buNone/>
-                      </a:pPr>
-                      <a:r>
-                        <a:rPr/>
+                  <a:tcPr/>
+                </a:tc>
+                <a:tc>
+                  <a:txBody>
+                    <a:bodyPr/>
+                    <a:lstStyle/>
+                    <a:p>
+                      <a:pPr marL="0" lvl="0" indent="0" algn="l">
+                        <a:buNone/>
+                      </a:pPr>
+                      <a:r>
+                        <a:rPr sz="1100"/>
                         <a:t>Caffeic</a:t>
                       </a:r>
                     </a:p>
                   </a:txBody>
-                </a:tc>
-                <a:tc>
-                  <a:txBody>
-                    <a:bodyPr/>
-                    <a:lstStyle/>
-                    <a:p>
-                      <a:pPr lvl="0" indent="0" marL="0" algn="l">
-                        <a:buNone/>
-                      </a:pPr>
-                      <a:r>
-                        <a:rPr/>
+                  <a:tcPr/>
+                </a:tc>
+                <a:tc>
+                  <a:txBody>
+                    <a:bodyPr/>
+                    <a:lstStyle/>
+                    <a:p>
+                      <a:pPr marL="0" lvl="0" indent="0" algn="l">
+                        <a:buNone/>
+                      </a:pPr>
+                      <a:r>
+                        <a:rPr sz="1100"/>
                         <a:t>United States</a:t>
                       </a:r>
                     </a:p>
                   </a:txBody>
-                </a:tc>
-                <a:tc>
-                  <a:txBody>
-                    <a:bodyPr/>
-                    <a:lstStyle/>
-                    <a:p>
-                      <a:pPr lvl="0" indent="0" marL="0" algn="r">
-                        <a:buNone/>
-                      </a:pPr>
-                      <a:r>
-                        <a:rPr/>
+                  <a:tcPr/>
+                </a:tc>
+                <a:tc>
+                  <a:txBody>
+                    <a:bodyPr/>
+                    <a:lstStyle/>
+                    <a:p>
+                      <a:pPr marL="0" lvl="0" indent="0" algn="r">
+                        <a:buNone/>
+                      </a:pPr>
+                      <a:r>
+                        <a:rPr sz="1100"/>
                         <a:t>93</a:t>
                       </a:r>
                     </a:p>
                   </a:txBody>
-                </a:tc>
-                <a:tc>
-                  <a:txBody>
-                    <a:bodyPr/>
-                    <a:lstStyle/>
-                    <a:p>
-                      <a:pPr lvl="0" indent="0" marL="0" algn="r">
-                        <a:buNone/>
-                      </a:pPr>
-                      <a:r>
-                        <a:rPr/>
+                  <a:tcPr/>
+                </a:tc>
+                <a:tc>
+                  <a:txBody>
+                    <a:bodyPr/>
+                    <a:lstStyle/>
+                    <a:p>
+                      <a:pPr marL="0" lvl="0" indent="0" algn="r">
+                        <a:buNone/>
+                      </a:pPr>
+                      <a:r>
+                        <a:rPr sz="1100"/>
                         <a:t>4.12</a:t>
                       </a:r>
                     </a:p>
                   </a:txBody>
-                </a:tc>
-                <a:tc>
-                  <a:txBody>
-                    <a:bodyPr/>
-                    <a:lstStyle/>
-                    <a:p>
-                      <a:pPr lvl="0" indent="0" marL="0" algn="r">
-                        <a:buNone/>
-                      </a:pPr>
-                      <a:r>
-                        <a:rPr/>
+                  <a:tcPr/>
+                </a:tc>
+                <a:tc>
+                  <a:txBody>
+                    <a:bodyPr/>
+                    <a:lstStyle/>
+                    <a:p>
+                      <a:pPr marL="0" lvl="0" indent="0" algn="r">
+                        <a:buNone/>
+                      </a:pPr>
+                      <a:r>
+                        <a:rPr sz="1100"/>
                         <a:t>18</a:t>
                       </a:r>
                     </a:p>
                   </a:txBody>
-                </a:tc>
-                <a:tc>
-                  <a:txBody>
-                    <a:bodyPr/>
-                    <a:lstStyle/>
-                    <a:p>
-                      <a:pPr lvl="0" indent="0" marL="0" algn="r">
-                        <a:buNone/>
-                      </a:pPr>
-                      <a:r>
-                        <a:rPr/>
+                  <a:tcPr/>
+                </a:tc>
+                <a:tc>
+                  <a:txBody>
+                    <a:bodyPr/>
+                    <a:lstStyle/>
+                    <a:p>
+                      <a:pPr marL="0" lvl="0" indent="0" algn="r">
+                        <a:buNone/>
+                      </a:pPr>
+                      <a:r>
+                        <a:rPr sz="1100"/>
                         <a:t>22.57</a:t>
                       </a:r>
                     </a:p>
                   </a:txBody>
-                </a:tc>
+                  <a:tcPr/>
+                </a:tc>
+                <a:extLst>
+                  <a:ext uri="{0D108BD9-81ED-4DB2-BD59-A6C34878D82A}">
+                    <a16:rowId xmlns:a16="http://schemas.microsoft.com/office/drawing/2014/main" val="10005"/>
+                  </a:ext>
+                </a:extLst>
               </a:tr>
               <a:tr h="0">
                 <a:tc>
@@ -3916,106 +4027,118 @@
                     <a:bodyPr/>
                     <a:lstStyle/>
                     <a:p>
-                      <a:pPr lvl="0" indent="0" marL="0" algn="l">
-                        <a:buNone/>
-                      </a:pPr>
-                      <a:r>
-                        <a:rPr/>
+                      <a:pPr marL="0" lvl="0" indent="0" algn="l">
+                        <a:buNone/>
+                      </a:pPr>
+                      <a:r>
+                        <a:rPr sz="1100"/>
                         <a:t>Ethiopia Yirgacheffe Chelelektu Natural</a:t>
                       </a:r>
                     </a:p>
                   </a:txBody>
-                </a:tc>
-                <a:tc>
-                  <a:txBody>
-                    <a:bodyPr/>
-                    <a:lstStyle/>
-                    <a:p>
-                      <a:pPr lvl="0" indent="0" marL="0" algn="l">
-                        <a:buNone/>
-                      </a:pPr>
-                      <a:r>
-                        <a:rPr/>
+                  <a:tcPr/>
+                </a:tc>
+                <a:tc>
+                  <a:txBody>
+                    <a:bodyPr/>
+                    <a:lstStyle/>
+                    <a:p>
+                      <a:pPr marL="0" lvl="0" indent="0" algn="l">
+                        <a:buNone/>
+                      </a:pPr>
+                      <a:r>
+                        <a:rPr sz="1100"/>
                         <a:t>Dragonfly Coffee Roasters</a:t>
                       </a:r>
                     </a:p>
                   </a:txBody>
-                </a:tc>
-                <a:tc>
-                  <a:txBody>
-                    <a:bodyPr/>
-                    <a:lstStyle/>
-                    <a:p>
-                      <a:pPr lvl="0" indent="0" marL="0" algn="l">
-                        <a:buNone/>
-                      </a:pPr>
-                      <a:r>
-                        <a:rPr/>
+                  <a:tcPr/>
+                </a:tc>
+                <a:tc>
+                  <a:txBody>
+                    <a:bodyPr/>
+                    <a:lstStyle/>
+                    <a:p>
+                      <a:pPr marL="0" lvl="0" indent="0" algn="l">
+                        <a:buNone/>
+                      </a:pPr>
+                      <a:r>
+                        <a:rPr sz="1100"/>
                         <a:t>United States</a:t>
                       </a:r>
                     </a:p>
                   </a:txBody>
-                </a:tc>
-                <a:tc>
-                  <a:txBody>
-                    <a:bodyPr/>
-                    <a:lstStyle/>
-                    <a:p>
-                      <a:pPr lvl="0" indent="0" marL="0" algn="r">
-                        <a:buNone/>
-                      </a:pPr>
-                      <a:r>
-                        <a:rPr/>
+                  <a:tcPr/>
+                </a:tc>
+                <a:tc>
+                  <a:txBody>
+                    <a:bodyPr/>
+                    <a:lstStyle/>
+                    <a:p>
+                      <a:pPr marL="0" lvl="0" indent="0" algn="r">
+                        <a:buNone/>
+                      </a:pPr>
+                      <a:r>
+                        <a:rPr sz="1100"/>
                         <a:t>96</a:t>
                       </a:r>
                     </a:p>
                   </a:txBody>
-                </a:tc>
-                <a:tc>
-                  <a:txBody>
-                    <a:bodyPr/>
-                    <a:lstStyle/>
-                    <a:p>
-                      <a:pPr lvl="0" indent="0" marL="0" algn="r">
-                        <a:buNone/>
-                      </a:pPr>
-                      <a:r>
-                        <a:rPr/>
+                  <a:tcPr/>
+                </a:tc>
+                <a:tc>
+                  <a:txBody>
+                    <a:bodyPr/>
+                    <a:lstStyle/>
+                    <a:p>
+                      <a:pPr marL="0" lvl="0" indent="0" algn="r">
+                        <a:buNone/>
+                      </a:pPr>
+                      <a:r>
+                        <a:rPr sz="1100"/>
                         <a:t>5.29</a:t>
                       </a:r>
                     </a:p>
                   </a:txBody>
-                </a:tc>
-                <a:tc>
-                  <a:txBody>
-                    <a:bodyPr/>
-                    <a:lstStyle/>
-                    <a:p>
-                      <a:pPr lvl="0" indent="0" marL="0" algn="r">
-                        <a:buNone/>
-                      </a:pPr>
-                      <a:r>
-                        <a:rPr/>
+                  <a:tcPr/>
+                </a:tc>
+                <a:tc>
+                  <a:txBody>
+                    <a:bodyPr/>
+                    <a:lstStyle/>
+                    <a:p>
+                      <a:pPr marL="0" lvl="0" indent="0" algn="r">
+                        <a:buNone/>
+                      </a:pPr>
+                      <a:r>
+                        <a:rPr sz="1100"/>
                         <a:t>18</a:t>
                       </a:r>
                     </a:p>
                   </a:txBody>
-                </a:tc>
-                <a:tc>
-                  <a:txBody>
-                    <a:bodyPr/>
-                    <a:lstStyle/>
-                    <a:p>
-                      <a:pPr lvl="0" indent="0" marL="0" algn="r">
-                        <a:buNone/>
-                      </a:pPr>
-                      <a:r>
-                        <a:rPr/>
+                  <a:tcPr/>
+                </a:tc>
+                <a:tc>
+                  <a:txBody>
+                    <a:bodyPr/>
+                    <a:lstStyle/>
+                    <a:p>
+                      <a:pPr marL="0" lvl="0" indent="0" algn="r">
+                        <a:buNone/>
+                      </a:pPr>
+                      <a:r>
+                        <a:rPr sz="1100"/>
                         <a:t>18.15</a:t>
                       </a:r>
                     </a:p>
                   </a:txBody>
-                </a:tc>
+                  <a:tcPr/>
+                </a:tc>
+                <a:extLst>
+                  <a:ext uri="{0D108BD9-81ED-4DB2-BD59-A6C34878D82A}">
+                    <a16:rowId xmlns:a16="http://schemas.microsoft.com/office/drawing/2014/main" val="10006"/>
+                  </a:ext>
+                </a:extLst>
               </a:tr>
               <a:tr h="0">
                 <a:tc>
@@ -4023,106 +4146,118 @@
                     <a:bodyPr/>
                     <a:lstStyle/>
                     <a:p>
-                      <a:pPr lvl="0" indent="0" marL="0" algn="l">
-                        <a:buNone/>
-                      </a:pPr>
-                      <a:r>
-                        <a:rPr/>
+                      <a:pPr marL="0" lvl="0" indent="0" algn="l">
+                        <a:buNone/>
+                      </a:pPr>
+                      <a:r>
+                        <a:rPr sz="1100"/>
                         <a:t>Ethiopia Guji Gigessa</a:t>
                       </a:r>
                     </a:p>
                   </a:txBody>
-                </a:tc>
-                <a:tc>
-                  <a:txBody>
-                    <a:bodyPr/>
-                    <a:lstStyle/>
-                    <a:p>
-                      <a:pPr lvl="0" indent="0" marL="0" algn="l">
-                        <a:buNone/>
-                      </a:pPr>
-                      <a:r>
-                        <a:rPr/>
+                  <a:tcPr/>
+                </a:tc>
+                <a:tc>
+                  <a:txBody>
+                    <a:bodyPr/>
+                    <a:lstStyle/>
+                    <a:p>
+                      <a:pPr marL="0" lvl="0" indent="0" algn="l">
+                        <a:buNone/>
+                      </a:pPr>
+                      <a:r>
+                        <a:rPr sz="1100"/>
                         <a:t>Roasters Note</a:t>
                       </a:r>
                     </a:p>
                   </a:txBody>
-                </a:tc>
-                <a:tc>
-                  <a:txBody>
-                    <a:bodyPr/>
-                    <a:lstStyle/>
-                    <a:p>
-                      <a:pPr lvl="0" indent="0" marL="0" algn="l">
-                        <a:buNone/>
-                      </a:pPr>
-                      <a:r>
-                        <a:rPr/>
+                  <a:tcPr/>
+                </a:tc>
+                <a:tc>
+                  <a:txBody>
+                    <a:bodyPr/>
+                    <a:lstStyle/>
+                    <a:p>
+                      <a:pPr marL="0" lvl="0" indent="0" algn="l">
+                        <a:buNone/>
+                      </a:pPr>
+                      <a:r>
+                        <a:rPr sz="1100"/>
                         <a:t>Taiwan</a:t>
                       </a:r>
                     </a:p>
                   </a:txBody>
-                </a:tc>
-                <a:tc>
-                  <a:txBody>
-                    <a:bodyPr/>
-                    <a:lstStyle/>
-                    <a:p>
-                      <a:pPr lvl="0" indent="0" marL="0" algn="r">
-                        <a:buNone/>
-                      </a:pPr>
-                      <a:r>
-                        <a:rPr/>
+                  <a:tcPr/>
+                </a:tc>
+                <a:tc>
+                  <a:txBody>
+                    <a:bodyPr/>
+                    <a:lstStyle/>
+                    <a:p>
+                      <a:pPr marL="0" lvl="0" indent="0" algn="r">
+                        <a:buNone/>
+                      </a:pPr>
+                      <a:r>
+                        <a:rPr sz="1100"/>
                         <a:t>94</a:t>
                       </a:r>
                     </a:p>
                   </a:txBody>
-                </a:tc>
-                <a:tc>
-                  <a:txBody>
-                    <a:bodyPr/>
-                    <a:lstStyle/>
-                    <a:p>
-                      <a:pPr lvl="0" indent="0" marL="0" algn="r">
-                        <a:buNone/>
-                      </a:pPr>
-                      <a:r>
-                        <a:rPr/>
+                  <a:tcPr/>
+                </a:tc>
+                <a:tc>
+                  <a:txBody>
+                    <a:bodyPr/>
+                    <a:lstStyle/>
+                    <a:p>
+                      <a:pPr marL="0" lvl="0" indent="0" algn="r">
+                        <a:buNone/>
+                      </a:pPr>
+                      <a:r>
+                        <a:rPr sz="1100"/>
                         <a:t>6.51</a:t>
                       </a:r>
                     </a:p>
                   </a:txBody>
-                </a:tc>
-                <a:tc>
-                  <a:txBody>
-                    <a:bodyPr/>
-                    <a:lstStyle/>
-                    <a:p>
-                      <a:pPr lvl="0" indent="0" marL="0" algn="r">
-                        <a:buNone/>
-                      </a:pPr>
-                      <a:r>
-                        <a:rPr/>
+                  <a:tcPr/>
+                </a:tc>
+                <a:tc>
+                  <a:txBody>
+                    <a:bodyPr/>
+                    <a:lstStyle/>
+                    <a:p>
+                      <a:pPr marL="0" lvl="0" indent="0" algn="r">
+                        <a:buNone/>
+                      </a:pPr>
+                      <a:r>
+                        <a:rPr sz="1100"/>
                         <a:t>18</a:t>
                       </a:r>
                     </a:p>
                   </a:txBody>
-                </a:tc>
-                <a:tc>
-                  <a:txBody>
-                    <a:bodyPr/>
-                    <a:lstStyle/>
-                    <a:p>
-                      <a:pPr lvl="0" indent="0" marL="0" algn="r">
-                        <a:buNone/>
-                      </a:pPr>
-                      <a:r>
-                        <a:rPr/>
+                  <a:tcPr/>
+                </a:tc>
+                <a:tc>
+                  <a:txBody>
+                    <a:bodyPr/>
+                    <a:lstStyle/>
+                    <a:p>
+                      <a:pPr marL="0" lvl="0" indent="0" algn="r">
+                        <a:buNone/>
+                      </a:pPr>
+                      <a:r>
+                        <a:rPr sz="1100"/>
                         <a:t>14.44</a:t>
                       </a:r>
                     </a:p>
                   </a:txBody>
-                </a:tc>
+                  <a:tcPr/>
+                </a:tc>
+                <a:extLst>
+                  <a:ext uri="{0D108BD9-81ED-4DB2-BD59-A6C34878D82A}">
+                    <a16:rowId xmlns:a16="http://schemas.microsoft.com/office/drawing/2014/main" val="10007"/>
+                  </a:ext>
+                </a:extLst>
               </a:tr>
               <a:tr h="0">
                 <a:tc>
@@ -4130,106 +4265,118 @@
                     <a:bodyPr/>
                     <a:lstStyle/>
                     <a:p>
-                      <a:pPr lvl="0" indent="0" marL="0" algn="l">
-                        <a:buNone/>
-                      </a:pPr>
-                      <a:r>
-                        <a:rPr/>
+                      <a:pPr marL="0" lvl="0" indent="0" algn="l">
+                        <a:buNone/>
+                      </a:pPr>
+                      <a:r>
+                        <a:rPr sz="1100"/>
                         <a:t>Ethiopia Bench Maji Natural Gesha</a:t>
                       </a:r>
                     </a:p>
                   </a:txBody>
-                </a:tc>
-                <a:tc>
-                  <a:txBody>
-                    <a:bodyPr/>
-                    <a:lstStyle/>
-                    <a:p>
-                      <a:pPr lvl="0" indent="0" marL="0" algn="l">
-                        <a:buNone/>
-                      </a:pPr>
-                      <a:r>
-                        <a:rPr/>
+                  <a:tcPr/>
+                </a:tc>
+                <a:tc>
+                  <a:txBody>
+                    <a:bodyPr/>
+                    <a:lstStyle/>
+                    <a:p>
+                      <a:pPr marL="0" lvl="0" indent="0" algn="l">
+                        <a:buNone/>
+                      </a:pPr>
+                      <a:r>
+                        <a:rPr sz="1100"/>
                         <a:t>VERYTIME</a:t>
                       </a:r>
                     </a:p>
                   </a:txBody>
-                </a:tc>
-                <a:tc>
-                  <a:txBody>
-                    <a:bodyPr/>
-                    <a:lstStyle/>
-                    <a:p>
-                      <a:pPr lvl="0" indent="0" marL="0" algn="l">
-                        <a:buNone/>
-                      </a:pPr>
-                      <a:r>
-                        <a:rPr/>
+                  <a:tcPr/>
+                </a:tc>
+                <a:tc>
+                  <a:txBody>
+                    <a:bodyPr/>
+                    <a:lstStyle/>
+                    <a:p>
+                      <a:pPr marL="0" lvl="0" indent="0" algn="l">
+                        <a:buNone/>
+                      </a:pPr>
+                      <a:r>
+                        <a:rPr sz="1100"/>
                         <a:t>Taiwan</a:t>
                       </a:r>
                     </a:p>
                   </a:txBody>
-                </a:tc>
-                <a:tc>
-                  <a:txBody>
-                    <a:bodyPr/>
-                    <a:lstStyle/>
-                    <a:p>
-                      <a:pPr lvl="0" indent="0" marL="0" algn="r">
-                        <a:buNone/>
-                      </a:pPr>
-                      <a:r>
-                        <a:rPr/>
+                  <a:tcPr/>
+                </a:tc>
+                <a:tc>
+                  <a:txBody>
+                    <a:bodyPr/>
+                    <a:lstStyle/>
+                    <a:p>
+                      <a:pPr marL="0" lvl="0" indent="0" algn="r">
+                        <a:buNone/>
+                      </a:pPr>
+                      <a:r>
+                        <a:rPr sz="1100"/>
                         <a:t>94</a:t>
                       </a:r>
                     </a:p>
                   </a:txBody>
-                </a:tc>
-                <a:tc>
-                  <a:txBody>
-                    <a:bodyPr/>
-                    <a:lstStyle/>
-                    <a:p>
-                      <a:pPr lvl="0" indent="0" marL="0" algn="r">
-                        <a:buNone/>
-                      </a:pPr>
-                      <a:r>
-                        <a:rPr/>
+                  <a:tcPr/>
+                </a:tc>
+                <a:tc>
+                  <a:txBody>
+                    <a:bodyPr/>
+                    <a:lstStyle/>
+                    <a:p>
+                      <a:pPr marL="0" lvl="0" indent="0" algn="r">
+                        <a:buNone/>
+                      </a:pPr>
+                      <a:r>
+                        <a:rPr sz="1100"/>
                         <a:t>7.79</a:t>
                       </a:r>
                     </a:p>
                   </a:txBody>
-                </a:tc>
-                <a:tc>
-                  <a:txBody>
-                    <a:bodyPr/>
-                    <a:lstStyle/>
-                    <a:p>
-                      <a:pPr lvl="0" indent="0" marL="0" algn="r">
-                        <a:buNone/>
-                      </a:pPr>
-                      <a:r>
-                        <a:rPr/>
+                  <a:tcPr/>
+                </a:tc>
+                <a:tc>
+                  <a:txBody>
+                    <a:bodyPr/>
+                    <a:lstStyle/>
+                    <a:p>
+                      <a:pPr marL="0" lvl="0" indent="0" algn="r">
+                        <a:buNone/>
+                      </a:pPr>
+                      <a:r>
+                        <a:rPr sz="1100"/>
                         <a:t>18</a:t>
                       </a:r>
                     </a:p>
                   </a:txBody>
-                </a:tc>
-                <a:tc>
-                  <a:txBody>
-                    <a:bodyPr/>
-                    <a:lstStyle/>
-                    <a:p>
-                      <a:pPr lvl="0" indent="0" marL="0" algn="r">
-                        <a:buNone/>
-                      </a:pPr>
-                      <a:r>
-                        <a:rPr/>
+                  <a:tcPr/>
+                </a:tc>
+                <a:tc>
+                  <a:txBody>
+                    <a:bodyPr/>
+                    <a:lstStyle/>
+                    <a:p>
+                      <a:pPr marL="0" lvl="0" indent="0" algn="r">
+                        <a:buNone/>
+                      </a:pPr>
+                      <a:r>
+                        <a:rPr sz="1100" dirty="0"/>
                         <a:t>12.07</a:t>
                       </a:r>
                     </a:p>
                   </a:txBody>
-                </a:tc>
+                  <a:tcPr/>
+                </a:tc>
+                <a:extLst>
+                  <a:ext uri="{0D108BD9-81ED-4DB2-BD59-A6C34878D82A}">
+                    <a16:rowId xmlns:a16="http://schemas.microsoft.com/office/drawing/2014/main" val="10008"/>
+                  </a:ext>
+                </a:extLst>
               </a:tr>
             </a:tbl>
           </a:graphicData>
@@ -4237,6 +4384,9 @@
       </p:graphicFrame>
     </p:spTree>
   </p:cSld>
+  <p:clrMapOvr>
+    <a:masterClrMapping/>
+  </p:clrMapOvr>
 </p:sld>
 </file>
 
@@ -4272,11 +4422,10 @@
           <a:bodyPr/>
           <a:lstStyle/>
           <a:p>
-            <a:pPr lvl="0" indent="0" marL="0">
+            <a:pPr marL="0" lvl="0" indent="0">
               <a:buNone/>
             </a:pPr>
             <a:r>
-              <a:rPr/>
               <a:t>Recommendation</a:t>
             </a:r>
           </a:p>
@@ -4294,7 +4443,9 @@
         </p:nvSpPr>
         <p:spPr/>
         <p:txBody>
-          <a:bodyPr/>
+          <a:bodyPr>
+            <a:normAutofit fontScale="92500" lnSpcReduction="10000"/>
+          </a:bodyPr>
           <a:lstStyle/>
           <a:p>
             <a:pPr lvl="0"/>
@@ -4303,7 +4454,6 @@
               <a:t>Stock for value over price:</a:t>
             </a:r>
             <a:r>
-              <a:rPr/>
               <a:t> cost only loosely predicts rating (rho = 0.346).</a:t>
             </a:r>
           </a:p>
@@ -4314,7 +4464,6 @@
               <a:t>Lead with Boquete Growing Region and Kiambu Growing Region:</a:t>
             </a:r>
             <a:r>
-              <a:rPr/>
               <a:t> highest average ratings among well-reviewed origins.</a:t>
             </a:r>
           </a:p>
@@ -4325,7 +4474,6 @@
               <a:t>Favour Medium-Light / Light roasts</a:t>
             </a:r>
             <a:r>
-              <a:rPr/>
               <a:t>, which carry the local specialty market.</a:t>
             </a:r>
           </a:p>
@@ -4336,7 +4484,6 @@
               <a:t>Anchor suppliers on Hula Daddy Kona Coffee</a:t>
             </a:r>
             <a:r>
-              <a:rPr/>
               <a:t> (avg rating 95.12, 24 reviews).</a:t>
             </a:r>
           </a:p>
@@ -4347,7 +4494,6 @@
               <a:t>Curate the “good local” shortlist</a:t>
             </a:r>
             <a:r>
-              <a:rPr/>
               <a:t> above: coffees that hit the survey descriptors locals use </a:t>
             </a:r>
             <a:r>
@@ -4355,7 +4501,6 @@
               <a:t>and</a:t>
             </a:r>
             <a:r>
-              <a:rPr/>
               <a:t> deliver value.</a:t>
             </a:r>
           </a:p>
@@ -4363,6 +4508,9 @@
       </p:sp>
     </p:spTree>
   </p:cSld>
+  <p:clrMapOvr>
+    <a:masterClrMapping/>
+  </p:clrMapOvr>
 </p:sld>
 </file>
 
@@ -4398,11 +4546,10 @@
           <a:bodyPr/>
           <a:lstStyle/>
           <a:p>
-            <a:pPr lvl="0" indent="0" marL="0">
+            <a:pPr marL="0" lvl="0" indent="0">
               <a:buNone/>
             </a:pPr>
             <a:r>
-              <a:rPr/>
               <a:t>The brief</a:t>
             </a:r>
           </a:p>
@@ -4423,11 +4570,10 @@
           <a:bodyPr/>
           <a:lstStyle/>
           <a:p>
-            <a:pPr lvl="0" indent="0" marL="0">
+            <a:pPr marL="0" lvl="0" indent="0">
               <a:buNone/>
             </a:pPr>
             <a:r>
-              <a:rPr/>
               <a:t>Advise a coffee entrepreneur which </a:t>
             </a:r>
             <a:r>
@@ -4435,7 +4581,6 @@
               <a:t>characteristics, regions and suppliers</a:t>
             </a:r>
             <a:r>
-              <a:rPr/>
               <a:t> to stock, using 2095 expert reviews matched against what locals actually like.</a:t>
             </a:r>
           </a:p>
@@ -4443,6 +4588,9 @@
       </p:sp>
     </p:spTree>
   </p:cSld>
+  <p:clrMapOvr>
+    <a:masterClrMapping/>
+  </p:clrMapOvr>
 </p:sld>
 </file>
 
@@ -4478,11 +4626,10 @@
           <a:bodyPr/>
           <a:lstStyle/>
           <a:p>
-            <a:pPr lvl="0" indent="0" marL="0">
+            <a:pPr marL="0" lvl="0" indent="0">
               <a:buNone/>
             </a:pPr>
             <a:r>
-              <a:rPr/>
               <a:t>Data at a glance</a:t>
             </a:r>
           </a:p>
@@ -4505,14 +4652,12 @@
           <a:p>
             <a:pPr lvl="0"/>
             <a:r>
-              <a:rPr/>
               <a:t>2095 reviews, 14 variables.</a:t>
             </a:r>
           </a:p>
           <a:p>
             <a:pPr lvl="0"/>
             <a:r>
-              <a:rPr/>
               <a:t>Survey keywords scored per review (</a:t>
             </a:r>
             <a:r>
@@ -4522,7 +4667,6 @@
               <a:t>kw_hits</a:t>
             </a:r>
             <a:r>
-              <a:rPr/>
               <a:t>): mean 11.36, max 19.</a:t>
             </a:r>
           </a:p>
@@ -4530,6 +4674,9 @@
       </p:sp>
     </p:spTree>
   </p:cSld>
+  <p:clrMapOvr>
+    <a:masterClrMapping/>
+  </p:clrMapOvr>
 </p:sld>
 </file>
 
@@ -4565,11 +4712,10 @@
           <a:bodyPr/>
           <a:lstStyle/>
           <a:p>
-            <a:pPr lvl="0" indent="0" marL="0">
+            <a:pPr marL="0" lvl="0" indent="0">
               <a:buNone/>
             </a:pPr>
             <a:r>
-              <a:rPr/>
               <a:t>Does paying more buy a better cup?</a:t>
             </a:r>
           </a:p>
@@ -4592,7 +4738,6 @@
           <a:p>
             <a:pPr lvl="0"/>
             <a:r>
-              <a:rPr/>
               <a:t>Spearman correlation between cost and rating: </a:t>
             </a:r>
             <a:r>
@@ -4600,21 +4745,18 @@
               <a:t>rho = 0.346</a:t>
             </a:r>
             <a:r>
-              <a:rPr/>
               <a:t> (p = 5.51^{-60}).</a:t>
             </a:r>
           </a:p>
           <a:p>
             <a:pPr lvl="0"/>
             <a:r>
-              <a:rPr/>
               <a:t>Some positive link, but far from deterministic.</a:t>
             </a:r>
           </a:p>
           <a:p>
             <a:pPr lvl="0"/>
             <a:r>
-              <a:rPr/>
               <a:t>Implication: stock on </a:t>
             </a:r>
             <a:r>
@@ -4622,7 +4764,6 @@
               <a:t>value</a:t>
             </a:r>
             <a:r>
-              <a:rPr/>
               <a:t>, not on price tag.</a:t>
             </a:r>
           </a:p>
@@ -4630,6 +4771,9 @@
       </p:sp>
     </p:spTree>
   </p:cSld>
+  <p:clrMapOvr>
+    <a:masterClrMapping/>
+  </p:clrMapOvr>
 </p:sld>
 </file>
 
@@ -4660,16 +4804,21 @@
             <p:ph type="title"/>
           </p:nvPr>
         </p:nvSpPr>
-        <p:spPr/>
+        <p:spPr>
+          <a:xfrm>
+            <a:off x="457200" y="234892"/>
+            <a:ext cx="8229600" cy="857250"/>
+          </a:xfrm>
+        </p:spPr>
         <p:txBody>
           <a:bodyPr/>
           <a:lstStyle/>
           <a:p>
-            <a:pPr lvl="0" indent="0" marL="0">
+            <a:pPr marL="0" lvl="0" indent="0">
               <a:buNone/>
             </a:pPr>
             <a:r>
-              <a:rPr/>
+              <a:rPr dirty="0"/>
               <a:t>Best value coffees (rating per unit cost)</a:t>
             </a:r>
           </a:p>
@@ -4683,11 +4832,16 @@
           </p:cNvGraphicFramePr>
           <p:nvPr>
             <p:ph idx="1"/>
+            <p:extLst>
+              <p:ext uri="{D42A27DB-BD31-4B8C-83A1-F6EECF244321}">
+                <p14:modId xmlns:p14="http://schemas.microsoft.com/office/powerpoint/2010/main" val="3880388467"/>
+              </p:ext>
+            </p:extLst>
           </p:nvPr>
         </p:nvGraphicFramePr>
         <p:xfrm>
-          <a:off x="457200" y="1193800"/>
-          <a:ext cx="8229600" cy="3390900"/>
+          <a:off x="971026" y="1092142"/>
+          <a:ext cx="7201948" cy="3903232"/>
         </p:xfrm>
         <a:graphic>
           <a:graphicData uri="http://schemas.openxmlformats.org/drawingml/2006/table">
@@ -4696,24 +4850,60 @@
                 <a:tableStyleId>{5C22544A-7EE6-4342-B048-85BDC9FD1C3A}</a:tableStyleId>
               </a:tblPr>
               <a:tblGrid>
-                <a:gridCol w="3098800"/>
-                <a:gridCol w="2032000"/>
-                <a:gridCol w="1143000"/>
-                <a:gridCol w="571500"/>
-                <a:gridCol w="812800"/>
-                <a:gridCol w="571500"/>
+                <a:gridCol w="2711845">
+                  <a:extLst>
+                    <a:ext uri="{9D8B030D-6E8A-4147-A177-3AD203B41FA5}">
+                      <a16:colId xmlns:a16="http://schemas.microsoft.com/office/drawing/2014/main" val="20000"/>
+                    </a:ext>
+                  </a:extLst>
+                </a:gridCol>
+                <a:gridCol w="1778259">
+                  <a:extLst>
+                    <a:ext uri="{9D8B030D-6E8A-4147-A177-3AD203B41FA5}">
+                      <a16:colId xmlns:a16="http://schemas.microsoft.com/office/drawing/2014/main" val="20001"/>
+                    </a:ext>
+                  </a:extLst>
+                </a:gridCol>
+                <a:gridCol w="1000271">
+                  <a:extLst>
+                    <a:ext uri="{9D8B030D-6E8A-4147-A177-3AD203B41FA5}">
+                      <a16:colId xmlns:a16="http://schemas.microsoft.com/office/drawing/2014/main" val="20002"/>
+                    </a:ext>
+                  </a:extLst>
+                </a:gridCol>
+                <a:gridCol w="500135">
+                  <a:extLst>
+                    <a:ext uri="{9D8B030D-6E8A-4147-A177-3AD203B41FA5}">
+                      <a16:colId xmlns:a16="http://schemas.microsoft.com/office/drawing/2014/main" val="20003"/>
+                    </a:ext>
+                  </a:extLst>
+                </a:gridCol>
+                <a:gridCol w="711303">
+                  <a:extLst>
+                    <a:ext uri="{9D8B030D-6E8A-4147-A177-3AD203B41FA5}">
+                      <a16:colId xmlns:a16="http://schemas.microsoft.com/office/drawing/2014/main" val="20004"/>
+                    </a:ext>
+                  </a:extLst>
+                </a:gridCol>
+                <a:gridCol w="500135">
+                  <a:extLst>
+                    <a:ext uri="{9D8B030D-6E8A-4147-A177-3AD203B41FA5}">
+                      <a16:colId xmlns:a16="http://schemas.microsoft.com/office/drawing/2014/main" val="20005"/>
+                    </a:ext>
+                  </a:extLst>
+                </a:gridCol>
               </a:tblGrid>
-              <a:tr h="0">
-                <a:tc>
-                  <a:txBody>
-                    <a:bodyPr/>
-                    <a:lstStyle/>
-                    <a:p>
-                      <a:pPr lvl="0" indent="0" marL="0" algn="l">
-                        <a:buNone/>
-                      </a:pPr>
-                      <a:r>
-                        <a:rPr/>
+              <a:tr h="346640">
+                <a:tc>
+                  <a:txBody>
+                    <a:bodyPr/>
+                    <a:lstStyle/>
+                    <a:p>
+                      <a:pPr marL="0" lvl="0" indent="0" algn="l">
+                        <a:buNone/>
+                      </a:pPr>
+                      <a:r>
+                        <a:rPr sz="1050" dirty="0"/>
                         <a:t>Coffee</a:t>
                       </a:r>
                     </a:p>
@@ -4725,11 +4915,11 @@
                     <a:bodyPr/>
                     <a:lstStyle/>
                     <a:p>
-                      <a:pPr lvl="0" indent="0" marL="0" algn="l">
-                        <a:buNone/>
-                      </a:pPr>
-                      <a:r>
-                        <a:rPr/>
+                      <a:pPr marL="0" lvl="0" indent="0" algn="l">
+                        <a:buNone/>
+                      </a:pPr>
+                      <a:r>
+                        <a:rPr sz="1050"/>
                         <a:t>Roaster</a:t>
                       </a:r>
                     </a:p>
@@ -4741,11 +4931,11 @@
                     <a:bodyPr/>
                     <a:lstStyle/>
                     <a:p>
-                      <a:pPr lvl="0" indent="0" marL="0" algn="l">
-                        <a:buNone/>
-                      </a:pPr>
-                      <a:r>
-                        <a:rPr/>
+                      <a:pPr marL="0" lvl="0" indent="0" algn="l">
+                        <a:buNone/>
+                      </a:pPr>
+                      <a:r>
+                        <a:rPr sz="1050"/>
                         <a:t>Country</a:t>
                       </a:r>
                     </a:p>
@@ -4757,11 +4947,11 @@
                     <a:bodyPr/>
                     <a:lstStyle/>
                     <a:p>
-                      <a:pPr lvl="0" indent="0" marL="0" algn="r">
-                        <a:buNone/>
-                      </a:pPr>
-                      <a:r>
-                        <a:rPr/>
+                      <a:pPr marL="0" lvl="0" indent="0" algn="l">
+                        <a:buNone/>
+                      </a:pPr>
+                      <a:r>
+                        <a:rPr sz="1050"/>
                         <a:t>Rating</a:t>
                       </a:r>
                     </a:p>
@@ -4773,11 +4963,11 @@
                     <a:bodyPr/>
                     <a:lstStyle/>
                     <a:p>
-                      <a:pPr lvl="0" indent="0" marL="0" algn="r">
-                        <a:buNone/>
-                      </a:pPr>
-                      <a:r>
-                        <a:rPr/>
+                      <a:pPr marL="0" lvl="0" indent="0" algn="l">
+                        <a:buNone/>
+                      </a:pPr>
+                      <a:r>
+                        <a:rPr sz="1050"/>
                         <a:t>Cost/100g</a:t>
                       </a:r>
                     </a:p>
@@ -4789,937 +4979,1052 @@
                     <a:bodyPr/>
                     <a:lstStyle/>
                     <a:p>
-                      <a:pPr lvl="0" indent="0" marL="0" algn="r">
-                        <a:buNone/>
-                      </a:pPr>
-                      <a:r>
-                        <a:rPr/>
+                      <a:pPr marL="0" lvl="0" indent="0" algn="l">
+                        <a:buNone/>
+                      </a:pPr>
+                      <a:r>
+                        <a:rPr sz="1050" dirty="0"/>
                         <a:t>Value</a:t>
                       </a:r>
                     </a:p>
                   </a:txBody>
                   <a:tcPr/>
                 </a:tc>
+                <a:extLst>
+                  <a:ext uri="{0D108BD9-81ED-4DB2-BD59-A6C34878D82A}">
+                    <a16:rowId xmlns:a16="http://schemas.microsoft.com/office/drawing/2014/main" val="10000"/>
+                  </a:ext>
+                </a:extLst>
               </a:tr>
-              <a:tr h="0">
-                <a:tc>
-                  <a:txBody>
-                    <a:bodyPr/>
-                    <a:lstStyle/>
-                    <a:p>
-                      <a:pPr lvl="0" indent="0" marL="0" algn="l">
-                        <a:buNone/>
-                      </a:pPr>
-                      <a:r>
-                        <a:rPr/>
+              <a:tr h="346640">
+                <a:tc>
+                  <a:txBody>
+                    <a:bodyPr/>
+                    <a:lstStyle/>
+                    <a:p>
+                      <a:pPr marL="0" lvl="0" indent="0" algn="l">
+                        <a:buNone/>
+                      </a:pPr>
+                      <a:r>
+                        <a:rPr sz="1050"/>
                         <a:t>Cold Brew</a:t>
                       </a:r>
                     </a:p>
                   </a:txBody>
-                </a:tc>
-                <a:tc>
-                  <a:txBody>
-                    <a:bodyPr/>
-                    <a:lstStyle/>
-                    <a:p>
-                      <a:pPr lvl="0" indent="0" marL="0" algn="l">
-                        <a:buNone/>
-                      </a:pPr>
-                      <a:r>
-                        <a:rPr/>
+                  <a:tcPr/>
+                </a:tc>
+                <a:tc>
+                  <a:txBody>
+                    <a:bodyPr/>
+                    <a:lstStyle/>
+                    <a:p>
+                      <a:pPr marL="0" lvl="0" indent="0" algn="l">
+                        <a:buNone/>
+                      </a:pPr>
+                      <a:r>
+                        <a:rPr sz="1050"/>
                         <a:t>Barefoot Coffee Roasters</a:t>
                       </a:r>
                     </a:p>
                   </a:txBody>
-                </a:tc>
-                <a:tc>
-                  <a:txBody>
-                    <a:bodyPr/>
-                    <a:lstStyle/>
-                    <a:p>
-                      <a:pPr lvl="0" indent="0" marL="0" algn="l">
-                        <a:buNone/>
-                      </a:pPr>
-                      <a:r>
-                        <a:rPr/>
+                  <a:tcPr/>
+                </a:tc>
+                <a:tc>
+                  <a:txBody>
+                    <a:bodyPr/>
+                    <a:lstStyle/>
+                    <a:p>
+                      <a:pPr marL="0" lvl="0" indent="0" algn="l">
+                        <a:buNone/>
+                      </a:pPr>
+                      <a:r>
+                        <a:rPr sz="1050"/>
                         <a:t>United States</a:t>
                       </a:r>
                     </a:p>
                   </a:txBody>
-                </a:tc>
-                <a:tc>
-                  <a:txBody>
-                    <a:bodyPr/>
-                    <a:lstStyle/>
-                    <a:p>
-                      <a:pPr lvl="0" indent="0" marL="0" algn="r">
-                        <a:buNone/>
-                      </a:pPr>
-                      <a:r>
-                        <a:rPr/>
+                  <a:tcPr/>
+                </a:tc>
+                <a:tc>
+                  <a:txBody>
+                    <a:bodyPr/>
+                    <a:lstStyle/>
+                    <a:p>
+                      <a:pPr marL="0" lvl="0" indent="0" algn="l">
+                        <a:buNone/>
+                      </a:pPr>
+                      <a:r>
+                        <a:rPr sz="1050"/>
                         <a:t>90</a:t>
                       </a:r>
                     </a:p>
                   </a:txBody>
-                </a:tc>
-                <a:tc>
-                  <a:txBody>
-                    <a:bodyPr/>
-                    <a:lstStyle/>
-                    <a:p>
-                      <a:pPr lvl="0" indent="0" marL="0" algn="r">
-                        <a:buNone/>
-                      </a:pPr>
-                      <a:r>
-                        <a:rPr/>
+                  <a:tcPr/>
+                </a:tc>
+                <a:tc>
+                  <a:txBody>
+                    <a:bodyPr/>
+                    <a:lstStyle/>
+                    <a:p>
+                      <a:pPr marL="0" lvl="0" indent="0" algn="l">
+                        <a:buNone/>
+                      </a:pPr>
+                      <a:r>
+                        <a:rPr sz="1050" dirty="0"/>
                         <a:t>0.12</a:t>
                       </a:r>
                     </a:p>
                   </a:txBody>
-                </a:tc>
-                <a:tc>
-                  <a:txBody>
-                    <a:bodyPr/>
-                    <a:lstStyle/>
-                    <a:p>
-                      <a:pPr lvl="0" indent="0" marL="0" algn="r">
-                        <a:buNone/>
-                      </a:pPr>
-                      <a:r>
-                        <a:rPr/>
+                  <a:tcPr/>
+                </a:tc>
+                <a:tc>
+                  <a:txBody>
+                    <a:bodyPr/>
+                    <a:lstStyle/>
+                    <a:p>
+                      <a:pPr marL="0" lvl="0" indent="0" algn="l">
+                        <a:buNone/>
+                      </a:pPr>
+                      <a:r>
+                        <a:rPr sz="1050"/>
                         <a:t>750.00</a:t>
                       </a:r>
                     </a:p>
                   </a:txBody>
-                </a:tc>
+                  <a:tcPr/>
+                </a:tc>
+                <a:extLst>
+                  <a:ext uri="{0D108BD9-81ED-4DB2-BD59-A6C34878D82A}">
+                    <a16:rowId xmlns:a16="http://schemas.microsoft.com/office/drawing/2014/main" val="10001"/>
+                  </a:ext>
+                </a:extLst>
               </a:tr>
-              <a:tr h="0">
-                <a:tc>
-                  <a:txBody>
-                    <a:bodyPr/>
-                    <a:lstStyle/>
-                    <a:p>
-                      <a:pPr lvl="0" indent="0" marL="0" algn="l">
-                        <a:buNone/>
-                      </a:pPr>
-                      <a:r>
-                        <a:rPr/>
+              <a:tr h="346640">
+                <a:tc>
+                  <a:txBody>
+                    <a:bodyPr/>
+                    <a:lstStyle/>
+                    <a:p>
+                      <a:pPr marL="0" lvl="0" indent="0" algn="l">
+                        <a:buNone/>
+                      </a:pPr>
+                      <a:r>
+                        <a:rPr sz="1050" dirty="0"/>
                         <a:t>Karen J Kona Red Bourbon</a:t>
                       </a:r>
                     </a:p>
                   </a:txBody>
-                </a:tc>
-                <a:tc>
-                  <a:txBody>
-                    <a:bodyPr/>
-                    <a:lstStyle/>
-                    <a:p>
-                      <a:pPr lvl="0" indent="0" marL="0" algn="l">
-                        <a:buNone/>
-                      </a:pPr>
-                      <a:r>
-                        <a:rPr/>
+                  <a:tcPr/>
+                </a:tc>
+                <a:tc>
+                  <a:txBody>
+                    <a:bodyPr/>
+                    <a:lstStyle/>
+                    <a:p>
+                      <a:pPr marL="0" lvl="0" indent="0" algn="l">
+                        <a:buNone/>
+                      </a:pPr>
+                      <a:r>
+                        <a:rPr sz="1050"/>
                         <a:t>Hula Daddy Kona Coffee</a:t>
                       </a:r>
                     </a:p>
                   </a:txBody>
-                </a:tc>
-                <a:tc>
-                  <a:txBody>
-                    <a:bodyPr/>
-                    <a:lstStyle/>
-                    <a:p>
-                      <a:pPr lvl="0" indent="0" marL="0" algn="l">
-                        <a:buNone/>
-                      </a:pPr>
-                      <a:r>
-                        <a:rPr/>
+                  <a:tcPr/>
+                </a:tc>
+                <a:tc>
+                  <a:txBody>
+                    <a:bodyPr/>
+                    <a:lstStyle/>
+                    <a:p>
+                      <a:pPr marL="0" lvl="0" indent="0" algn="l">
+                        <a:buNone/>
+                      </a:pPr>
+                      <a:r>
+                        <a:rPr sz="1050"/>
                         <a:t>Hawai’i</a:t>
                       </a:r>
                     </a:p>
                   </a:txBody>
-                </a:tc>
-                <a:tc>
-                  <a:txBody>
-                    <a:bodyPr/>
-                    <a:lstStyle/>
-                    <a:p>
-                      <a:pPr lvl="0" indent="0" marL="0" algn="r">
-                        <a:buNone/>
-                      </a:pPr>
-                      <a:r>
-                        <a:rPr/>
+                  <a:tcPr/>
+                </a:tc>
+                <a:tc>
+                  <a:txBody>
+                    <a:bodyPr/>
+                    <a:lstStyle/>
+                    <a:p>
+                      <a:pPr marL="0" lvl="0" indent="0" algn="l">
+                        <a:buNone/>
+                      </a:pPr>
+                      <a:r>
+                        <a:rPr sz="1050"/>
                         <a:t>94</a:t>
                       </a:r>
                     </a:p>
                   </a:txBody>
-                </a:tc>
-                <a:tc>
-                  <a:txBody>
-                    <a:bodyPr/>
-                    <a:lstStyle/>
-                    <a:p>
-                      <a:pPr lvl="0" indent="0" marL="0" algn="r">
-                        <a:buNone/>
-                      </a:pPr>
-                      <a:r>
-                        <a:rPr/>
+                  <a:tcPr/>
+                </a:tc>
+                <a:tc>
+                  <a:txBody>
+                    <a:bodyPr/>
+                    <a:lstStyle/>
+                    <a:p>
+                      <a:pPr marL="0" lvl="0" indent="0" algn="l">
+                        <a:buNone/>
+                      </a:pPr>
+                      <a:r>
+                        <a:rPr sz="1050"/>
                         <a:t>0.17</a:t>
                       </a:r>
                     </a:p>
                   </a:txBody>
-                </a:tc>
-                <a:tc>
-                  <a:txBody>
-                    <a:bodyPr/>
-                    <a:lstStyle/>
-                    <a:p>
-                      <a:pPr lvl="0" indent="0" marL="0" algn="r">
-                        <a:buNone/>
-                      </a:pPr>
-                      <a:r>
-                        <a:rPr/>
+                  <a:tcPr/>
+                </a:tc>
+                <a:tc>
+                  <a:txBody>
+                    <a:bodyPr/>
+                    <a:lstStyle/>
+                    <a:p>
+                      <a:pPr marL="0" lvl="0" indent="0" algn="l">
+                        <a:buNone/>
+                      </a:pPr>
+                      <a:r>
+                        <a:rPr sz="1050"/>
                         <a:t>552.94</a:t>
                       </a:r>
                     </a:p>
                   </a:txBody>
-                </a:tc>
+                  <a:tcPr/>
+                </a:tc>
+                <a:extLst>
+                  <a:ext uri="{0D108BD9-81ED-4DB2-BD59-A6C34878D82A}">
+                    <a16:rowId xmlns:a16="http://schemas.microsoft.com/office/drawing/2014/main" val="10002"/>
+                  </a:ext>
+                </a:extLst>
               </a:tr>
-              <a:tr h="0">
-                <a:tc>
-                  <a:txBody>
-                    <a:bodyPr/>
-                    <a:lstStyle/>
-                    <a:p>
-                      <a:pPr lvl="0" indent="0" marL="0" algn="l">
-                        <a:buNone/>
-                      </a:pPr>
-                      <a:r>
-                        <a:rPr/>
+              <a:tr h="333599">
+                <a:tc>
+                  <a:txBody>
+                    <a:bodyPr/>
+                    <a:lstStyle/>
+                    <a:p>
+                      <a:pPr marL="0" lvl="0" indent="0" algn="l">
+                        <a:buNone/>
+                      </a:pPr>
+                      <a:r>
+                        <a:rPr sz="1050"/>
                         <a:t>100% Guatemalan</a:t>
                       </a:r>
                     </a:p>
                   </a:txBody>
-                </a:tc>
-                <a:tc>
-                  <a:txBody>
-                    <a:bodyPr/>
-                    <a:lstStyle/>
-                    <a:p>
-                      <a:pPr lvl="0" indent="0" marL="0" algn="l">
-                        <a:buNone/>
-                      </a:pPr>
-                      <a:r>
-                        <a:rPr/>
+                  <a:tcPr/>
+                </a:tc>
+                <a:tc>
+                  <a:txBody>
+                    <a:bodyPr/>
+                    <a:lstStyle/>
+                    <a:p>
+                      <a:pPr marL="0" lvl="0" indent="0" algn="l">
+                        <a:buNone/>
+                      </a:pPr>
+                      <a:r>
+                        <a:rPr sz="1050"/>
                         <a:t>Hill’s Bros. Coffee</a:t>
                       </a:r>
                     </a:p>
                   </a:txBody>
-                </a:tc>
-                <a:tc>
-                  <a:txBody>
-                    <a:bodyPr/>
-                    <a:lstStyle/>
-                    <a:p>
-                      <a:pPr lvl="0" indent="0" marL="0" algn="l">
-                        <a:buNone/>
-                      </a:pPr>
-                      <a:r>
-                        <a:rPr/>
+                  <a:tcPr/>
+                </a:tc>
+                <a:tc>
+                  <a:txBody>
+                    <a:bodyPr/>
+                    <a:lstStyle/>
+                    <a:p>
+                      <a:pPr marL="0" lvl="0" indent="0" algn="l">
+                        <a:buNone/>
+                      </a:pPr>
+                      <a:r>
+                        <a:rPr sz="1050"/>
                         <a:t>United States</a:t>
                       </a:r>
                     </a:p>
                   </a:txBody>
-                </a:tc>
-                <a:tc>
-                  <a:txBody>
-                    <a:bodyPr/>
-                    <a:lstStyle/>
-                    <a:p>
-                      <a:pPr lvl="0" indent="0" marL="0" algn="r">
-                        <a:buNone/>
-                      </a:pPr>
-                      <a:r>
-                        <a:rPr/>
+                  <a:tcPr/>
+                </a:tc>
+                <a:tc>
+                  <a:txBody>
+                    <a:bodyPr/>
+                    <a:lstStyle/>
+                    <a:p>
+                      <a:pPr marL="0" lvl="0" indent="0" algn="l">
+                        <a:buNone/>
+                      </a:pPr>
+                      <a:r>
+                        <a:rPr sz="1050"/>
                         <a:t>87</a:t>
                       </a:r>
                     </a:p>
                   </a:txBody>
-                </a:tc>
-                <a:tc>
-                  <a:txBody>
-                    <a:bodyPr/>
-                    <a:lstStyle/>
-                    <a:p>
-                      <a:pPr lvl="0" indent="0" marL="0" algn="r">
-                        <a:buNone/>
-                      </a:pPr>
-                      <a:r>
-                        <a:rPr/>
+                  <a:tcPr/>
+                </a:tc>
+                <a:tc>
+                  <a:txBody>
+                    <a:bodyPr/>
+                    <a:lstStyle/>
+                    <a:p>
+                      <a:pPr marL="0" lvl="0" indent="0" algn="l">
+                        <a:buNone/>
+                      </a:pPr>
+                      <a:r>
+                        <a:rPr sz="1050"/>
                         <a:t>0.99</a:t>
                       </a:r>
                     </a:p>
                   </a:txBody>
-                </a:tc>
-                <a:tc>
-                  <a:txBody>
-                    <a:bodyPr/>
-                    <a:lstStyle/>
-                    <a:p>
-                      <a:pPr lvl="0" indent="0" marL="0" algn="r">
-                        <a:buNone/>
-                      </a:pPr>
-                      <a:r>
-                        <a:rPr/>
+                  <a:tcPr/>
+                </a:tc>
+                <a:tc>
+                  <a:txBody>
+                    <a:bodyPr/>
+                    <a:lstStyle/>
+                    <a:p>
+                      <a:pPr marL="0" lvl="0" indent="0" algn="l">
+                        <a:buNone/>
+                      </a:pPr>
+                      <a:r>
+                        <a:rPr sz="1050"/>
                         <a:t>87.88</a:t>
                       </a:r>
                     </a:p>
                   </a:txBody>
-                </a:tc>
+                  <a:tcPr/>
+                </a:tc>
+                <a:extLst>
+                  <a:ext uri="{0D108BD9-81ED-4DB2-BD59-A6C34878D82A}">
+                    <a16:rowId xmlns:a16="http://schemas.microsoft.com/office/drawing/2014/main" val="10003"/>
+                  </a:ext>
+                </a:extLst>
               </a:tr>
-              <a:tr h="0">
-                <a:tc>
-                  <a:txBody>
-                    <a:bodyPr/>
-                    <a:lstStyle/>
-                    <a:p>
-                      <a:pPr lvl="0" indent="0" marL="0" algn="l">
-                        <a:buNone/>
-                      </a:pPr>
-                      <a:r>
-                        <a:rPr/>
+              <a:tr h="333599">
+                <a:tc>
+                  <a:txBody>
+                    <a:bodyPr/>
+                    <a:lstStyle/>
+                    <a:p>
+                      <a:pPr marL="0" lvl="0" indent="0" algn="l">
+                        <a:buNone/>
+                      </a:pPr>
+                      <a:r>
+                        <a:rPr sz="1050"/>
                         <a:t>Espresso Blend</a:t>
                       </a:r>
                     </a:p>
                   </a:txBody>
-                </a:tc>
-                <a:tc>
-                  <a:txBody>
-                    <a:bodyPr/>
-                    <a:lstStyle/>
-                    <a:p>
-                      <a:pPr lvl="0" indent="0" marL="0" algn="l">
-                        <a:buNone/>
-                      </a:pPr>
-                      <a:r>
-                        <a:rPr/>
+                  <a:tcPr/>
+                </a:tc>
+                <a:tc>
+                  <a:txBody>
+                    <a:bodyPr/>
+                    <a:lstStyle/>
+                    <a:p>
+                      <a:pPr marL="0" lvl="0" indent="0" algn="l">
+                        <a:buNone/>
+                      </a:pPr>
+                      <a:r>
+                        <a:rPr sz="1050"/>
                         <a:t>Ba Yang Coffee</a:t>
                       </a:r>
                     </a:p>
                   </a:txBody>
-                </a:tc>
-                <a:tc>
-                  <a:txBody>
-                    <a:bodyPr/>
-                    <a:lstStyle/>
-                    <a:p>
-                      <a:pPr lvl="0" indent="0" marL="0" algn="l">
-                        <a:buNone/>
-                      </a:pPr>
-                      <a:r>
-                        <a:rPr/>
+                  <a:tcPr/>
+                </a:tc>
+                <a:tc>
+                  <a:txBody>
+                    <a:bodyPr/>
+                    <a:lstStyle/>
+                    <a:p>
+                      <a:pPr marL="0" lvl="0" indent="0" algn="l">
+                        <a:buNone/>
+                      </a:pPr>
+                      <a:r>
+                        <a:rPr sz="1050"/>
                         <a:t>Taiwan</a:t>
                       </a:r>
                     </a:p>
                   </a:txBody>
-                </a:tc>
-                <a:tc>
-                  <a:txBody>
-                    <a:bodyPr/>
-                    <a:lstStyle/>
-                    <a:p>
-                      <a:pPr lvl="0" indent="0" marL="0" algn="r">
-                        <a:buNone/>
-                      </a:pPr>
-                      <a:r>
-                        <a:rPr/>
+                  <a:tcPr/>
+                </a:tc>
+                <a:tc>
+                  <a:txBody>
+                    <a:bodyPr/>
+                    <a:lstStyle/>
+                    <a:p>
+                      <a:pPr marL="0" lvl="0" indent="0" algn="l">
+                        <a:buNone/>
+                      </a:pPr>
+                      <a:r>
+                        <a:rPr sz="1050"/>
                         <a:t>92</a:t>
                       </a:r>
                     </a:p>
                   </a:txBody>
-                </a:tc>
-                <a:tc>
-                  <a:txBody>
-                    <a:bodyPr/>
-                    <a:lstStyle/>
-                    <a:p>
-                      <a:pPr lvl="0" indent="0" marL="0" algn="r">
-                        <a:buNone/>
-                      </a:pPr>
-                      <a:r>
-                        <a:rPr/>
+                  <a:tcPr/>
+                </a:tc>
+                <a:tc>
+                  <a:txBody>
+                    <a:bodyPr/>
+                    <a:lstStyle/>
+                    <a:p>
+                      <a:pPr marL="0" lvl="0" indent="0" algn="l">
+                        <a:buNone/>
+                      </a:pPr>
+                      <a:r>
+                        <a:rPr sz="1050"/>
                         <a:t>1.13</a:t>
                       </a:r>
                     </a:p>
                   </a:txBody>
-                </a:tc>
-                <a:tc>
-                  <a:txBody>
-                    <a:bodyPr/>
-                    <a:lstStyle/>
-                    <a:p>
-                      <a:pPr lvl="0" indent="0" marL="0" algn="r">
-                        <a:buNone/>
-                      </a:pPr>
-                      <a:r>
-                        <a:rPr/>
+                  <a:tcPr/>
+                </a:tc>
+                <a:tc>
+                  <a:txBody>
+                    <a:bodyPr/>
+                    <a:lstStyle/>
+                    <a:p>
+                      <a:pPr marL="0" lvl="0" indent="0" algn="l">
+                        <a:buNone/>
+                      </a:pPr>
+                      <a:r>
+                        <a:rPr sz="1050"/>
                         <a:t>81.42</a:t>
                       </a:r>
                     </a:p>
                   </a:txBody>
-                </a:tc>
+                  <a:tcPr/>
+                </a:tc>
+                <a:extLst>
+                  <a:ext uri="{0D108BD9-81ED-4DB2-BD59-A6C34878D82A}">
+                    <a16:rowId xmlns:a16="http://schemas.microsoft.com/office/drawing/2014/main" val="10004"/>
+                  </a:ext>
+                </a:extLst>
               </a:tr>
-              <a:tr h="0">
-                <a:tc>
-                  <a:txBody>
-                    <a:bodyPr/>
-                    <a:lstStyle/>
-                    <a:p>
-                      <a:pPr lvl="0" indent="0" marL="0" algn="l">
-                        <a:buNone/>
-                      </a:pPr>
-                      <a:r>
-                        <a:rPr/>
+              <a:tr h="333599">
+                <a:tc>
+                  <a:txBody>
+                    <a:bodyPr/>
+                    <a:lstStyle/>
+                    <a:p>
+                      <a:pPr marL="0" lvl="0" indent="0" algn="l">
+                        <a:buNone/>
+                      </a:pPr>
+                      <a:r>
+                        <a:rPr sz="1050"/>
                         <a:t>Asfaw Maru Ethiopia Natural Cold Brew</a:t>
                       </a:r>
                     </a:p>
                   </a:txBody>
-                </a:tc>
-                <a:tc>
-                  <a:txBody>
-                    <a:bodyPr/>
-                    <a:lstStyle/>
-                    <a:p>
-                      <a:pPr lvl="0" indent="0" marL="0" algn="l">
-                        <a:buNone/>
-                      </a:pPr>
-                      <a:r>
-                        <a:rPr/>
+                  <a:tcPr/>
+                </a:tc>
+                <a:tc>
+                  <a:txBody>
+                    <a:bodyPr/>
+                    <a:lstStyle/>
+                    <a:p>
+                      <a:pPr marL="0" lvl="0" indent="0" algn="l">
+                        <a:buNone/>
+                      </a:pPr>
+                      <a:r>
+                        <a:rPr sz="1050"/>
                         <a:t>Collage Coffee</a:t>
                       </a:r>
                     </a:p>
                   </a:txBody>
-                </a:tc>
-                <a:tc>
-                  <a:txBody>
-                    <a:bodyPr/>
-                    <a:lstStyle/>
-                    <a:p>
-                      <a:pPr lvl="0" indent="0" marL="0" algn="l">
-                        <a:buNone/>
-                      </a:pPr>
-                      <a:r>
-                        <a:rPr/>
+                  <a:tcPr/>
+                </a:tc>
+                <a:tc>
+                  <a:txBody>
+                    <a:bodyPr/>
+                    <a:lstStyle/>
+                    <a:p>
+                      <a:pPr marL="0" lvl="0" indent="0" algn="l">
+                        <a:buNone/>
+                      </a:pPr>
+                      <a:r>
+                        <a:rPr sz="1050"/>
                         <a:t>United States</a:t>
                       </a:r>
                     </a:p>
                   </a:txBody>
-                </a:tc>
-                <a:tc>
-                  <a:txBody>
-                    <a:bodyPr/>
-                    <a:lstStyle/>
-                    <a:p>
-                      <a:pPr lvl="0" indent="0" marL="0" algn="r">
-                        <a:buNone/>
-                      </a:pPr>
-                      <a:r>
-                        <a:rPr/>
+                  <a:tcPr/>
+                </a:tc>
+                <a:tc>
+                  <a:txBody>
+                    <a:bodyPr/>
+                    <a:lstStyle/>
+                    <a:p>
+                      <a:pPr marL="0" lvl="0" indent="0" algn="l">
+                        <a:buNone/>
+                      </a:pPr>
+                      <a:r>
+                        <a:rPr sz="1050"/>
                         <a:t>93</a:t>
                       </a:r>
                     </a:p>
                   </a:txBody>
-                </a:tc>
-                <a:tc>
-                  <a:txBody>
-                    <a:bodyPr/>
-                    <a:lstStyle/>
-                    <a:p>
-                      <a:pPr lvl="0" indent="0" marL="0" algn="r">
-                        <a:buNone/>
-                      </a:pPr>
-                      <a:r>
-                        <a:rPr/>
+                  <a:tcPr/>
+                </a:tc>
+                <a:tc>
+                  <a:txBody>
+                    <a:bodyPr/>
+                    <a:lstStyle/>
+                    <a:p>
+                      <a:pPr marL="0" lvl="0" indent="0" algn="l">
+                        <a:buNone/>
+                      </a:pPr>
+                      <a:r>
+                        <a:rPr sz="1050"/>
                         <a:t>1.32</a:t>
                       </a:r>
                     </a:p>
                   </a:txBody>
-                </a:tc>
-                <a:tc>
-                  <a:txBody>
-                    <a:bodyPr/>
-                    <a:lstStyle/>
-                    <a:p>
-                      <a:pPr lvl="0" indent="0" marL="0" algn="r">
-                        <a:buNone/>
-                      </a:pPr>
-                      <a:r>
-                        <a:rPr/>
+                  <a:tcPr/>
+                </a:tc>
+                <a:tc>
+                  <a:txBody>
+                    <a:bodyPr/>
+                    <a:lstStyle/>
+                    <a:p>
+                      <a:pPr marL="0" lvl="0" indent="0" algn="l">
+                        <a:buNone/>
+                      </a:pPr>
+                      <a:r>
+                        <a:rPr sz="1050"/>
                         <a:t>70.45</a:t>
                       </a:r>
                     </a:p>
                   </a:txBody>
-                </a:tc>
+                  <a:tcPr/>
+                </a:tc>
+                <a:extLst>
+                  <a:ext uri="{0D108BD9-81ED-4DB2-BD59-A6C34878D82A}">
+                    <a16:rowId xmlns:a16="http://schemas.microsoft.com/office/drawing/2014/main" val="10005"/>
+                  </a:ext>
+                </a:extLst>
               </a:tr>
-              <a:tr h="0">
-                <a:tc>
-                  <a:txBody>
-                    <a:bodyPr/>
-                    <a:lstStyle/>
-                    <a:p>
-                      <a:pPr lvl="0" indent="0" marL="0" algn="l">
-                        <a:buNone/>
-                      </a:pPr>
-                      <a:r>
-                        <a:rPr/>
+              <a:tr h="333599">
+                <a:tc>
+                  <a:txBody>
+                    <a:bodyPr/>
+                    <a:lstStyle/>
+                    <a:p>
+                      <a:pPr marL="0" lvl="0" indent="0" algn="l">
+                        <a:buNone/>
+                      </a:pPr>
+                      <a:r>
+                        <a:rPr sz="1050"/>
                         <a:t>Ethiopia Nano Challa Cold Brew</a:t>
                       </a:r>
                     </a:p>
                   </a:txBody>
-                </a:tc>
-                <a:tc>
-                  <a:txBody>
-                    <a:bodyPr/>
-                    <a:lstStyle/>
-                    <a:p>
-                      <a:pPr lvl="0" indent="0" marL="0" algn="l">
-                        <a:buNone/>
-                      </a:pPr>
-                      <a:r>
-                        <a:rPr/>
+                  <a:tcPr/>
+                </a:tc>
+                <a:tc>
+                  <a:txBody>
+                    <a:bodyPr/>
+                    <a:lstStyle/>
+                    <a:p>
+                      <a:pPr marL="0" lvl="0" indent="0" algn="l">
+                        <a:buNone/>
+                      </a:pPr>
+                      <a:r>
+                        <a:rPr sz="1050"/>
                         <a:t>Bonfire Coffee Company</a:t>
                       </a:r>
                     </a:p>
                   </a:txBody>
-                </a:tc>
-                <a:tc>
-                  <a:txBody>
-                    <a:bodyPr/>
-                    <a:lstStyle/>
-                    <a:p>
-                      <a:pPr lvl="0" indent="0" marL="0" algn="l">
-                        <a:buNone/>
-                      </a:pPr>
-                      <a:r>
-                        <a:rPr/>
+                  <a:tcPr/>
+                </a:tc>
+                <a:tc>
+                  <a:txBody>
+                    <a:bodyPr/>
+                    <a:lstStyle/>
+                    <a:p>
+                      <a:pPr marL="0" lvl="0" indent="0" algn="l">
+                        <a:buNone/>
+                      </a:pPr>
+                      <a:r>
+                        <a:rPr sz="1050"/>
                         <a:t>United States</a:t>
                       </a:r>
                     </a:p>
                   </a:txBody>
-                </a:tc>
-                <a:tc>
-                  <a:txBody>
-                    <a:bodyPr/>
-                    <a:lstStyle/>
-                    <a:p>
-                      <a:pPr lvl="0" indent="0" marL="0" algn="r">
-                        <a:buNone/>
-                      </a:pPr>
-                      <a:r>
-                        <a:rPr/>
+                  <a:tcPr/>
+                </a:tc>
+                <a:tc>
+                  <a:txBody>
+                    <a:bodyPr/>
+                    <a:lstStyle/>
+                    <a:p>
+                      <a:pPr marL="0" lvl="0" indent="0" algn="l">
+                        <a:buNone/>
+                      </a:pPr>
+                      <a:r>
+                        <a:rPr sz="1050"/>
                         <a:t>94</a:t>
                       </a:r>
                     </a:p>
                   </a:txBody>
-                </a:tc>
-                <a:tc>
-                  <a:txBody>
-                    <a:bodyPr/>
-                    <a:lstStyle/>
-                    <a:p>
-                      <a:pPr lvl="0" indent="0" marL="0" algn="r">
-                        <a:buNone/>
-                      </a:pPr>
-                      <a:r>
-                        <a:rPr/>
+                  <a:tcPr/>
+                </a:tc>
+                <a:tc>
+                  <a:txBody>
+                    <a:bodyPr/>
+                    <a:lstStyle/>
+                    <a:p>
+                      <a:pPr marL="0" lvl="0" indent="0" algn="l">
+                        <a:buNone/>
+                      </a:pPr>
+                      <a:r>
+                        <a:rPr sz="1050"/>
                         <a:t>1.34</a:t>
                       </a:r>
                     </a:p>
                   </a:txBody>
-                </a:tc>
-                <a:tc>
-                  <a:txBody>
-                    <a:bodyPr/>
-                    <a:lstStyle/>
-                    <a:p>
-                      <a:pPr lvl="0" indent="0" marL="0" algn="r">
-                        <a:buNone/>
-                      </a:pPr>
-                      <a:r>
-                        <a:rPr/>
+                  <a:tcPr/>
+                </a:tc>
+                <a:tc>
+                  <a:txBody>
+                    <a:bodyPr/>
+                    <a:lstStyle/>
+                    <a:p>
+                      <a:pPr marL="0" lvl="0" indent="0" algn="l">
+                        <a:buNone/>
+                      </a:pPr>
+                      <a:r>
+                        <a:rPr sz="1050"/>
                         <a:t>70.15</a:t>
                       </a:r>
                     </a:p>
                   </a:txBody>
-                </a:tc>
+                  <a:tcPr/>
+                </a:tc>
+                <a:extLst>
+                  <a:ext uri="{0D108BD9-81ED-4DB2-BD59-A6C34878D82A}">
+                    <a16:rowId xmlns:a16="http://schemas.microsoft.com/office/drawing/2014/main" val="10006"/>
+                  </a:ext>
+                </a:extLst>
               </a:tr>
-              <a:tr h="0">
-                <a:tc>
-                  <a:txBody>
-                    <a:bodyPr/>
-                    <a:lstStyle/>
-                    <a:p>
-                      <a:pPr lvl="0" indent="0" marL="0" algn="l">
-                        <a:buNone/>
-                      </a:pPr>
-                      <a:r>
-                        <a:rPr/>
+              <a:tr h="333599">
+                <a:tc>
+                  <a:txBody>
+                    <a:bodyPr/>
+                    <a:lstStyle/>
+                    <a:p>
+                      <a:pPr marL="0" lvl="0" indent="0" algn="l">
+                        <a:buNone/>
+                      </a:pPr>
+                      <a:r>
+                        <a:rPr sz="1050"/>
                         <a:t>Taiwan Natural Alishan Zhuo-Wu Geisha</a:t>
                       </a:r>
                     </a:p>
                   </a:txBody>
-                </a:tc>
-                <a:tc>
-                  <a:txBody>
-                    <a:bodyPr/>
-                    <a:lstStyle/>
-                    <a:p>
-                      <a:pPr lvl="0" indent="0" marL="0" algn="l">
-                        <a:buNone/>
-                      </a:pPr>
-                      <a:r>
-                        <a:rPr/>
+                  <a:tcPr/>
+                </a:tc>
+                <a:tc>
+                  <a:txBody>
+                    <a:bodyPr/>
+                    <a:lstStyle/>
+                    <a:p>
+                      <a:pPr marL="0" lvl="0" indent="0" algn="l">
+                        <a:buNone/>
+                      </a:pPr>
+                      <a:r>
+                        <a:rPr sz="1050"/>
                         <a:t>Kakalove Cafe</a:t>
                       </a:r>
                     </a:p>
                   </a:txBody>
-                </a:tc>
-                <a:tc>
-                  <a:txBody>
-                    <a:bodyPr/>
-                    <a:lstStyle/>
-                    <a:p>
-                      <a:pPr lvl="0" indent="0" marL="0" algn="l">
-                        <a:buNone/>
-                      </a:pPr>
-                      <a:r>
-                        <a:rPr/>
+                  <a:tcPr/>
+                </a:tc>
+                <a:tc>
+                  <a:txBody>
+                    <a:bodyPr/>
+                    <a:lstStyle/>
+                    <a:p>
+                      <a:pPr marL="0" lvl="0" indent="0" algn="l">
+                        <a:buNone/>
+                      </a:pPr>
+                      <a:r>
+                        <a:rPr sz="1050"/>
                         <a:t>Taiwan</a:t>
                       </a:r>
                     </a:p>
                   </a:txBody>
-                </a:tc>
-                <a:tc>
-                  <a:txBody>
-                    <a:bodyPr/>
-                    <a:lstStyle/>
-                    <a:p>
-                      <a:pPr lvl="0" indent="0" marL="0" algn="r">
-                        <a:buNone/>
-                      </a:pPr>
-                      <a:r>
-                        <a:rPr/>
+                  <a:tcPr/>
+                </a:tc>
+                <a:tc>
+                  <a:txBody>
+                    <a:bodyPr/>
+                    <a:lstStyle/>
+                    <a:p>
+                      <a:pPr marL="0" lvl="0" indent="0" algn="l">
+                        <a:buNone/>
+                      </a:pPr>
+                      <a:r>
+                        <a:rPr sz="1050"/>
                         <a:t>95</a:t>
                       </a:r>
                     </a:p>
                   </a:txBody>
-                </a:tc>
-                <a:tc>
-                  <a:txBody>
-                    <a:bodyPr/>
-                    <a:lstStyle/>
-                    <a:p>
-                      <a:pPr lvl="0" indent="0" marL="0" algn="r">
-                        <a:buNone/>
-                      </a:pPr>
-                      <a:r>
-                        <a:rPr/>
+                  <a:tcPr/>
+                </a:tc>
+                <a:tc>
+                  <a:txBody>
+                    <a:bodyPr/>
+                    <a:lstStyle/>
+                    <a:p>
+                      <a:pPr marL="0" lvl="0" indent="0" algn="l">
+                        <a:buNone/>
+                      </a:pPr>
+                      <a:r>
+                        <a:rPr sz="1050"/>
                         <a:t>1.36</a:t>
                       </a:r>
                     </a:p>
                   </a:txBody>
-                </a:tc>
-                <a:tc>
-                  <a:txBody>
-                    <a:bodyPr/>
-                    <a:lstStyle/>
-                    <a:p>
-                      <a:pPr lvl="0" indent="0" marL="0" algn="r">
-                        <a:buNone/>
-                      </a:pPr>
-                      <a:r>
-                        <a:rPr/>
+                  <a:tcPr/>
+                </a:tc>
+                <a:tc>
+                  <a:txBody>
+                    <a:bodyPr/>
+                    <a:lstStyle/>
+                    <a:p>
+                      <a:pPr marL="0" lvl="0" indent="0" algn="l">
+                        <a:buNone/>
+                      </a:pPr>
+                      <a:r>
+                        <a:rPr sz="1050"/>
                         <a:t>69.85</a:t>
                       </a:r>
                     </a:p>
                   </a:txBody>
-                </a:tc>
+                  <a:tcPr/>
+                </a:tc>
+                <a:extLst>
+                  <a:ext uri="{0D108BD9-81ED-4DB2-BD59-A6C34878D82A}">
+                    <a16:rowId xmlns:a16="http://schemas.microsoft.com/office/drawing/2014/main" val="10007"/>
+                  </a:ext>
+                </a:extLst>
               </a:tr>
-              <a:tr h="0">
-                <a:tc>
-                  <a:txBody>
-                    <a:bodyPr/>
-                    <a:lstStyle/>
-                    <a:p>
-                      <a:pPr lvl="0" indent="0" marL="0" algn="l">
-                        <a:buNone/>
-                      </a:pPr>
-                      <a:r>
-                        <a:rPr/>
+              <a:tr h="333599">
+                <a:tc>
+                  <a:txBody>
+                    <a:bodyPr/>
+                    <a:lstStyle/>
+                    <a:p>
+                      <a:pPr marL="0" lvl="0" indent="0" algn="l">
+                        <a:buNone/>
+                      </a:pPr>
+                      <a:r>
+                        <a:rPr sz="1050"/>
                         <a:t>414 Kenya SL34</a:t>
                       </a:r>
                     </a:p>
                   </a:txBody>
-                </a:tc>
-                <a:tc>
-                  <a:txBody>
-                    <a:bodyPr/>
-                    <a:lstStyle/>
-                    <a:p>
-                      <a:pPr lvl="0" indent="0" marL="0" algn="l">
-                        <a:buNone/>
-                      </a:pPr>
-                      <a:r>
-                        <a:rPr/>
+                  <a:tcPr/>
+                </a:tc>
+                <a:tc>
+                  <a:txBody>
+                    <a:bodyPr/>
+                    <a:lstStyle/>
+                    <a:p>
+                      <a:pPr marL="0" lvl="0" indent="0" algn="l">
+                        <a:buNone/>
+                      </a:pPr>
+                      <a:r>
+                        <a:rPr sz="1050"/>
                         <a:t>Mr. Chao Coffee</a:t>
                       </a:r>
                     </a:p>
                   </a:txBody>
-                </a:tc>
-                <a:tc>
-                  <a:txBody>
-                    <a:bodyPr/>
-                    <a:lstStyle/>
-                    <a:p>
-                      <a:pPr lvl="0" indent="0" marL="0" algn="l">
-                        <a:buNone/>
-                      </a:pPr>
-                      <a:r>
-                        <a:rPr/>
+                  <a:tcPr/>
+                </a:tc>
+                <a:tc>
+                  <a:txBody>
+                    <a:bodyPr/>
+                    <a:lstStyle/>
+                    <a:p>
+                      <a:pPr marL="0" lvl="0" indent="0" algn="l">
+                        <a:buNone/>
+                      </a:pPr>
+                      <a:r>
+                        <a:rPr sz="1050"/>
                         <a:t>Taiwan</a:t>
                       </a:r>
                     </a:p>
                   </a:txBody>
-                </a:tc>
-                <a:tc>
-                  <a:txBody>
-                    <a:bodyPr/>
-                    <a:lstStyle/>
-                    <a:p>
-                      <a:pPr lvl="0" indent="0" marL="0" algn="r">
-                        <a:buNone/>
-                      </a:pPr>
-                      <a:r>
-                        <a:rPr/>
+                  <a:tcPr/>
+                </a:tc>
+                <a:tc>
+                  <a:txBody>
+                    <a:bodyPr/>
+                    <a:lstStyle/>
+                    <a:p>
+                      <a:pPr marL="0" lvl="0" indent="0" algn="l">
+                        <a:buNone/>
+                      </a:pPr>
+                      <a:r>
+                        <a:rPr sz="1050"/>
                         <a:t>92</a:t>
                       </a:r>
                     </a:p>
                   </a:txBody>
-                </a:tc>
-                <a:tc>
-                  <a:txBody>
-                    <a:bodyPr/>
-                    <a:lstStyle/>
-                    <a:p>
-                      <a:pPr lvl="0" indent="0" marL="0" algn="r">
-                        <a:buNone/>
-                      </a:pPr>
-                      <a:r>
-                        <a:rPr/>
+                  <a:tcPr/>
+                </a:tc>
+                <a:tc>
+                  <a:txBody>
+                    <a:bodyPr/>
+                    <a:lstStyle/>
+                    <a:p>
+                      <a:pPr marL="0" lvl="0" indent="0" algn="l">
+                        <a:buNone/>
+                      </a:pPr>
+                      <a:r>
+                        <a:rPr sz="1050"/>
                         <a:t>1.41</a:t>
                       </a:r>
                     </a:p>
                   </a:txBody>
-                </a:tc>
-                <a:tc>
-                  <a:txBody>
-                    <a:bodyPr/>
-                    <a:lstStyle/>
-                    <a:p>
-                      <a:pPr lvl="0" indent="0" marL="0" algn="r">
-                        <a:buNone/>
-                      </a:pPr>
-                      <a:r>
-                        <a:rPr/>
+                  <a:tcPr/>
+                </a:tc>
+                <a:tc>
+                  <a:txBody>
+                    <a:bodyPr/>
+                    <a:lstStyle/>
+                    <a:p>
+                      <a:pPr marL="0" lvl="0" indent="0" algn="l">
+                        <a:buNone/>
+                      </a:pPr>
+                      <a:r>
+                        <a:rPr sz="1050"/>
                         <a:t>65.25</a:t>
                       </a:r>
                     </a:p>
                   </a:txBody>
-                </a:tc>
+                  <a:tcPr/>
+                </a:tc>
+                <a:extLst>
+                  <a:ext uri="{0D108BD9-81ED-4DB2-BD59-A6C34878D82A}">
+                    <a16:rowId xmlns:a16="http://schemas.microsoft.com/office/drawing/2014/main" val="10008"/>
+                  </a:ext>
+                </a:extLst>
               </a:tr>
-              <a:tr h="0">
-                <a:tc>
-                  <a:txBody>
-                    <a:bodyPr/>
-                    <a:lstStyle/>
-                    <a:p>
-                      <a:pPr lvl="0" indent="0" marL="0" algn="l">
-                        <a:buNone/>
-                      </a:pPr>
-                      <a:r>
-                        <a:rPr/>
+              <a:tr h="333599">
+                <a:tc>
+                  <a:txBody>
+                    <a:bodyPr/>
+                    <a:lstStyle/>
+                    <a:p>
+                      <a:pPr marL="0" lvl="0" indent="0" algn="l">
+                        <a:buNone/>
+                      </a:pPr>
+                      <a:r>
+                        <a:rPr sz="1050"/>
                         <a:t>5a Sur</a:t>
                       </a:r>
                     </a:p>
                   </a:txBody>
-                </a:tc>
-                <a:tc>
-                  <a:txBody>
-                    <a:bodyPr/>
-                    <a:lstStyle/>
-                    <a:p>
-                      <a:pPr lvl="0" indent="0" marL="0" algn="l">
-                        <a:buNone/>
-                      </a:pPr>
-                      <a:r>
-                        <a:rPr/>
+                  <a:tcPr/>
+                </a:tc>
+                <a:tc>
+                  <a:txBody>
+                    <a:bodyPr/>
+                    <a:lstStyle/>
+                    <a:p>
+                      <a:pPr marL="0" lvl="0" indent="0" algn="l">
+                        <a:buNone/>
+                      </a:pPr>
+                      <a:r>
+                        <a:rPr sz="1050"/>
                         <a:t>El Gran Cafe</a:t>
                       </a:r>
                     </a:p>
                   </a:txBody>
-                </a:tc>
-                <a:tc>
-                  <a:txBody>
-                    <a:bodyPr/>
-                    <a:lstStyle/>
-                    <a:p>
-                      <a:pPr lvl="0" indent="0" marL="0" algn="l">
-                        <a:buNone/>
-                      </a:pPr>
-                      <a:r>
-                        <a:rPr/>
+                  <a:tcPr/>
+                </a:tc>
+                <a:tc>
+                  <a:txBody>
+                    <a:bodyPr/>
+                    <a:lstStyle/>
+                    <a:p>
+                      <a:pPr marL="0" lvl="0" indent="0" algn="l">
+                        <a:buNone/>
+                      </a:pPr>
+                      <a:r>
+                        <a:rPr sz="1050"/>
                         <a:t>Guatemala</a:t>
                       </a:r>
                     </a:p>
                   </a:txBody>
-                </a:tc>
-                <a:tc>
-                  <a:txBody>
-                    <a:bodyPr/>
-                    <a:lstStyle/>
-                    <a:p>
-                      <a:pPr lvl="0" indent="0" marL="0" algn="r">
-                        <a:buNone/>
-                      </a:pPr>
-                      <a:r>
-                        <a:rPr/>
+                  <a:tcPr/>
+                </a:tc>
+                <a:tc>
+                  <a:txBody>
+                    <a:bodyPr/>
+                    <a:lstStyle/>
+                    <a:p>
+                      <a:pPr marL="0" lvl="0" indent="0" algn="l">
+                        <a:buNone/>
+                      </a:pPr>
+                      <a:r>
+                        <a:rPr sz="1050"/>
                         <a:t>91</a:t>
                       </a:r>
                     </a:p>
                   </a:txBody>
-                </a:tc>
-                <a:tc>
-                  <a:txBody>
-                    <a:bodyPr/>
-                    <a:lstStyle/>
-                    <a:p>
-                      <a:pPr lvl="0" indent="0" marL="0" algn="r">
-                        <a:buNone/>
-                      </a:pPr>
-                      <a:r>
-                        <a:rPr/>
+                  <a:tcPr/>
+                </a:tc>
+                <a:tc>
+                  <a:txBody>
+                    <a:bodyPr/>
+                    <a:lstStyle/>
+                    <a:p>
+                      <a:pPr marL="0" lvl="0" indent="0" algn="l">
+                        <a:buNone/>
+                      </a:pPr>
+                      <a:r>
+                        <a:rPr sz="1050"/>
                         <a:t>1.47</a:t>
                       </a:r>
                     </a:p>
                   </a:txBody>
-                </a:tc>
-                <a:tc>
-                  <a:txBody>
-                    <a:bodyPr/>
-                    <a:lstStyle/>
-                    <a:p>
-                      <a:pPr lvl="0" indent="0" marL="0" algn="r">
-                        <a:buNone/>
-                      </a:pPr>
-                      <a:r>
-                        <a:rPr/>
+                  <a:tcPr/>
+                </a:tc>
+                <a:tc>
+                  <a:txBody>
+                    <a:bodyPr/>
+                    <a:lstStyle/>
+                    <a:p>
+                      <a:pPr marL="0" lvl="0" indent="0" algn="l">
+                        <a:buNone/>
+                      </a:pPr>
+                      <a:r>
+                        <a:rPr sz="1050"/>
                         <a:t>61.90</a:t>
                       </a:r>
                     </a:p>
                   </a:txBody>
-                </a:tc>
+                  <a:tcPr/>
+                </a:tc>
+                <a:extLst>
+                  <a:ext uri="{0D108BD9-81ED-4DB2-BD59-A6C34878D82A}">
+                    <a16:rowId xmlns:a16="http://schemas.microsoft.com/office/drawing/2014/main" val="10009"/>
+                  </a:ext>
+                </a:extLst>
               </a:tr>
-              <a:tr h="0">
-                <a:tc>
-                  <a:txBody>
-                    <a:bodyPr/>
-                    <a:lstStyle/>
-                    <a:p>
-                      <a:pPr lvl="0" indent="0" marL="0" algn="l">
-                        <a:buNone/>
-                      </a:pPr>
-                      <a:r>
-                        <a:rPr/>
+              <a:tr h="333599">
+                <a:tc>
+                  <a:txBody>
+                    <a:bodyPr/>
+                    <a:lstStyle/>
+                    <a:p>
+                      <a:pPr marL="0" lvl="0" indent="0" algn="l">
+                        <a:buNone/>
+                      </a:pPr>
+                      <a:r>
+                        <a:rPr sz="1050"/>
                         <a:t>5a Poniente</a:t>
                       </a:r>
                     </a:p>
                   </a:txBody>
-                </a:tc>
-                <a:tc>
-                  <a:txBody>
-                    <a:bodyPr/>
-                    <a:lstStyle/>
-                    <a:p>
-                      <a:pPr lvl="0" indent="0" marL="0" algn="l">
-                        <a:buNone/>
-                      </a:pPr>
-                      <a:r>
-                        <a:rPr/>
+                  <a:tcPr/>
+                </a:tc>
+                <a:tc>
+                  <a:txBody>
+                    <a:bodyPr/>
+                    <a:lstStyle/>
+                    <a:p>
+                      <a:pPr marL="0" lvl="0" indent="0" algn="l">
+                        <a:buNone/>
+                      </a:pPr>
+                      <a:r>
+                        <a:rPr sz="1050"/>
                         <a:t>El Gran Cafe</a:t>
                       </a:r>
                     </a:p>
                   </a:txBody>
-                </a:tc>
-                <a:tc>
-                  <a:txBody>
-                    <a:bodyPr/>
-                    <a:lstStyle/>
-                    <a:p>
-                      <a:pPr lvl="0" indent="0" marL="0" algn="l">
-                        <a:buNone/>
-                      </a:pPr>
-                      <a:r>
-                        <a:rPr/>
+                  <a:tcPr/>
+                </a:tc>
+                <a:tc>
+                  <a:txBody>
+                    <a:bodyPr/>
+                    <a:lstStyle/>
+                    <a:p>
+                      <a:pPr marL="0" lvl="0" indent="0" algn="l">
+                        <a:buNone/>
+                      </a:pPr>
+                      <a:r>
+                        <a:rPr sz="1050"/>
                         <a:t>Guatemala</a:t>
                       </a:r>
                     </a:p>
                   </a:txBody>
-                </a:tc>
-                <a:tc>
-                  <a:txBody>
-                    <a:bodyPr/>
-                    <a:lstStyle/>
-                    <a:p>
-                      <a:pPr lvl="0" indent="0" marL="0" algn="r">
-                        <a:buNone/>
-                      </a:pPr>
-                      <a:r>
-                        <a:rPr/>
+                  <a:tcPr/>
+                </a:tc>
+                <a:tc>
+                  <a:txBody>
+                    <a:bodyPr/>
+                    <a:lstStyle/>
+                    <a:p>
+                      <a:pPr marL="0" lvl="0" indent="0" algn="l">
+                        <a:buNone/>
+                      </a:pPr>
+                      <a:r>
+                        <a:rPr sz="1050"/>
                         <a:t>91</a:t>
                       </a:r>
                     </a:p>
                   </a:txBody>
-                </a:tc>
-                <a:tc>
-                  <a:txBody>
-                    <a:bodyPr/>
-                    <a:lstStyle/>
-                    <a:p>
-                      <a:pPr lvl="0" indent="0" marL="0" algn="r">
-                        <a:buNone/>
-                      </a:pPr>
-                      <a:r>
-                        <a:rPr/>
+                  <a:tcPr/>
+                </a:tc>
+                <a:tc>
+                  <a:txBody>
+                    <a:bodyPr/>
+                    <a:lstStyle/>
+                    <a:p>
+                      <a:pPr marL="0" lvl="0" indent="0" algn="l">
+                        <a:buNone/>
+                      </a:pPr>
+                      <a:r>
+                        <a:rPr sz="1050"/>
                         <a:t>1.47</a:t>
                       </a:r>
                     </a:p>
                   </a:txBody>
-                </a:tc>
-                <a:tc>
-                  <a:txBody>
-                    <a:bodyPr/>
-                    <a:lstStyle/>
-                    <a:p>
-                      <a:pPr lvl="0" indent="0" marL="0" algn="r">
-                        <a:buNone/>
-                      </a:pPr>
-                      <a:r>
-                        <a:rPr/>
+                  <a:tcPr/>
+                </a:tc>
+                <a:tc>
+                  <a:txBody>
+                    <a:bodyPr/>
+                    <a:lstStyle/>
+                    <a:p>
+                      <a:pPr marL="0" lvl="0" indent="0" algn="l">
+                        <a:buNone/>
+                      </a:pPr>
+                      <a:r>
+                        <a:rPr sz="1050" dirty="0"/>
                         <a:t>61.90</a:t>
                       </a:r>
                     </a:p>
                   </a:txBody>
-                </a:tc>
+                  <a:tcPr/>
+                </a:tc>
+                <a:extLst>
+                  <a:ext uri="{0D108BD9-81ED-4DB2-BD59-A6C34878D82A}">
+                    <a16:rowId xmlns:a16="http://schemas.microsoft.com/office/drawing/2014/main" val="10010"/>
+                  </a:ext>
+                </a:extLst>
               </a:tr>
             </a:tbl>
           </a:graphicData>
@@ -5727,6 +6032,9 @@
       </p:graphicFrame>
     </p:spTree>
   </p:cSld>
+  <p:clrMapOvr>
+    <a:masterClrMapping/>
+  </p:clrMapOvr>
 </p:sld>
 </file>
 
@@ -5762,11 +6070,10 @@
           <a:bodyPr/>
           <a:lstStyle/>
           <a:p>
-            <a:pPr lvl="0" indent="0" marL="0">
+            <a:pPr marL="0" lvl="0" indent="0">
               <a:buNone/>
             </a:pPr>
             <a:r>
-              <a:rPr/>
               <a:t>Best origin regions</a:t>
             </a:r>
           </a:p>
@@ -5784,7 +6091,7 @@
         </p:nvGraphicFramePr>
         <p:xfrm>
           <a:off x="457200" y="1193800"/>
-          <a:ext cx="8229600" cy="3390900"/>
+          <a:ext cx="8191500" cy="3497580"/>
         </p:xfrm>
         <a:graphic>
           <a:graphicData uri="http://schemas.openxmlformats.org/drawingml/2006/table">
@@ -5793,11 +6100,41 @@
                 <a:tableStyleId>{5C22544A-7EE6-4342-B048-85BDC9FD1C3A}</a:tableStyleId>
               </a:tblPr>
               <a:tblGrid>
-                <a:gridCol w="1638300"/>
-                <a:gridCol w="1638300"/>
-                <a:gridCol w="1638300"/>
-                <a:gridCol w="1638300"/>
-                <a:gridCol w="1638300"/>
+                <a:gridCol w="1638300">
+                  <a:extLst>
+                    <a:ext uri="{9D8B030D-6E8A-4147-A177-3AD203B41FA5}">
+                      <a16:colId xmlns:a16="http://schemas.microsoft.com/office/drawing/2014/main" val="20000"/>
+                    </a:ext>
+                  </a:extLst>
+                </a:gridCol>
+                <a:gridCol w="1638300">
+                  <a:extLst>
+                    <a:ext uri="{9D8B030D-6E8A-4147-A177-3AD203B41FA5}">
+                      <a16:colId xmlns:a16="http://schemas.microsoft.com/office/drawing/2014/main" val="20001"/>
+                    </a:ext>
+                  </a:extLst>
+                </a:gridCol>
+                <a:gridCol w="1638300">
+                  <a:extLst>
+                    <a:ext uri="{9D8B030D-6E8A-4147-A177-3AD203B41FA5}">
+                      <a16:colId xmlns:a16="http://schemas.microsoft.com/office/drawing/2014/main" val="20002"/>
+                    </a:ext>
+                  </a:extLst>
+                </a:gridCol>
+                <a:gridCol w="1638300">
+                  <a:extLst>
+                    <a:ext uri="{9D8B030D-6E8A-4147-A177-3AD203B41FA5}">
+                      <a16:colId xmlns:a16="http://schemas.microsoft.com/office/drawing/2014/main" val="20003"/>
+                    </a:ext>
+                  </a:extLst>
+                </a:gridCol>
+                <a:gridCol w="1638300">
+                  <a:extLst>
+                    <a:ext uri="{9D8B030D-6E8A-4147-A177-3AD203B41FA5}">
+                      <a16:colId xmlns:a16="http://schemas.microsoft.com/office/drawing/2014/main" val="20004"/>
+                    </a:ext>
+                  </a:extLst>
+                </a:gridCol>
               </a:tblGrid>
               <a:tr h="0">
                 <a:tc>
@@ -5805,11 +6142,10 @@
                     <a:bodyPr/>
                     <a:lstStyle/>
                     <a:p>
-                      <a:pPr lvl="0" indent="0" marL="0" algn="l">
-                        <a:buNone/>
-                      </a:pPr>
-                      <a:r>
-                        <a:rPr/>
+                      <a:pPr marL="0" lvl="0" indent="0" algn="l">
+                        <a:buNone/>
+                      </a:pPr>
+                      <a:r>
                         <a:t>Region</a:t>
                       </a:r>
                     </a:p>
@@ -5821,11 +6157,10 @@
                     <a:bodyPr/>
                     <a:lstStyle/>
                     <a:p>
-                      <a:pPr lvl="0" indent="0" marL="0" algn="r">
-                        <a:buNone/>
-                      </a:pPr>
-                      <a:r>
-                        <a:rPr/>
+                      <a:pPr marL="0" lvl="0" indent="0" algn="r">
+                        <a:buNone/>
+                      </a:pPr>
+                      <a:r>
                         <a:t>n</a:t>
                       </a:r>
                     </a:p>
@@ -5837,11 +6172,10 @@
                     <a:bodyPr/>
                     <a:lstStyle/>
                     <a:p>
-                      <a:pPr lvl="0" indent="0" marL="0" algn="r">
-                        <a:buNone/>
-                      </a:pPr>
-                      <a:r>
-                        <a:rPr/>
+                      <a:pPr marL="0" lvl="0" indent="0" algn="r">
+                        <a:buNone/>
+                      </a:pPr>
+                      <a:r>
                         <a:t>avg_rating</a:t>
                       </a:r>
                     </a:p>
@@ -5853,11 +6187,10 @@
                     <a:bodyPr/>
                     <a:lstStyle/>
                     <a:p>
-                      <a:pPr lvl="0" indent="0" marL="0" algn="r">
-                        <a:buNone/>
-                      </a:pPr>
-                      <a:r>
-                        <a:rPr/>
+                      <a:pPr marL="0" lvl="0" indent="0" algn="r">
+                        <a:buNone/>
+                      </a:pPr>
+                      <a:r>
                         <a:t>avg_cost</a:t>
                       </a:r>
                     </a:p>
@@ -5869,17 +6202,21 @@
                     <a:bodyPr/>
                     <a:lstStyle/>
                     <a:p>
-                      <a:pPr lvl="0" indent="0" marL="0" algn="r">
-                        <a:buNone/>
-                      </a:pPr>
-                      <a:r>
-                        <a:rPr/>
+                      <a:pPr marL="0" lvl="0" indent="0" algn="r">
+                        <a:buNone/>
+                      </a:pPr>
+                      <a:r>
                         <a:t>avg_kw</a:t>
                       </a:r>
                     </a:p>
                   </a:txBody>
                   <a:tcPr/>
                 </a:tc>
+                <a:extLst>
+                  <a:ext uri="{0D108BD9-81ED-4DB2-BD59-A6C34878D82A}">
+                    <a16:rowId xmlns:a16="http://schemas.microsoft.com/office/drawing/2014/main" val="10000"/>
+                  </a:ext>
+                </a:extLst>
               </a:tr>
               <a:tr h="0">
                 <a:tc>
@@ -5887,76 +6224,81 @@
                     <a:bodyPr/>
                     <a:lstStyle/>
                     <a:p>
-                      <a:pPr lvl="0" indent="0" marL="0" algn="l">
-                        <a:buNone/>
-                      </a:pPr>
-                      <a:r>
-                        <a:rPr/>
+                      <a:pPr marL="0" lvl="0" indent="0" algn="l">
+                        <a:buNone/>
+                      </a:pPr>
+                      <a:r>
                         <a:t>Boquete Growing Region</a:t>
                       </a:r>
                     </a:p>
                   </a:txBody>
-                </a:tc>
-                <a:tc>
-                  <a:txBody>
-                    <a:bodyPr/>
-                    <a:lstStyle/>
-                    <a:p>
-                      <a:pPr lvl="0" indent="0" marL="0" algn="r">
-                        <a:buNone/>
-                      </a:pPr>
-                      <a:r>
-                        <a:rPr/>
+                  <a:tcPr/>
+                </a:tc>
+                <a:tc>
+                  <a:txBody>
+                    <a:bodyPr/>
+                    <a:lstStyle/>
+                    <a:p>
+                      <a:pPr marL="0" lvl="0" indent="0" algn="r">
+                        <a:buNone/>
+                      </a:pPr>
+                      <a:r>
                         <a:t>39</a:t>
                       </a:r>
                     </a:p>
                   </a:txBody>
-                </a:tc>
-                <a:tc>
-                  <a:txBody>
-                    <a:bodyPr/>
-                    <a:lstStyle/>
-                    <a:p>
-                      <a:pPr lvl="0" indent="0" marL="0" algn="r">
-                        <a:buNone/>
-                      </a:pPr>
-                      <a:r>
-                        <a:rPr/>
+                  <a:tcPr/>
+                </a:tc>
+                <a:tc>
+                  <a:txBody>
+                    <a:bodyPr/>
+                    <a:lstStyle/>
+                    <a:p>
+                      <a:pPr marL="0" lvl="0" indent="0" algn="r">
+                        <a:buNone/>
+                      </a:pPr>
+                      <a:r>
                         <a:t>94.59</a:t>
                       </a:r>
                     </a:p>
                   </a:txBody>
-                </a:tc>
-                <a:tc>
-                  <a:txBody>
-                    <a:bodyPr/>
-                    <a:lstStyle/>
-                    <a:p>
-                      <a:pPr lvl="0" indent="0" marL="0" algn="r">
-                        <a:buNone/>
-                      </a:pPr>
-                      <a:r>
-                        <a:rPr/>
+                  <a:tcPr/>
+                </a:tc>
+                <a:tc>
+                  <a:txBody>
+                    <a:bodyPr/>
+                    <a:lstStyle/>
+                    <a:p>
+                      <a:pPr marL="0" lvl="0" indent="0" algn="r">
+                        <a:buNone/>
+                      </a:pPr>
+                      <a:r>
                         <a:t>35.92</a:t>
                       </a:r>
                     </a:p>
                   </a:txBody>
-                </a:tc>
-                <a:tc>
-                  <a:txBody>
-                    <a:bodyPr/>
-                    <a:lstStyle/>
-                    <a:p>
-                      <a:pPr lvl="0" indent="0" marL="0" algn="r">
-                        <a:buNone/>
-                      </a:pPr>
-                      <a:r>
-                        <a:rPr/>
+                  <a:tcPr/>
+                </a:tc>
+                <a:tc>
+                  <a:txBody>
+                    <a:bodyPr/>
+                    <a:lstStyle/>
+                    <a:p>
+                      <a:pPr marL="0" lvl="0" indent="0" algn="r">
+                        <a:buNone/>
+                      </a:pPr>
+                      <a:r>
                         <a:t>0.451</a:t>
                       </a:r>
                     </a:p>
                   </a:txBody>
-                </a:tc>
+                  <a:tcPr/>
+                </a:tc>
+                <a:extLst>
+                  <a:ext uri="{0D108BD9-81ED-4DB2-BD59-A6C34878D82A}">
+                    <a16:rowId xmlns:a16="http://schemas.microsoft.com/office/drawing/2014/main" val="10001"/>
+                  </a:ext>
+                </a:extLst>
               </a:tr>
               <a:tr h="0">
                 <a:tc>
@@ -5964,76 +6306,81 @@
                     <a:bodyPr/>
                     <a:lstStyle/>
                     <a:p>
-                      <a:pPr lvl="0" indent="0" marL="0" algn="l">
-                        <a:buNone/>
-                      </a:pPr>
-                      <a:r>
-                        <a:rPr/>
+                      <a:pPr marL="0" lvl="0" indent="0" algn="l">
+                        <a:buNone/>
+                      </a:pPr>
+                      <a:r>
                         <a:t>Kiambu Growing Region</a:t>
                       </a:r>
                     </a:p>
                   </a:txBody>
-                </a:tc>
-                <a:tc>
-                  <a:txBody>
-                    <a:bodyPr/>
-                    <a:lstStyle/>
-                    <a:p>
-                      <a:pPr lvl="0" indent="0" marL="0" algn="r">
-                        <a:buNone/>
-                      </a:pPr>
-                      <a:r>
-                        <a:rPr/>
+                  <a:tcPr/>
+                </a:tc>
+                <a:tc>
+                  <a:txBody>
+                    <a:bodyPr/>
+                    <a:lstStyle/>
+                    <a:p>
+                      <a:pPr marL="0" lvl="0" indent="0" algn="r">
+                        <a:buNone/>
+                      </a:pPr>
+                      <a:r>
                         <a:t>12</a:t>
                       </a:r>
                     </a:p>
                   </a:txBody>
-                </a:tc>
-                <a:tc>
-                  <a:txBody>
-                    <a:bodyPr/>
-                    <a:lstStyle/>
-                    <a:p>
-                      <a:pPr lvl="0" indent="0" marL="0" algn="r">
-                        <a:buNone/>
-                      </a:pPr>
-                      <a:r>
-                        <a:rPr/>
+                  <a:tcPr/>
+                </a:tc>
+                <a:tc>
+                  <a:txBody>
+                    <a:bodyPr/>
+                    <a:lstStyle/>
+                    <a:p>
+                      <a:pPr marL="0" lvl="0" indent="0" algn="r">
+                        <a:buNone/>
+                      </a:pPr>
+                      <a:r>
                         <a:t>94.50</a:t>
                       </a:r>
                     </a:p>
                   </a:txBody>
-                </a:tc>
-                <a:tc>
-                  <a:txBody>
-                    <a:bodyPr/>
-                    <a:lstStyle/>
-                    <a:p>
-                      <a:pPr lvl="0" indent="0" marL="0" algn="r">
-                        <a:buNone/>
-                      </a:pPr>
-                      <a:r>
-                        <a:rPr/>
+                  <a:tcPr/>
+                </a:tc>
+                <a:tc>
+                  <a:txBody>
+                    <a:bodyPr/>
+                    <a:lstStyle/>
+                    <a:p>
+                      <a:pPr marL="0" lvl="0" indent="0" algn="r">
+                        <a:buNone/>
+                      </a:pPr>
+                      <a:r>
                         <a:t>5.67</a:t>
                       </a:r>
                     </a:p>
                   </a:txBody>
-                </a:tc>
-                <a:tc>
-                  <a:txBody>
-                    <a:bodyPr/>
-                    <a:lstStyle/>
-                    <a:p>
-                      <a:pPr lvl="0" indent="0" marL="0" algn="r">
-                        <a:buNone/>
-                      </a:pPr>
-                      <a:r>
-                        <a:rPr/>
+                  <a:tcPr/>
+                </a:tc>
+                <a:tc>
+                  <a:txBody>
+                    <a:bodyPr/>
+                    <a:lstStyle/>
+                    <a:p>
+                      <a:pPr marL="0" lvl="0" indent="0" algn="r">
+                        <a:buNone/>
+                      </a:pPr>
+                      <a:r>
                         <a:t>0.429</a:t>
                       </a:r>
                     </a:p>
                   </a:txBody>
-                </a:tc>
+                  <a:tcPr/>
+                </a:tc>
+                <a:extLst>
+                  <a:ext uri="{0D108BD9-81ED-4DB2-BD59-A6C34878D82A}">
+                    <a16:rowId xmlns:a16="http://schemas.microsoft.com/office/drawing/2014/main" val="10002"/>
+                  </a:ext>
+                </a:extLst>
               </a:tr>
               <a:tr h="0">
                 <a:tc>
@@ -6041,76 +6388,81 @@
                     <a:bodyPr/>
                     <a:lstStyle/>
                     <a:p>
-                      <a:pPr lvl="0" indent="0" marL="0" algn="l">
-                        <a:buNone/>
-                      </a:pPr>
-                      <a:r>
-                        <a:rPr/>
+                      <a:pPr marL="0" lvl="0" indent="0" algn="l">
+                        <a:buNone/>
+                      </a:pPr>
+                      <a:r>
                         <a:t>Sidama Growing Region</a:t>
                       </a:r>
                     </a:p>
                   </a:txBody>
-                </a:tc>
-                <a:tc>
-                  <a:txBody>
-                    <a:bodyPr/>
-                    <a:lstStyle/>
-                    <a:p>
-                      <a:pPr lvl="0" indent="0" marL="0" algn="r">
-                        <a:buNone/>
-                      </a:pPr>
-                      <a:r>
-                        <a:rPr/>
+                  <a:tcPr/>
+                </a:tc>
+                <a:tc>
+                  <a:txBody>
+                    <a:bodyPr/>
+                    <a:lstStyle/>
+                    <a:p>
+                      <a:pPr marL="0" lvl="0" indent="0" algn="r">
+                        <a:buNone/>
+                      </a:pPr>
+                      <a:r>
                         <a:t>14</a:t>
                       </a:r>
                     </a:p>
                   </a:txBody>
-                </a:tc>
-                <a:tc>
-                  <a:txBody>
-                    <a:bodyPr/>
-                    <a:lstStyle/>
-                    <a:p>
-                      <a:pPr lvl="0" indent="0" marL="0" algn="r">
-                        <a:buNone/>
-                      </a:pPr>
-                      <a:r>
-                        <a:rPr/>
+                  <a:tcPr/>
+                </a:tc>
+                <a:tc>
+                  <a:txBody>
+                    <a:bodyPr/>
+                    <a:lstStyle/>
+                    <a:p>
+                      <a:pPr marL="0" lvl="0" indent="0" algn="r">
+                        <a:buNone/>
+                      </a:pPr>
+                      <a:r>
                         <a:t>94.43</a:t>
                       </a:r>
                     </a:p>
                   </a:txBody>
-                </a:tc>
-                <a:tc>
-                  <a:txBody>
-                    <a:bodyPr/>
-                    <a:lstStyle/>
-                    <a:p>
-                      <a:pPr lvl="0" indent="0" marL="0" algn="r">
-                        <a:buNone/>
-                      </a:pPr>
-                      <a:r>
-                        <a:rPr/>
+                  <a:tcPr/>
+                </a:tc>
+                <a:tc>
+                  <a:txBody>
+                    <a:bodyPr/>
+                    <a:lstStyle/>
+                    <a:p>
+                      <a:pPr marL="0" lvl="0" indent="0" algn="r">
+                        <a:buNone/>
+                      </a:pPr>
+                      <a:r>
                         <a:t>7.89</a:t>
                       </a:r>
                     </a:p>
                   </a:txBody>
-                </a:tc>
-                <a:tc>
-                  <a:txBody>
-                    <a:bodyPr/>
-                    <a:lstStyle/>
-                    <a:p>
-                      <a:pPr lvl="0" indent="0" marL="0" algn="r">
-                        <a:buNone/>
-                      </a:pPr>
-                      <a:r>
-                        <a:rPr/>
+                  <a:tcPr/>
+                </a:tc>
+                <a:tc>
+                  <a:txBody>
+                    <a:bodyPr/>
+                    <a:lstStyle/>
+                    <a:p>
+                      <a:pPr marL="0" lvl="0" indent="0" algn="r">
+                        <a:buNone/>
+                      </a:pPr>
+                      <a:r>
                         <a:t>0.423</a:t>
                       </a:r>
                     </a:p>
                   </a:txBody>
-                </a:tc>
+                  <a:tcPr/>
+                </a:tc>
+                <a:extLst>
+                  <a:ext uri="{0D108BD9-81ED-4DB2-BD59-A6C34878D82A}">
+                    <a16:rowId xmlns:a16="http://schemas.microsoft.com/office/drawing/2014/main" val="10003"/>
+                  </a:ext>
+                </a:extLst>
               </a:tr>
               <a:tr h="0">
                 <a:tc>
@@ -6118,76 +6470,81 @@
                     <a:bodyPr/>
                     <a:lstStyle/>
                     <a:p>
-                      <a:pPr lvl="0" indent="0" marL="0" algn="l">
-                        <a:buNone/>
-                      </a:pPr>
-                      <a:r>
-                        <a:rPr/>
+                      <a:pPr marL="0" lvl="0" indent="0" algn="l">
+                        <a:buNone/>
+                      </a:pPr>
+                      <a:r>
                         <a:t>Holualoa</a:t>
                       </a:r>
                     </a:p>
                   </a:txBody>
-                </a:tc>
-                <a:tc>
-                  <a:txBody>
-                    <a:bodyPr/>
-                    <a:lstStyle/>
-                    <a:p>
-                      <a:pPr lvl="0" indent="0" marL="0" algn="r">
-                        <a:buNone/>
-                      </a:pPr>
-                      <a:r>
-                        <a:rPr/>
+                  <a:tcPr/>
+                </a:tc>
+                <a:tc>
+                  <a:txBody>
+                    <a:bodyPr/>
+                    <a:lstStyle/>
+                    <a:p>
+                      <a:pPr marL="0" lvl="0" indent="0" algn="r">
+                        <a:buNone/>
+                      </a:pPr>
+                      <a:r>
                         <a:t>41</a:t>
                       </a:r>
                     </a:p>
                   </a:txBody>
-                </a:tc>
-                <a:tc>
-                  <a:txBody>
-                    <a:bodyPr/>
-                    <a:lstStyle/>
-                    <a:p>
-                      <a:pPr lvl="0" indent="0" marL="0" algn="r">
-                        <a:buNone/>
-                      </a:pPr>
-                      <a:r>
-                        <a:rPr/>
+                  <a:tcPr/>
+                </a:tc>
+                <a:tc>
+                  <a:txBody>
+                    <a:bodyPr/>
+                    <a:lstStyle/>
+                    <a:p>
+                      <a:pPr marL="0" lvl="0" indent="0" algn="r">
+                        <a:buNone/>
+                      </a:pPr>
+                      <a:r>
                         <a:t>94.32</a:t>
                       </a:r>
                     </a:p>
                   </a:txBody>
-                </a:tc>
-                <a:tc>
-                  <a:txBody>
-                    <a:bodyPr/>
-                    <a:lstStyle/>
-                    <a:p>
-                      <a:pPr lvl="0" indent="0" marL="0" algn="r">
-                        <a:buNone/>
-                      </a:pPr>
-                      <a:r>
-                        <a:rPr/>
+                  <a:tcPr/>
+                </a:tc>
+                <a:tc>
+                  <a:txBody>
+                    <a:bodyPr/>
+                    <a:lstStyle/>
+                    <a:p>
+                      <a:pPr marL="0" lvl="0" indent="0" algn="r">
+                        <a:buNone/>
+                      </a:pPr>
+                      <a:r>
                         <a:t>23.78</a:t>
                       </a:r>
                     </a:p>
                   </a:txBody>
-                </a:tc>
-                <a:tc>
-                  <a:txBody>
-                    <a:bodyPr/>
-                    <a:lstStyle/>
-                    <a:p>
-                      <a:pPr lvl="0" indent="0" marL="0" algn="r">
-                        <a:buNone/>
-                      </a:pPr>
-                      <a:r>
-                        <a:rPr/>
+                  <a:tcPr/>
+                </a:tc>
+                <a:tc>
+                  <a:txBody>
+                    <a:bodyPr/>
+                    <a:lstStyle/>
+                    <a:p>
+                      <a:pPr marL="0" lvl="0" indent="0" algn="r">
+                        <a:buNone/>
+                      </a:pPr>
+                      <a:r>
                         <a:t>0.426</a:t>
                       </a:r>
                     </a:p>
                   </a:txBody>
-                </a:tc>
+                  <a:tcPr/>
+                </a:tc>
+                <a:extLst>
+                  <a:ext uri="{0D108BD9-81ED-4DB2-BD59-A6C34878D82A}">
+                    <a16:rowId xmlns:a16="http://schemas.microsoft.com/office/drawing/2014/main" val="10004"/>
+                  </a:ext>
+                </a:extLst>
               </a:tr>
               <a:tr h="0">
                 <a:tc>
@@ -6195,76 +6552,81 @@
                     <a:bodyPr/>
                     <a:lstStyle/>
                     <a:p>
-                      <a:pPr lvl="0" indent="0" marL="0" algn="l">
-                        <a:buNone/>
-                      </a:pPr>
-                      <a:r>
-                        <a:rPr/>
+                      <a:pPr marL="0" lvl="0" indent="0" algn="l">
+                        <a:buNone/>
+                      </a:pPr>
+                      <a:r>
                         <a:t>Caicedonia</a:t>
                       </a:r>
                     </a:p>
                   </a:txBody>
-                </a:tc>
-                <a:tc>
-                  <a:txBody>
-                    <a:bodyPr/>
-                    <a:lstStyle/>
-                    <a:p>
-                      <a:pPr lvl="0" indent="0" marL="0" algn="r">
-                        <a:buNone/>
-                      </a:pPr>
-                      <a:r>
-                        <a:rPr/>
+                  <a:tcPr/>
+                </a:tc>
+                <a:tc>
+                  <a:txBody>
+                    <a:bodyPr/>
+                    <a:lstStyle/>
+                    <a:p>
+                      <a:pPr marL="0" lvl="0" indent="0" algn="r">
+                        <a:buNone/>
+                      </a:pPr>
+                      <a:r>
                         <a:t>11</a:t>
                       </a:r>
                     </a:p>
                   </a:txBody>
-                </a:tc>
-                <a:tc>
-                  <a:txBody>
-                    <a:bodyPr/>
-                    <a:lstStyle/>
-                    <a:p>
-                      <a:pPr lvl="0" indent="0" marL="0" algn="r">
-                        <a:buNone/>
-                      </a:pPr>
-                      <a:r>
-                        <a:rPr/>
+                  <a:tcPr/>
+                </a:tc>
+                <a:tc>
+                  <a:txBody>
+                    <a:bodyPr/>
+                    <a:lstStyle/>
+                    <a:p>
+                      <a:pPr marL="0" lvl="0" indent="0" algn="r">
+                        <a:buNone/>
+                      </a:pPr>
+                      <a:r>
                         <a:t>94.27</a:t>
                       </a:r>
                     </a:p>
                   </a:txBody>
-                </a:tc>
-                <a:tc>
-                  <a:txBody>
-                    <a:bodyPr/>
-                    <a:lstStyle/>
-                    <a:p>
-                      <a:pPr lvl="0" indent="0" marL="0" algn="r">
-                        <a:buNone/>
-                      </a:pPr>
-                      <a:r>
-                        <a:rPr/>
+                  <a:tcPr/>
+                </a:tc>
+                <a:tc>
+                  <a:txBody>
+                    <a:bodyPr/>
+                    <a:lstStyle/>
+                    <a:p>
+                      <a:pPr marL="0" lvl="0" indent="0" algn="r">
+                        <a:buNone/>
+                      </a:pPr>
+                      <a:r>
                         <a:t>13.40</a:t>
                       </a:r>
                     </a:p>
                   </a:txBody>
-                </a:tc>
-                <a:tc>
-                  <a:txBody>
-                    <a:bodyPr/>
-                    <a:lstStyle/>
-                    <a:p>
-                      <a:pPr lvl="0" indent="0" marL="0" algn="r">
-                        <a:buNone/>
-                      </a:pPr>
-                      <a:r>
-                        <a:rPr/>
+                  <a:tcPr/>
+                </a:tc>
+                <a:tc>
+                  <a:txBody>
+                    <a:bodyPr/>
+                    <a:lstStyle/>
+                    <a:p>
+                      <a:pPr marL="0" lvl="0" indent="0" algn="r">
+                        <a:buNone/>
+                      </a:pPr>
+                      <a:r>
                         <a:t>0.396</a:t>
                       </a:r>
                     </a:p>
                   </a:txBody>
-                </a:tc>
+                  <a:tcPr/>
+                </a:tc>
+                <a:extLst>
+                  <a:ext uri="{0D108BD9-81ED-4DB2-BD59-A6C34878D82A}">
+                    <a16:rowId xmlns:a16="http://schemas.microsoft.com/office/drawing/2014/main" val="10005"/>
+                  </a:ext>
+                </a:extLst>
               </a:tr>
               <a:tr h="0">
                 <a:tc>
@@ -6272,76 +6634,81 @@
                     <a:bodyPr/>
                     <a:lstStyle/>
                     <a:p>
-                      <a:pPr lvl="0" indent="0" marL="0" algn="l">
-                        <a:buNone/>
-                      </a:pPr>
-                      <a:r>
-                        <a:rPr/>
+                      <a:pPr marL="0" lvl="0" indent="0" algn="l">
+                        <a:buNone/>
+                      </a:pPr>
+                      <a:r>
                         <a:t>Bench-Maji Zone</a:t>
                       </a:r>
                     </a:p>
                   </a:txBody>
-                </a:tc>
-                <a:tc>
-                  <a:txBody>
-                    <a:bodyPr/>
-                    <a:lstStyle/>
-                    <a:p>
-                      <a:pPr lvl="0" indent="0" marL="0" algn="r">
-                        <a:buNone/>
-                      </a:pPr>
-                      <a:r>
-                        <a:rPr/>
+                  <a:tcPr/>
+                </a:tc>
+                <a:tc>
+                  <a:txBody>
+                    <a:bodyPr/>
+                    <a:lstStyle/>
+                    <a:p>
+                      <a:pPr marL="0" lvl="0" indent="0" algn="r">
+                        <a:buNone/>
+                      </a:pPr>
+                      <a:r>
                         <a:t>11</a:t>
                       </a:r>
                     </a:p>
                   </a:txBody>
-                </a:tc>
-                <a:tc>
-                  <a:txBody>
-                    <a:bodyPr/>
-                    <a:lstStyle/>
-                    <a:p>
-                      <a:pPr lvl="0" indent="0" marL="0" algn="r">
-                        <a:buNone/>
-                      </a:pPr>
-                      <a:r>
-                        <a:rPr/>
+                  <a:tcPr/>
+                </a:tc>
+                <a:tc>
+                  <a:txBody>
+                    <a:bodyPr/>
+                    <a:lstStyle/>
+                    <a:p>
+                      <a:pPr marL="0" lvl="0" indent="0" algn="r">
+                        <a:buNone/>
+                      </a:pPr>
+                      <a:r>
                         <a:t>94.09</a:t>
                       </a:r>
                     </a:p>
                   </a:txBody>
-                </a:tc>
-                <a:tc>
-                  <a:txBody>
-                    <a:bodyPr/>
-                    <a:lstStyle/>
-                    <a:p>
-                      <a:pPr lvl="0" indent="0" marL="0" algn="r">
-                        <a:buNone/>
-                      </a:pPr>
-                      <a:r>
-                        <a:rPr/>
+                  <a:tcPr/>
+                </a:tc>
+                <a:tc>
+                  <a:txBody>
+                    <a:bodyPr/>
+                    <a:lstStyle/>
+                    <a:p>
+                      <a:pPr marL="0" lvl="0" indent="0" algn="r">
+                        <a:buNone/>
+                      </a:pPr>
+                      <a:r>
                         <a:t>15.72</a:t>
                       </a:r>
                     </a:p>
                   </a:txBody>
-                </a:tc>
-                <a:tc>
-                  <a:txBody>
-                    <a:bodyPr/>
-                    <a:lstStyle/>
-                    <a:p>
-                      <a:pPr lvl="0" indent="0" marL="0" algn="r">
-                        <a:buNone/>
-                      </a:pPr>
-                      <a:r>
-                        <a:rPr/>
+                  <a:tcPr/>
+                </a:tc>
+                <a:tc>
+                  <a:txBody>
+                    <a:bodyPr/>
+                    <a:lstStyle/>
+                    <a:p>
+                      <a:pPr marL="0" lvl="0" indent="0" algn="r">
+                        <a:buNone/>
+                      </a:pPr>
+                      <a:r>
                         <a:t>0.477</a:t>
                       </a:r>
                     </a:p>
                   </a:txBody>
-                </a:tc>
+                  <a:tcPr/>
+                </a:tc>
+                <a:extLst>
+                  <a:ext uri="{0D108BD9-81ED-4DB2-BD59-A6C34878D82A}">
+                    <a16:rowId xmlns:a16="http://schemas.microsoft.com/office/drawing/2014/main" val="10006"/>
+                  </a:ext>
+                </a:extLst>
               </a:tr>
               <a:tr h="0">
                 <a:tc>
@@ -6349,76 +6716,81 @@
                     <a:bodyPr/>
                     <a:lstStyle/>
                     <a:p>
-                      <a:pPr lvl="0" indent="0" marL="0" algn="l">
-                        <a:buNone/>
-                      </a:pPr>
-                      <a:r>
-                        <a:rPr/>
+                      <a:pPr marL="0" lvl="0" indent="0" algn="l">
+                        <a:buNone/>
+                      </a:pPr>
+                      <a:r>
                         <a:t>Nyeri Growing Region</a:t>
                       </a:r>
                     </a:p>
                   </a:txBody>
-                </a:tc>
-                <a:tc>
-                  <a:txBody>
-                    <a:bodyPr/>
-                    <a:lstStyle/>
-                    <a:p>
-                      <a:pPr lvl="0" indent="0" marL="0" algn="r">
-                        <a:buNone/>
-                      </a:pPr>
-                      <a:r>
-                        <a:rPr/>
+                  <a:tcPr/>
+                </a:tc>
+                <a:tc>
+                  <a:txBody>
+                    <a:bodyPr/>
+                    <a:lstStyle/>
+                    <a:p>
+                      <a:pPr marL="0" lvl="0" indent="0" algn="r">
+                        <a:buNone/>
+                      </a:pPr>
+                      <a:r>
                         <a:t>58</a:t>
                       </a:r>
                     </a:p>
                   </a:txBody>
-                </a:tc>
-                <a:tc>
-                  <a:txBody>
-                    <a:bodyPr/>
-                    <a:lstStyle/>
-                    <a:p>
-                      <a:pPr lvl="0" indent="0" marL="0" algn="r">
-                        <a:buNone/>
-                      </a:pPr>
-                      <a:r>
-                        <a:rPr/>
+                  <a:tcPr/>
+                </a:tc>
+                <a:tc>
+                  <a:txBody>
+                    <a:bodyPr/>
+                    <a:lstStyle/>
+                    <a:p>
+                      <a:pPr marL="0" lvl="0" indent="0" algn="r">
+                        <a:buNone/>
+                      </a:pPr>
+                      <a:r>
                         <a:t>93.98</a:t>
                       </a:r>
                     </a:p>
                   </a:txBody>
-                </a:tc>
-                <a:tc>
-                  <a:txBody>
-                    <a:bodyPr/>
-                    <a:lstStyle/>
-                    <a:p>
-                      <a:pPr lvl="0" indent="0" marL="0" algn="r">
-                        <a:buNone/>
-                      </a:pPr>
-                      <a:r>
-                        <a:rPr/>
+                  <a:tcPr/>
+                </a:tc>
+                <a:tc>
+                  <a:txBody>
+                    <a:bodyPr/>
+                    <a:lstStyle/>
+                    <a:p>
+                      <a:pPr marL="0" lvl="0" indent="0" algn="r">
+                        <a:buNone/>
+                      </a:pPr>
+                      <a:r>
                         <a:t>6.90</a:t>
                       </a:r>
                     </a:p>
                   </a:txBody>
-                </a:tc>
-                <a:tc>
-                  <a:txBody>
-                    <a:bodyPr/>
-                    <a:lstStyle/>
-                    <a:p>
-                      <a:pPr lvl="0" indent="0" marL="0" algn="r">
-                        <a:buNone/>
-                      </a:pPr>
-                      <a:r>
-                        <a:rPr/>
+                  <a:tcPr/>
+                </a:tc>
+                <a:tc>
+                  <a:txBody>
+                    <a:bodyPr/>
+                    <a:lstStyle/>
+                    <a:p>
+                      <a:pPr marL="0" lvl="0" indent="0" algn="r">
+                        <a:buNone/>
+                      </a:pPr>
+                      <a:r>
                         <a:t>0.424</a:t>
                       </a:r>
                     </a:p>
                   </a:txBody>
-                </a:tc>
+                  <a:tcPr/>
+                </a:tc>
+                <a:extLst>
+                  <a:ext uri="{0D108BD9-81ED-4DB2-BD59-A6C34878D82A}">
+                    <a16:rowId xmlns:a16="http://schemas.microsoft.com/office/drawing/2014/main" val="10007"/>
+                  </a:ext>
+                </a:extLst>
               </a:tr>
               <a:tr h="0">
                 <a:tc>
@@ -6426,76 +6798,81 @@
                     <a:bodyPr/>
                     <a:lstStyle/>
                     <a:p>
-                      <a:pPr lvl="0" indent="0" marL="0" algn="l">
-                        <a:buNone/>
-                      </a:pPr>
-                      <a:r>
-                        <a:rPr/>
+                      <a:pPr marL="0" lvl="0" indent="0" algn="l">
+                        <a:buNone/>
+                      </a:pPr>
+                      <a:r>
                         <a:t>Kirinyaga District</a:t>
                       </a:r>
                     </a:p>
                   </a:txBody>
-                </a:tc>
-                <a:tc>
-                  <a:txBody>
-                    <a:bodyPr/>
-                    <a:lstStyle/>
-                    <a:p>
-                      <a:pPr lvl="0" indent="0" marL="0" algn="r">
-                        <a:buNone/>
-                      </a:pPr>
-                      <a:r>
-                        <a:rPr/>
+                  <a:tcPr/>
+                </a:tc>
+                <a:tc>
+                  <a:txBody>
+                    <a:bodyPr/>
+                    <a:lstStyle/>
+                    <a:p>
+                      <a:pPr marL="0" lvl="0" indent="0" algn="r">
+                        <a:buNone/>
+                      </a:pPr>
+                      <a:r>
                         <a:t>22</a:t>
                       </a:r>
                     </a:p>
                   </a:txBody>
-                </a:tc>
-                <a:tc>
-                  <a:txBody>
-                    <a:bodyPr/>
-                    <a:lstStyle/>
-                    <a:p>
-                      <a:pPr lvl="0" indent="0" marL="0" algn="r">
-                        <a:buNone/>
-                      </a:pPr>
-                      <a:r>
-                        <a:rPr/>
+                  <a:tcPr/>
+                </a:tc>
+                <a:tc>
+                  <a:txBody>
+                    <a:bodyPr/>
+                    <a:lstStyle/>
+                    <a:p>
+                      <a:pPr marL="0" lvl="0" indent="0" algn="r">
+                        <a:buNone/>
+                      </a:pPr>
+                      <a:r>
                         <a:t>93.95</a:t>
                       </a:r>
                     </a:p>
                   </a:txBody>
-                </a:tc>
-                <a:tc>
-                  <a:txBody>
-                    <a:bodyPr/>
-                    <a:lstStyle/>
-                    <a:p>
-                      <a:pPr lvl="0" indent="0" marL="0" algn="r">
-                        <a:buNone/>
-                      </a:pPr>
-                      <a:r>
-                        <a:rPr/>
+                  <a:tcPr/>
+                </a:tc>
+                <a:tc>
+                  <a:txBody>
+                    <a:bodyPr/>
+                    <a:lstStyle/>
+                    <a:p>
+                      <a:pPr marL="0" lvl="0" indent="0" algn="r">
+                        <a:buNone/>
+                      </a:pPr>
+                      <a:r>
                         <a:t>7.40</a:t>
                       </a:r>
                     </a:p>
                   </a:txBody>
-                </a:tc>
-                <a:tc>
-                  <a:txBody>
-                    <a:bodyPr/>
-                    <a:lstStyle/>
-                    <a:p>
-                      <a:pPr lvl="0" indent="0" marL="0" algn="r">
-                        <a:buNone/>
-                      </a:pPr>
-                      <a:r>
-                        <a:rPr/>
+                  <a:tcPr/>
+                </a:tc>
+                <a:tc>
+                  <a:txBody>
+                    <a:bodyPr/>
+                    <a:lstStyle/>
+                    <a:p>
+                      <a:pPr marL="0" lvl="0" indent="0" algn="r">
+                        <a:buNone/>
+                      </a:pPr>
+                      <a:r>
                         <a:t>0.445</a:t>
                       </a:r>
                     </a:p>
                   </a:txBody>
-                </a:tc>
+                  <a:tcPr/>
+                </a:tc>
+                <a:extLst>
+                  <a:ext uri="{0D108BD9-81ED-4DB2-BD59-A6C34878D82A}">
+                    <a16:rowId xmlns:a16="http://schemas.microsoft.com/office/drawing/2014/main" val="10008"/>
+                  </a:ext>
+                </a:extLst>
               </a:tr>
             </a:tbl>
           </a:graphicData>
@@ -6503,6 +6880,9 @@
       </p:graphicFrame>
     </p:spTree>
   </p:cSld>
+  <p:clrMapOvr>
+    <a:masterClrMapping/>
+  </p:clrMapOvr>
 </p:sld>
 </file>
 
@@ -6538,11 +6918,10 @@
           <a:bodyPr/>
           <a:lstStyle/>
           <a:p>
-            <a:pPr lvl="0" indent="0" marL="0">
+            <a:pPr marL="0" lvl="0" indent="0">
               <a:buNone/>
             </a:pPr>
             <a:r>
-              <a:rPr/>
               <a:t>Best roasters / suppliers</a:t>
             </a:r>
           </a:p>
@@ -6569,10 +6948,34 @@
                 <a:tableStyleId>{5C22544A-7EE6-4342-B048-85BDC9FD1C3A}</a:tableStyleId>
               </a:tblPr>
               <a:tblGrid>
-                <a:gridCol w="2057400"/>
-                <a:gridCol w="2057400"/>
-                <a:gridCol w="2057400"/>
-                <a:gridCol w="2057400"/>
+                <a:gridCol w="2057400">
+                  <a:extLst>
+                    <a:ext uri="{9D8B030D-6E8A-4147-A177-3AD203B41FA5}">
+                      <a16:colId xmlns:a16="http://schemas.microsoft.com/office/drawing/2014/main" val="20000"/>
+                    </a:ext>
+                  </a:extLst>
+                </a:gridCol>
+                <a:gridCol w="2057400">
+                  <a:extLst>
+                    <a:ext uri="{9D8B030D-6E8A-4147-A177-3AD203B41FA5}">
+                      <a16:colId xmlns:a16="http://schemas.microsoft.com/office/drawing/2014/main" val="20001"/>
+                    </a:ext>
+                  </a:extLst>
+                </a:gridCol>
+                <a:gridCol w="2057400">
+                  <a:extLst>
+                    <a:ext uri="{9D8B030D-6E8A-4147-A177-3AD203B41FA5}">
+                      <a16:colId xmlns:a16="http://schemas.microsoft.com/office/drawing/2014/main" val="20002"/>
+                    </a:ext>
+                  </a:extLst>
+                </a:gridCol>
+                <a:gridCol w="2057400">
+                  <a:extLst>
+                    <a:ext uri="{9D8B030D-6E8A-4147-A177-3AD203B41FA5}">
+                      <a16:colId xmlns:a16="http://schemas.microsoft.com/office/drawing/2014/main" val="20003"/>
+                    </a:ext>
+                  </a:extLst>
+                </a:gridCol>
               </a:tblGrid>
               <a:tr h="0">
                 <a:tc>
@@ -6580,11 +6983,10 @@
                     <a:bodyPr/>
                     <a:lstStyle/>
                     <a:p>
-                      <a:pPr lvl="0" indent="0" marL="0" algn="l">
-                        <a:buNone/>
-                      </a:pPr>
-                      <a:r>
-                        <a:rPr/>
+                      <a:pPr marL="0" lvl="0" indent="0" algn="l">
+                        <a:buNone/>
+                      </a:pPr>
+                      <a:r>
                         <a:t>Roaster</a:t>
                       </a:r>
                     </a:p>
@@ -6596,11 +6998,10 @@
                     <a:bodyPr/>
                     <a:lstStyle/>
                     <a:p>
-                      <a:pPr lvl="0" indent="0" marL="0" algn="r">
-                        <a:buNone/>
-                      </a:pPr>
-                      <a:r>
-                        <a:rPr/>
+                      <a:pPr marL="0" lvl="0" indent="0" algn="r">
+                        <a:buNone/>
+                      </a:pPr>
+                      <a:r>
                         <a:t>n</a:t>
                       </a:r>
                     </a:p>
@@ -6612,11 +7013,10 @@
                     <a:bodyPr/>
                     <a:lstStyle/>
                     <a:p>
-                      <a:pPr lvl="0" indent="0" marL="0" algn="r">
-                        <a:buNone/>
-                      </a:pPr>
-                      <a:r>
-                        <a:rPr/>
+                      <a:pPr marL="0" lvl="0" indent="0" algn="r">
+                        <a:buNone/>
+                      </a:pPr>
+                      <a:r>
                         <a:t>avg_rating</a:t>
                       </a:r>
                     </a:p>
@@ -6628,17 +7028,21 @@
                     <a:bodyPr/>
                     <a:lstStyle/>
                     <a:p>
-                      <a:pPr lvl="0" indent="0" marL="0" algn="r">
-                        <a:buNone/>
-                      </a:pPr>
-                      <a:r>
-                        <a:rPr/>
+                      <a:pPr marL="0" lvl="0" indent="0" algn="r">
+                        <a:buNone/>
+                      </a:pPr>
+                      <a:r>
                         <a:t>avg_cost</a:t>
                       </a:r>
                     </a:p>
                   </a:txBody>
                   <a:tcPr/>
                 </a:tc>
+                <a:extLst>
+                  <a:ext uri="{0D108BD9-81ED-4DB2-BD59-A6C34878D82A}">
+                    <a16:rowId xmlns:a16="http://schemas.microsoft.com/office/drawing/2014/main" val="10000"/>
+                  </a:ext>
+                </a:extLst>
               </a:tr>
               <a:tr h="0">
                 <a:tc>
@@ -6646,61 +7050,66 @@
                     <a:bodyPr/>
                     <a:lstStyle/>
                     <a:p>
-                      <a:pPr lvl="0" indent="0" marL="0" algn="l">
-                        <a:buNone/>
-                      </a:pPr>
-                      <a:r>
-                        <a:rPr/>
+                      <a:pPr marL="0" lvl="0" indent="0" algn="l">
+                        <a:buNone/>
+                      </a:pPr>
+                      <a:r>
                         <a:t>Hula Daddy Kona Coffee</a:t>
                       </a:r>
                     </a:p>
                   </a:txBody>
-                </a:tc>
-                <a:tc>
-                  <a:txBody>
-                    <a:bodyPr/>
-                    <a:lstStyle/>
-                    <a:p>
-                      <a:pPr lvl="0" indent="0" marL="0" algn="r">
-                        <a:buNone/>
-                      </a:pPr>
-                      <a:r>
-                        <a:rPr/>
+                  <a:tcPr/>
+                </a:tc>
+                <a:tc>
+                  <a:txBody>
+                    <a:bodyPr/>
+                    <a:lstStyle/>
+                    <a:p>
+                      <a:pPr marL="0" lvl="0" indent="0" algn="r">
+                        <a:buNone/>
+                      </a:pPr>
+                      <a:r>
                         <a:t>24</a:t>
                       </a:r>
                     </a:p>
                   </a:txBody>
-                </a:tc>
-                <a:tc>
-                  <a:txBody>
-                    <a:bodyPr/>
-                    <a:lstStyle/>
-                    <a:p>
-                      <a:pPr lvl="0" indent="0" marL="0" algn="r">
-                        <a:buNone/>
-                      </a:pPr>
-                      <a:r>
-                        <a:rPr/>
+                  <a:tcPr/>
+                </a:tc>
+                <a:tc>
+                  <a:txBody>
+                    <a:bodyPr/>
+                    <a:lstStyle/>
+                    <a:p>
+                      <a:pPr marL="0" lvl="0" indent="0" algn="r">
+                        <a:buNone/>
+                      </a:pPr>
+                      <a:r>
                         <a:t>95.12</a:t>
                       </a:r>
                     </a:p>
                   </a:txBody>
-                </a:tc>
-                <a:tc>
-                  <a:txBody>
-                    <a:bodyPr/>
-                    <a:lstStyle/>
-                    <a:p>
-                      <a:pPr lvl="0" indent="0" marL="0" algn="r">
-                        <a:buNone/>
-                      </a:pPr>
-                      <a:r>
-                        <a:rPr/>
+                  <a:tcPr/>
+                </a:tc>
+                <a:tc>
+                  <a:txBody>
+                    <a:bodyPr/>
+                    <a:lstStyle/>
+                    <a:p>
+                      <a:pPr marL="0" lvl="0" indent="0" algn="r">
+                        <a:buNone/>
+                      </a:pPr>
+                      <a:r>
                         <a:t>24.78</a:t>
                       </a:r>
                     </a:p>
                   </a:txBody>
-                </a:tc>
+                  <a:tcPr/>
+                </a:tc>
+                <a:extLst>
+                  <a:ext uri="{0D108BD9-81ED-4DB2-BD59-A6C34878D82A}">
+                    <a16:rowId xmlns:a16="http://schemas.microsoft.com/office/drawing/2014/main" val="10001"/>
+                  </a:ext>
+                </a:extLst>
               </a:tr>
               <a:tr h="0">
                 <a:tc>
@@ -6708,61 +7117,66 @@
                     <a:bodyPr/>
                     <a:lstStyle/>
                     <a:p>
-                      <a:pPr lvl="0" indent="0" marL="0" algn="l">
-                        <a:buNone/>
-                      </a:pPr>
-                      <a:r>
-                        <a:rPr/>
+                      <a:pPr marL="0" lvl="0" indent="0" algn="l">
+                        <a:buNone/>
+                      </a:pPr>
+                      <a:r>
                         <a:t>Simon Hsieh Aroma Roast Coffees</a:t>
                       </a:r>
                     </a:p>
                   </a:txBody>
-                </a:tc>
-                <a:tc>
-                  <a:txBody>
-                    <a:bodyPr/>
-                    <a:lstStyle/>
-                    <a:p>
-                      <a:pPr lvl="0" indent="0" marL="0" algn="r">
-                        <a:buNone/>
-                      </a:pPr>
-                      <a:r>
-                        <a:rPr/>
+                  <a:tcPr/>
+                </a:tc>
+                <a:tc>
+                  <a:txBody>
+                    <a:bodyPr/>
+                    <a:lstStyle/>
+                    <a:p>
+                      <a:pPr marL="0" lvl="0" indent="0" algn="r">
+                        <a:buNone/>
+                      </a:pPr>
+                      <a:r>
                         <a:t>11</a:t>
                       </a:r>
                     </a:p>
                   </a:txBody>
-                </a:tc>
-                <a:tc>
-                  <a:txBody>
-                    <a:bodyPr/>
-                    <a:lstStyle/>
-                    <a:p>
-                      <a:pPr lvl="0" indent="0" marL="0" algn="r">
-                        <a:buNone/>
-                      </a:pPr>
-                      <a:r>
-                        <a:rPr/>
+                  <a:tcPr/>
+                </a:tc>
+                <a:tc>
+                  <a:txBody>
+                    <a:bodyPr/>
+                    <a:lstStyle/>
+                    <a:p>
+                      <a:pPr marL="0" lvl="0" indent="0" algn="r">
+                        <a:buNone/>
+                      </a:pPr>
+                      <a:r>
                         <a:t>94.64</a:t>
                       </a:r>
                     </a:p>
                   </a:txBody>
-                </a:tc>
-                <a:tc>
-                  <a:txBody>
-                    <a:bodyPr/>
-                    <a:lstStyle/>
-                    <a:p>
-                      <a:pPr lvl="0" indent="0" marL="0" algn="r">
-                        <a:buNone/>
-                      </a:pPr>
-                      <a:r>
-                        <a:rPr/>
+                  <a:tcPr/>
+                </a:tc>
+                <a:tc>
+                  <a:txBody>
+                    <a:bodyPr/>
+                    <a:lstStyle/>
+                    <a:p>
+                      <a:pPr marL="0" lvl="0" indent="0" algn="r">
+                        <a:buNone/>
+                      </a:pPr>
+                      <a:r>
                         <a:t>22.78</a:t>
                       </a:r>
                     </a:p>
                   </a:txBody>
-                </a:tc>
+                  <a:tcPr/>
+                </a:tc>
+                <a:extLst>
+                  <a:ext uri="{0D108BD9-81ED-4DB2-BD59-A6C34878D82A}">
+                    <a16:rowId xmlns:a16="http://schemas.microsoft.com/office/drawing/2014/main" val="10002"/>
+                  </a:ext>
+                </a:extLst>
               </a:tr>
               <a:tr h="0">
                 <a:tc>
@@ -6770,61 +7184,66 @@
                     <a:bodyPr/>
                     <a:lstStyle/>
                     <a:p>
-                      <a:pPr lvl="0" indent="0" marL="0" algn="l">
-                        <a:buNone/>
-                      </a:pPr>
-                      <a:r>
-                        <a:rPr/>
+                      <a:pPr marL="0" lvl="0" indent="0" algn="l">
+                        <a:buNone/>
+                      </a:pPr>
+                      <a:r>
                         <a:t>PT’s Coffee Roasting Co.</a:t>
                       </a:r>
                     </a:p>
                   </a:txBody>
-                </a:tc>
-                <a:tc>
-                  <a:txBody>
-                    <a:bodyPr/>
-                    <a:lstStyle/>
-                    <a:p>
-                      <a:pPr lvl="0" indent="0" marL="0" algn="r">
-                        <a:buNone/>
-                      </a:pPr>
-                      <a:r>
-                        <a:rPr/>
+                  <a:tcPr/>
+                </a:tc>
+                <a:tc>
+                  <a:txBody>
+                    <a:bodyPr/>
+                    <a:lstStyle/>
+                    <a:p>
+                      <a:pPr marL="0" lvl="0" indent="0" algn="r">
+                        <a:buNone/>
+                      </a:pPr>
+                      <a:r>
                         <a:t>17</a:t>
                       </a:r>
                     </a:p>
                   </a:txBody>
-                </a:tc>
-                <a:tc>
-                  <a:txBody>
-                    <a:bodyPr/>
-                    <a:lstStyle/>
-                    <a:p>
-                      <a:pPr lvl="0" indent="0" marL="0" algn="r">
-                        <a:buNone/>
-                      </a:pPr>
-                      <a:r>
-                        <a:rPr/>
+                  <a:tcPr/>
+                </a:tc>
+                <a:tc>
+                  <a:txBody>
+                    <a:bodyPr/>
+                    <a:lstStyle/>
+                    <a:p>
+                      <a:pPr marL="0" lvl="0" indent="0" algn="r">
+                        <a:buNone/>
+                      </a:pPr>
+                      <a:r>
                         <a:t>94.47</a:t>
                       </a:r>
                     </a:p>
                   </a:txBody>
-                </a:tc>
-                <a:tc>
-                  <a:txBody>
-                    <a:bodyPr/>
-                    <a:lstStyle/>
-                    <a:p>
-                      <a:pPr lvl="0" indent="0" marL="0" algn="r">
-                        <a:buNone/>
-                      </a:pPr>
-                      <a:r>
-                        <a:rPr/>
+                  <a:tcPr/>
+                </a:tc>
+                <a:tc>
+                  <a:txBody>
+                    <a:bodyPr/>
+                    <a:lstStyle/>
+                    <a:p>
+                      <a:pPr marL="0" lvl="0" indent="0" algn="r">
+                        <a:buNone/>
+                      </a:pPr>
+                      <a:r>
                         <a:t>11.75</a:t>
                       </a:r>
                     </a:p>
                   </a:txBody>
-                </a:tc>
+                  <a:tcPr/>
+                </a:tc>
+                <a:extLst>
+                  <a:ext uri="{0D108BD9-81ED-4DB2-BD59-A6C34878D82A}">
+                    <a16:rowId xmlns:a16="http://schemas.microsoft.com/office/drawing/2014/main" val="10003"/>
+                  </a:ext>
+                </a:extLst>
               </a:tr>
               <a:tr h="0">
                 <a:tc>
@@ -6832,61 +7251,66 @@
                     <a:bodyPr/>
                     <a:lstStyle/>
                     <a:p>
-                      <a:pPr lvl="0" indent="0" marL="0" algn="l">
-                        <a:buNone/>
-                      </a:pPr>
-                      <a:r>
-                        <a:rPr/>
+                      <a:pPr marL="0" lvl="0" indent="0" algn="l">
+                        <a:buNone/>
+                      </a:pPr>
+                      <a:r>
                         <a:t>Difference Coffee</a:t>
                       </a:r>
                     </a:p>
                   </a:txBody>
-                </a:tc>
-                <a:tc>
-                  <a:txBody>
-                    <a:bodyPr/>
-                    <a:lstStyle/>
-                    <a:p>
-                      <a:pPr lvl="0" indent="0" marL="0" algn="r">
-                        <a:buNone/>
-                      </a:pPr>
-                      <a:r>
-                        <a:rPr/>
+                  <a:tcPr/>
+                </a:tc>
+                <a:tc>
+                  <a:txBody>
+                    <a:bodyPr/>
+                    <a:lstStyle/>
+                    <a:p>
+                      <a:pPr marL="0" lvl="0" indent="0" algn="r">
+                        <a:buNone/>
+                      </a:pPr>
+                      <a:r>
                         <a:t>6</a:t>
                       </a:r>
                     </a:p>
                   </a:txBody>
-                </a:tc>
-                <a:tc>
-                  <a:txBody>
-                    <a:bodyPr/>
-                    <a:lstStyle/>
-                    <a:p>
-                      <a:pPr lvl="0" indent="0" marL="0" algn="r">
-                        <a:buNone/>
-                      </a:pPr>
-                      <a:r>
-                        <a:rPr/>
+                  <a:tcPr/>
+                </a:tc>
+                <a:tc>
+                  <a:txBody>
+                    <a:bodyPr/>
+                    <a:lstStyle/>
+                    <a:p>
+                      <a:pPr marL="0" lvl="0" indent="0" algn="r">
+                        <a:buNone/>
+                      </a:pPr>
+                      <a:r>
                         <a:t>94.33</a:t>
                       </a:r>
                     </a:p>
                   </a:txBody>
-                </a:tc>
-                <a:tc>
-                  <a:txBody>
-                    <a:bodyPr/>
-                    <a:lstStyle/>
-                    <a:p>
-                      <a:pPr lvl="0" indent="0" marL="0" algn="r">
-                        <a:buNone/>
-                      </a:pPr>
-                      <a:r>
-                        <a:rPr/>
+                  <a:tcPr/>
+                </a:tc>
+                <a:tc>
+                  <a:txBody>
+                    <a:bodyPr/>
+                    <a:lstStyle/>
+                    <a:p>
+                      <a:pPr marL="0" lvl="0" indent="0" algn="r">
+                        <a:buNone/>
+                      </a:pPr>
+                      <a:r>
                         <a:t>104.07</a:t>
                       </a:r>
                     </a:p>
                   </a:txBody>
-                </a:tc>
+                  <a:tcPr/>
+                </a:tc>
+                <a:extLst>
+                  <a:ext uri="{0D108BD9-81ED-4DB2-BD59-A6C34878D82A}">
+                    <a16:rowId xmlns:a16="http://schemas.microsoft.com/office/drawing/2014/main" val="10004"/>
+                  </a:ext>
+                </a:extLst>
               </a:tr>
               <a:tr h="0">
                 <a:tc>
@@ -6894,61 +7318,66 @@
                     <a:bodyPr/>
                     <a:lstStyle/>
                     <a:p>
-                      <a:pPr lvl="0" indent="0" marL="0" algn="l">
-                        <a:buNone/>
-                      </a:pPr>
-                      <a:r>
-                        <a:rPr/>
+                      <a:pPr marL="0" lvl="0" indent="0" algn="l">
+                        <a:buNone/>
+                      </a:pPr>
+                      <a:r>
                         <a:t>GK Coffee</a:t>
                       </a:r>
                     </a:p>
                   </a:txBody>
-                </a:tc>
-                <a:tc>
-                  <a:txBody>
-                    <a:bodyPr/>
-                    <a:lstStyle/>
-                    <a:p>
-                      <a:pPr lvl="0" indent="0" marL="0" algn="r">
-                        <a:buNone/>
-                      </a:pPr>
-                      <a:r>
-                        <a:rPr/>
+                  <a:tcPr/>
+                </a:tc>
+                <a:tc>
+                  <a:txBody>
+                    <a:bodyPr/>
+                    <a:lstStyle/>
+                    <a:p>
+                      <a:pPr marL="0" lvl="0" indent="0" algn="r">
+                        <a:buNone/>
+                      </a:pPr>
+                      <a:r>
                         <a:t>36</a:t>
                       </a:r>
                     </a:p>
                   </a:txBody>
-                </a:tc>
-                <a:tc>
-                  <a:txBody>
-                    <a:bodyPr/>
-                    <a:lstStyle/>
-                    <a:p>
-                      <a:pPr lvl="0" indent="0" marL="0" algn="r">
-                        <a:buNone/>
-                      </a:pPr>
-                      <a:r>
-                        <a:rPr/>
+                  <a:tcPr/>
+                </a:tc>
+                <a:tc>
+                  <a:txBody>
+                    <a:bodyPr/>
+                    <a:lstStyle/>
+                    <a:p>
+                      <a:pPr marL="0" lvl="0" indent="0" algn="r">
+                        <a:buNone/>
+                      </a:pPr>
+                      <a:r>
                         <a:t>94.25</a:t>
                       </a:r>
                     </a:p>
                   </a:txBody>
-                </a:tc>
-                <a:tc>
-                  <a:txBody>
-                    <a:bodyPr/>
-                    <a:lstStyle/>
-                    <a:p>
-                      <a:pPr lvl="0" indent="0" marL="0" algn="r">
-                        <a:buNone/>
-                      </a:pPr>
-                      <a:r>
-                        <a:rPr/>
+                  <a:tcPr/>
+                </a:tc>
+                <a:tc>
+                  <a:txBody>
+                    <a:bodyPr/>
+                    <a:lstStyle/>
+                    <a:p>
+                      <a:pPr marL="0" lvl="0" indent="0" algn="r">
+                        <a:buNone/>
+                      </a:pPr>
+                      <a:r>
                         <a:t>11.44</a:t>
                       </a:r>
                     </a:p>
                   </a:txBody>
-                </a:tc>
+                  <a:tcPr/>
+                </a:tc>
+                <a:extLst>
+                  <a:ext uri="{0D108BD9-81ED-4DB2-BD59-A6C34878D82A}">
+                    <a16:rowId xmlns:a16="http://schemas.microsoft.com/office/drawing/2014/main" val="10005"/>
+                  </a:ext>
+                </a:extLst>
               </a:tr>
               <a:tr h="0">
                 <a:tc>
@@ -6956,61 +7385,66 @@
                     <a:bodyPr/>
                     <a:lstStyle/>
                     <a:p>
-                      <a:pPr lvl="0" indent="0" marL="0" algn="l">
-                        <a:buNone/>
-                      </a:pPr>
-                      <a:r>
-                        <a:rPr/>
+                      <a:pPr marL="0" lvl="0" indent="0" algn="l">
+                        <a:buNone/>
+                      </a:pPr>
+                      <a:r>
                         <a:t>Dragonfly Coffee Roasters</a:t>
                       </a:r>
                     </a:p>
                   </a:txBody>
-                </a:tc>
-                <a:tc>
-                  <a:txBody>
-                    <a:bodyPr/>
-                    <a:lstStyle/>
-                    <a:p>
-                      <a:pPr lvl="0" indent="0" marL="0" algn="r">
-                        <a:buNone/>
-                      </a:pPr>
-                      <a:r>
-                        <a:rPr/>
+                  <a:tcPr/>
+                </a:tc>
+                <a:tc>
+                  <a:txBody>
+                    <a:bodyPr/>
+                    <a:lstStyle/>
+                    <a:p>
+                      <a:pPr marL="0" lvl="0" indent="0" algn="r">
+                        <a:buNone/>
+                      </a:pPr>
+                      <a:r>
                         <a:t>37</a:t>
                       </a:r>
                     </a:p>
                   </a:txBody>
-                </a:tc>
-                <a:tc>
-                  <a:txBody>
-                    <a:bodyPr/>
-                    <a:lstStyle/>
-                    <a:p>
-                      <a:pPr lvl="0" indent="0" marL="0" algn="r">
-                        <a:buNone/>
-                      </a:pPr>
-                      <a:r>
-                        <a:rPr/>
+                  <a:tcPr/>
+                </a:tc>
+                <a:tc>
+                  <a:txBody>
+                    <a:bodyPr/>
+                    <a:lstStyle/>
+                    <a:p>
+                      <a:pPr marL="0" lvl="0" indent="0" algn="r">
+                        <a:buNone/>
+                      </a:pPr>
+                      <a:r>
                         <a:t>94.19</a:t>
                       </a:r>
                     </a:p>
                   </a:txBody>
-                </a:tc>
-                <a:tc>
-                  <a:txBody>
-                    <a:bodyPr/>
-                    <a:lstStyle/>
-                    <a:p>
-                      <a:pPr lvl="0" indent="0" marL="0" algn="r">
-                        <a:buNone/>
-                      </a:pPr>
-                      <a:r>
-                        <a:rPr/>
+                  <a:tcPr/>
+                </a:tc>
+                <a:tc>
+                  <a:txBody>
+                    <a:bodyPr/>
+                    <a:lstStyle/>
+                    <a:p>
+                      <a:pPr marL="0" lvl="0" indent="0" algn="r">
+                        <a:buNone/>
+                      </a:pPr>
+                      <a:r>
                         <a:t>16.34</a:t>
                       </a:r>
                     </a:p>
                   </a:txBody>
-                </a:tc>
+                  <a:tcPr/>
+                </a:tc>
+                <a:extLst>
+                  <a:ext uri="{0D108BD9-81ED-4DB2-BD59-A6C34878D82A}">
+                    <a16:rowId xmlns:a16="http://schemas.microsoft.com/office/drawing/2014/main" val="10006"/>
+                  </a:ext>
+                </a:extLst>
               </a:tr>
               <a:tr h="0">
                 <a:tc>
@@ -7018,61 +7452,66 @@
                     <a:bodyPr/>
                     <a:lstStyle/>
                     <a:p>
-                      <a:pPr lvl="0" indent="0" marL="0" algn="l">
-                        <a:buNone/>
-                      </a:pPr>
-                      <a:r>
-                        <a:rPr/>
+                      <a:pPr marL="0" lvl="0" indent="0" algn="l">
+                        <a:buNone/>
+                      </a:pPr>
+                      <a:r>
                         <a:t>Simon Hsieh’s Aroma Roast Coffees</a:t>
                       </a:r>
                     </a:p>
                   </a:txBody>
-                </a:tc>
-                <a:tc>
-                  <a:txBody>
-                    <a:bodyPr/>
-                    <a:lstStyle/>
-                    <a:p>
-                      <a:pPr lvl="0" indent="0" marL="0" algn="r">
-                        <a:buNone/>
-                      </a:pPr>
-                      <a:r>
-                        <a:rPr/>
+                  <a:tcPr/>
+                </a:tc>
+                <a:tc>
+                  <a:txBody>
+                    <a:bodyPr/>
+                    <a:lstStyle/>
+                    <a:p>
+                      <a:pPr marL="0" lvl="0" indent="0" algn="r">
+                        <a:buNone/>
+                      </a:pPr>
+                      <a:r>
                         <a:t>11</a:t>
                       </a:r>
                     </a:p>
                   </a:txBody>
-                </a:tc>
-                <a:tc>
-                  <a:txBody>
-                    <a:bodyPr/>
-                    <a:lstStyle/>
-                    <a:p>
-                      <a:pPr lvl="0" indent="0" marL="0" algn="r">
-                        <a:buNone/>
-                      </a:pPr>
-                      <a:r>
-                        <a:rPr/>
+                  <a:tcPr/>
+                </a:tc>
+                <a:tc>
+                  <a:txBody>
+                    <a:bodyPr/>
+                    <a:lstStyle/>
+                    <a:p>
+                      <a:pPr marL="0" lvl="0" indent="0" algn="r">
+                        <a:buNone/>
+                      </a:pPr>
+                      <a:r>
                         <a:t>94.18</a:t>
                       </a:r>
                     </a:p>
                   </a:txBody>
-                </a:tc>
-                <a:tc>
-                  <a:txBody>
-                    <a:bodyPr/>
-                    <a:lstStyle/>
-                    <a:p>
-                      <a:pPr lvl="0" indent="0" marL="0" algn="r">
-                        <a:buNone/>
-                      </a:pPr>
-                      <a:r>
-                        <a:rPr/>
+                  <a:tcPr/>
+                </a:tc>
+                <a:tc>
+                  <a:txBody>
+                    <a:bodyPr/>
+                    <a:lstStyle/>
+                    <a:p>
+                      <a:pPr marL="0" lvl="0" indent="0" algn="r">
+                        <a:buNone/>
+                      </a:pPr>
+                      <a:r>
                         <a:t>13.58</a:t>
                       </a:r>
                     </a:p>
                   </a:txBody>
-                </a:tc>
+                  <a:tcPr/>
+                </a:tc>
+                <a:extLst>
+                  <a:ext uri="{0D108BD9-81ED-4DB2-BD59-A6C34878D82A}">
+                    <a16:rowId xmlns:a16="http://schemas.microsoft.com/office/drawing/2014/main" val="10007"/>
+                  </a:ext>
+                </a:extLst>
               </a:tr>
               <a:tr h="0">
                 <a:tc>
@@ -7080,61 +7519,66 @@
                     <a:bodyPr/>
                     <a:lstStyle/>
                     <a:p>
-                      <a:pPr lvl="0" indent="0" marL="0" algn="l">
-                        <a:buNone/>
-                      </a:pPr>
-                      <a:r>
-                        <a:rPr/>
+                      <a:pPr marL="0" lvl="0" indent="0" algn="l">
+                        <a:buNone/>
+                      </a:pPr>
+                      <a:r>
                         <a:t>Kakalove Cafe</a:t>
                       </a:r>
                     </a:p>
                   </a:txBody>
-                </a:tc>
-                <a:tc>
-                  <a:txBody>
-                    <a:bodyPr/>
-                    <a:lstStyle/>
-                    <a:p>
-                      <a:pPr lvl="0" indent="0" marL="0" algn="r">
-                        <a:buNone/>
-                      </a:pPr>
-                      <a:r>
-                        <a:rPr/>
+                  <a:tcPr/>
+                </a:tc>
+                <a:tc>
+                  <a:txBody>
+                    <a:bodyPr/>
+                    <a:lstStyle/>
+                    <a:p>
+                      <a:pPr marL="0" lvl="0" indent="0" algn="r">
+                        <a:buNone/>
+                      </a:pPr>
+                      <a:r>
                         <a:t>141</a:t>
                       </a:r>
                     </a:p>
                   </a:txBody>
-                </a:tc>
-                <a:tc>
-                  <a:txBody>
-                    <a:bodyPr/>
-                    <a:lstStyle/>
-                    <a:p>
-                      <a:pPr lvl="0" indent="0" marL="0" algn="r">
-                        <a:buNone/>
-                      </a:pPr>
-                      <a:r>
-                        <a:rPr/>
+                  <a:tcPr/>
+                </a:tc>
+                <a:tc>
+                  <a:txBody>
+                    <a:bodyPr/>
+                    <a:lstStyle/>
+                    <a:p>
+                      <a:pPr marL="0" lvl="0" indent="0" algn="r">
+                        <a:buNone/>
+                      </a:pPr>
+                      <a:r>
                         <a:t>94.16</a:t>
                       </a:r>
                     </a:p>
                   </a:txBody>
-                </a:tc>
-                <a:tc>
-                  <a:txBody>
-                    <a:bodyPr/>
-                    <a:lstStyle/>
-                    <a:p>
-                      <a:pPr lvl="0" indent="0" marL="0" algn="r">
-                        <a:buNone/>
-                      </a:pPr>
-                      <a:r>
-                        <a:rPr/>
+                  <a:tcPr/>
+                </a:tc>
+                <a:tc>
+                  <a:txBody>
+                    <a:bodyPr/>
+                    <a:lstStyle/>
+                    <a:p>
+                      <a:pPr marL="0" lvl="0" indent="0" algn="r">
+                        <a:buNone/>
+                      </a:pPr>
+                      <a:r>
                         <a:t>6.52</a:t>
                       </a:r>
                     </a:p>
                   </a:txBody>
-                </a:tc>
+                  <a:tcPr/>
+                </a:tc>
+                <a:extLst>
+                  <a:ext uri="{0D108BD9-81ED-4DB2-BD59-A6C34878D82A}">
+                    <a16:rowId xmlns:a16="http://schemas.microsoft.com/office/drawing/2014/main" val="10008"/>
+                  </a:ext>
+                </a:extLst>
               </a:tr>
             </a:tbl>
           </a:graphicData>
@@ -7142,6 +7586,9 @@
       </p:graphicFrame>
     </p:spTree>
   </p:cSld>
+  <p:clrMapOvr>
+    <a:masterClrMapping/>
+  </p:clrMapOvr>
 </p:sld>
 </file>
 
@@ -7177,11 +7624,10 @@
           <a:bodyPr/>
           <a:lstStyle/>
           <a:p>
-            <a:pPr lvl="0" indent="0" marL="0">
+            <a:pPr marL="0" lvl="0" indent="0">
               <a:buNone/>
             </a:pPr>
             <a:r>
-              <a:rPr/>
               <a:t>Which roast to stock?</a:t>
             </a:r>
           </a:p>
@@ -7208,11 +7654,41 @@
                 <a:tableStyleId>{5C22544A-7EE6-4342-B048-85BDC9FD1C3A}</a:tableStyleId>
               </a:tblPr>
               <a:tblGrid>
-                <a:gridCol w="1638300"/>
-                <a:gridCol w="1638300"/>
-                <a:gridCol w="1638300"/>
-                <a:gridCol w="1638300"/>
-                <a:gridCol w="1638300"/>
+                <a:gridCol w="1638300">
+                  <a:extLst>
+                    <a:ext uri="{9D8B030D-6E8A-4147-A177-3AD203B41FA5}">
+                      <a16:colId xmlns:a16="http://schemas.microsoft.com/office/drawing/2014/main" val="20000"/>
+                    </a:ext>
+                  </a:extLst>
+                </a:gridCol>
+                <a:gridCol w="1638300">
+                  <a:extLst>
+                    <a:ext uri="{9D8B030D-6E8A-4147-A177-3AD203B41FA5}">
+                      <a16:colId xmlns:a16="http://schemas.microsoft.com/office/drawing/2014/main" val="20001"/>
+                    </a:ext>
+                  </a:extLst>
+                </a:gridCol>
+                <a:gridCol w="1638300">
+                  <a:extLst>
+                    <a:ext uri="{9D8B030D-6E8A-4147-A177-3AD203B41FA5}">
+                      <a16:colId xmlns:a16="http://schemas.microsoft.com/office/drawing/2014/main" val="20002"/>
+                    </a:ext>
+                  </a:extLst>
+                </a:gridCol>
+                <a:gridCol w="1638300">
+                  <a:extLst>
+                    <a:ext uri="{9D8B030D-6E8A-4147-A177-3AD203B41FA5}">
+                      <a16:colId xmlns:a16="http://schemas.microsoft.com/office/drawing/2014/main" val="20003"/>
+                    </a:ext>
+                  </a:extLst>
+                </a:gridCol>
+                <a:gridCol w="1638300">
+                  <a:extLst>
+                    <a:ext uri="{9D8B030D-6E8A-4147-A177-3AD203B41FA5}">
+                      <a16:colId xmlns:a16="http://schemas.microsoft.com/office/drawing/2014/main" val="20004"/>
+                    </a:ext>
+                  </a:extLst>
+                </a:gridCol>
               </a:tblGrid>
               <a:tr h="0">
                 <a:tc>
@@ -7220,11 +7696,10 @@
                     <a:bodyPr/>
                     <a:lstStyle/>
                     <a:p>
-                      <a:pPr lvl="0" indent="0" marL="0" algn="l">
-                        <a:buNone/>
-                      </a:pPr>
-                      <a:r>
-                        <a:rPr/>
+                      <a:pPr marL="0" lvl="0" indent="0" algn="l">
+                        <a:buNone/>
+                      </a:pPr>
+                      <a:r>
                         <a:t>Roast</a:t>
                       </a:r>
                     </a:p>
@@ -7236,11 +7711,10 @@
                     <a:bodyPr/>
                     <a:lstStyle/>
                     <a:p>
-                      <a:pPr lvl="0" indent="0" marL="0" algn="r">
-                        <a:buNone/>
-                      </a:pPr>
-                      <a:r>
-                        <a:rPr/>
+                      <a:pPr marL="0" lvl="0" indent="0" algn="r">
+                        <a:buNone/>
+                      </a:pPr>
+                      <a:r>
                         <a:t>n</a:t>
                       </a:r>
                     </a:p>
@@ -7252,11 +7726,10 @@
                     <a:bodyPr/>
                     <a:lstStyle/>
                     <a:p>
-                      <a:pPr lvl="0" indent="0" marL="0" algn="r">
-                        <a:buNone/>
-                      </a:pPr>
-                      <a:r>
-                        <a:rPr/>
+                      <a:pPr marL="0" lvl="0" indent="0" algn="r">
+                        <a:buNone/>
+                      </a:pPr>
+                      <a:r>
                         <a:t>avg_rating</a:t>
                       </a:r>
                     </a:p>
@@ -7268,11 +7741,10 @@
                     <a:bodyPr/>
                     <a:lstStyle/>
                     <a:p>
-                      <a:pPr lvl="0" indent="0" marL="0" algn="r">
-                        <a:buNone/>
-                      </a:pPr>
-                      <a:r>
-                        <a:rPr/>
+                      <a:pPr marL="0" lvl="0" indent="0" algn="r">
+                        <a:buNone/>
+                      </a:pPr>
+                      <a:r>
                         <a:t>avg_cost</a:t>
                       </a:r>
                     </a:p>
@@ -7284,17 +7756,21 @@
                     <a:bodyPr/>
                     <a:lstStyle/>
                     <a:p>
-                      <a:pPr lvl="0" indent="0" marL="0" algn="r">
-                        <a:buNone/>
-                      </a:pPr>
-                      <a:r>
-                        <a:rPr/>
+                      <a:pPr marL="0" lvl="0" indent="0" algn="r">
+                        <a:buNone/>
+                      </a:pPr>
+                      <a:r>
                         <a:t>avg_value</a:t>
                       </a:r>
                     </a:p>
                   </a:txBody>
                   <a:tcPr/>
                 </a:tc>
+                <a:extLst>
+                  <a:ext uri="{0D108BD9-81ED-4DB2-BD59-A6C34878D82A}">
+                    <a16:rowId xmlns:a16="http://schemas.microsoft.com/office/drawing/2014/main" val="10000"/>
+                  </a:ext>
+                </a:extLst>
               </a:tr>
               <a:tr h="0">
                 <a:tc>
@@ -7302,76 +7778,81 @@
                     <a:bodyPr/>
                     <a:lstStyle/>
                     <a:p>
-                      <a:pPr lvl="0" indent="0" marL="0" algn="l">
-                        <a:buNone/>
-                      </a:pPr>
-                      <a:r>
-                        <a:rPr/>
+                      <a:pPr marL="0" lvl="0" indent="0" algn="l">
+                        <a:buNone/>
+                      </a:pPr>
+                      <a:r>
                         <a:t>Light</a:t>
                       </a:r>
                     </a:p>
                   </a:txBody>
-                </a:tc>
-                <a:tc>
-                  <a:txBody>
-                    <a:bodyPr/>
-                    <a:lstStyle/>
-                    <a:p>
-                      <a:pPr lvl="0" indent="0" marL="0" algn="r">
-                        <a:buNone/>
-                      </a:pPr>
-                      <a:r>
-                        <a:rPr/>
+                  <a:tcPr/>
+                </a:tc>
+                <a:tc>
+                  <a:txBody>
+                    <a:bodyPr/>
+                    <a:lstStyle/>
+                    <a:p>
+                      <a:pPr marL="0" lvl="0" indent="0" algn="r">
+                        <a:buNone/>
+                      </a:pPr>
+                      <a:r>
                         <a:t>287</a:t>
                       </a:r>
                     </a:p>
                   </a:txBody>
-                </a:tc>
-                <a:tc>
-                  <a:txBody>
-                    <a:bodyPr/>
-                    <a:lstStyle/>
-                    <a:p>
-                      <a:pPr lvl="0" indent="0" marL="0" algn="r">
-                        <a:buNone/>
-                      </a:pPr>
-                      <a:r>
-                        <a:rPr/>
+                  <a:tcPr/>
+                </a:tc>
+                <a:tc>
+                  <a:txBody>
+                    <a:bodyPr/>
+                    <a:lstStyle/>
+                    <a:p>
+                      <a:pPr marL="0" lvl="0" indent="0" algn="r">
+                        <a:buNone/>
+                      </a:pPr>
+                      <a:r>
                         <a:t>93.52</a:t>
                       </a:r>
                     </a:p>
                   </a:txBody>
-                </a:tc>
-                <a:tc>
-                  <a:txBody>
-                    <a:bodyPr/>
-                    <a:lstStyle/>
-                    <a:p>
-                      <a:pPr lvl="0" indent="0" marL="0" algn="r">
-                        <a:buNone/>
-                      </a:pPr>
-                      <a:r>
-                        <a:rPr/>
+                  <a:tcPr/>
+                </a:tc>
+                <a:tc>
+                  <a:txBody>
+                    <a:bodyPr/>
+                    <a:lstStyle/>
+                    <a:p>
+                      <a:pPr marL="0" lvl="0" indent="0" algn="r">
+                        <a:buNone/>
+                      </a:pPr>
+                      <a:r>
                         <a:t>11.44</a:t>
                       </a:r>
                     </a:p>
                   </a:txBody>
-                </a:tc>
-                <a:tc>
-                  <a:txBody>
-                    <a:bodyPr/>
-                    <a:lstStyle/>
-                    <a:p>
-                      <a:pPr lvl="0" indent="0" marL="0" algn="r">
-                        <a:buNone/>
-                      </a:pPr>
-                      <a:r>
-                        <a:rPr/>
+                  <a:tcPr/>
+                </a:tc>
+                <a:tc>
+                  <a:txBody>
+                    <a:bodyPr/>
+                    <a:lstStyle/>
+                    <a:p>
+                      <a:pPr marL="0" lvl="0" indent="0" algn="r">
+                        <a:buNone/>
+                      </a:pPr>
+                      <a:r>
                         <a:t>12.74</a:t>
                       </a:r>
                     </a:p>
                   </a:txBody>
-                </a:tc>
+                  <a:tcPr/>
+                </a:tc>
+                <a:extLst>
+                  <a:ext uri="{0D108BD9-81ED-4DB2-BD59-A6C34878D82A}">
+                    <a16:rowId xmlns:a16="http://schemas.microsoft.com/office/drawing/2014/main" val="10001"/>
+                  </a:ext>
+                </a:extLst>
               </a:tr>
               <a:tr h="0">
                 <a:tc>
@@ -7379,76 +7860,81 @@
                     <a:bodyPr/>
                     <a:lstStyle/>
                     <a:p>
-                      <a:pPr lvl="0" indent="0" marL="0" algn="l">
-                        <a:buNone/>
-                      </a:pPr>
-                      <a:r>
-                        <a:rPr/>
+                      <a:pPr marL="0" lvl="0" indent="0" algn="l">
+                        <a:buNone/>
+                      </a:pPr>
+                      <a:r>
                         <a:t>Medium-Light</a:t>
                       </a:r>
                     </a:p>
                   </a:txBody>
-                </a:tc>
-                <a:tc>
-                  <a:txBody>
-                    <a:bodyPr/>
-                    <a:lstStyle/>
-                    <a:p>
-                      <a:pPr lvl="0" indent="0" marL="0" algn="r">
-                        <a:buNone/>
-                      </a:pPr>
-                      <a:r>
-                        <a:rPr/>
+                  <a:tcPr/>
+                </a:tc>
+                <a:tc>
+                  <a:txBody>
+                    <a:bodyPr/>
+                    <a:lstStyle/>
+                    <a:p>
+                      <a:pPr marL="0" lvl="0" indent="0" algn="r">
+                        <a:buNone/>
+                      </a:pPr>
+                      <a:r>
                         <a:t>1490</a:t>
                       </a:r>
                     </a:p>
                   </a:txBody>
-                </a:tc>
-                <a:tc>
-                  <a:txBody>
-                    <a:bodyPr/>
-                    <a:lstStyle/>
-                    <a:p>
-                      <a:pPr lvl="0" indent="0" marL="0" algn="r">
-                        <a:buNone/>
-                      </a:pPr>
-                      <a:r>
-                        <a:rPr/>
+                  <a:tcPr/>
+                </a:tc>
+                <a:tc>
+                  <a:txBody>
+                    <a:bodyPr/>
+                    <a:lstStyle/>
+                    <a:p>
+                      <a:pPr marL="0" lvl="0" indent="0" algn="r">
+                        <a:buNone/>
+                      </a:pPr>
+                      <a:r>
                         <a:t>93.23</a:t>
                       </a:r>
                     </a:p>
                   </a:txBody>
-                </a:tc>
-                <a:tc>
-                  <a:txBody>
-                    <a:bodyPr/>
-                    <a:lstStyle/>
-                    <a:p>
-                      <a:pPr lvl="0" indent="0" marL="0" algn="r">
-                        <a:buNone/>
-                      </a:pPr>
-                      <a:r>
-                        <a:rPr/>
+                  <a:tcPr/>
+                </a:tc>
+                <a:tc>
+                  <a:txBody>
+                    <a:bodyPr/>
+                    <a:lstStyle/>
+                    <a:p>
+                      <a:pPr marL="0" lvl="0" indent="0" algn="r">
+                        <a:buNone/>
+                      </a:pPr>
+                      <a:r>
                         <a:t>8.99</a:t>
                       </a:r>
                     </a:p>
                   </a:txBody>
-                </a:tc>
-                <a:tc>
-                  <a:txBody>
-                    <a:bodyPr/>
-                    <a:lstStyle/>
-                    <a:p>
-                      <a:pPr lvl="0" indent="0" marL="0" algn="r">
-                        <a:buNone/>
-                      </a:pPr>
-                      <a:r>
-                        <a:rPr/>
+                  <a:tcPr/>
+                </a:tc>
+                <a:tc>
+                  <a:txBody>
+                    <a:bodyPr/>
+                    <a:lstStyle/>
+                    <a:p>
+                      <a:pPr marL="0" lvl="0" indent="0" algn="r">
+                        <a:buNone/>
+                      </a:pPr>
+                      <a:r>
                         <a:t>15.59</a:t>
                       </a:r>
                     </a:p>
                   </a:txBody>
-                </a:tc>
+                  <a:tcPr/>
+                </a:tc>
+                <a:extLst>
+                  <a:ext uri="{0D108BD9-81ED-4DB2-BD59-A6C34878D82A}">
+                    <a16:rowId xmlns:a16="http://schemas.microsoft.com/office/drawing/2014/main" val="10002"/>
+                  </a:ext>
+                </a:extLst>
               </a:tr>
               <a:tr h="0">
                 <a:tc>
@@ -7456,76 +7942,81 @@
                     <a:bodyPr/>
                     <a:lstStyle/>
                     <a:p>
-                      <a:pPr lvl="0" indent="0" marL="0" algn="l">
-                        <a:buNone/>
-                      </a:pPr>
-                      <a:r>
-                        <a:rPr/>
+                      <a:pPr marL="0" lvl="0" indent="0" algn="l">
+                        <a:buNone/>
+                      </a:pPr>
+                      <a:r>
                         <a:t>Medium</a:t>
                       </a:r>
                     </a:p>
                   </a:txBody>
-                </a:tc>
-                <a:tc>
-                  <a:txBody>
-                    <a:bodyPr/>
-                    <a:lstStyle/>
-                    <a:p>
-                      <a:pPr lvl="0" indent="0" marL="0" algn="r">
-                        <a:buNone/>
-                      </a:pPr>
-                      <a:r>
-                        <a:rPr/>
+                  <a:tcPr/>
+                </a:tc>
+                <a:tc>
+                  <a:txBody>
+                    <a:bodyPr/>
+                    <a:lstStyle/>
+                    <a:p>
+                      <a:pPr marL="0" lvl="0" indent="0" algn="r">
+                        <a:buNone/>
+                      </a:pPr>
+                      <a:r>
                         <a:t>259</a:t>
                       </a:r>
                     </a:p>
                   </a:txBody>
-                </a:tc>
-                <a:tc>
-                  <a:txBody>
-                    <a:bodyPr/>
-                    <a:lstStyle/>
-                    <a:p>
-                      <a:pPr lvl="0" indent="0" marL="0" algn="r">
-                        <a:buNone/>
-                      </a:pPr>
-                      <a:r>
-                        <a:rPr/>
+                  <a:tcPr/>
+                </a:tc>
+                <a:tc>
+                  <a:txBody>
+                    <a:bodyPr/>
+                    <a:lstStyle/>
+                    <a:p>
+                      <a:pPr marL="0" lvl="0" indent="0" algn="r">
+                        <a:buNone/>
+                      </a:pPr>
+                      <a:r>
                         <a:t>92.27</a:t>
                       </a:r>
                     </a:p>
                   </a:txBody>
-                </a:tc>
-                <a:tc>
-                  <a:txBody>
-                    <a:bodyPr/>
-                    <a:lstStyle/>
-                    <a:p>
-                      <a:pPr lvl="0" indent="0" marL="0" algn="r">
-                        <a:buNone/>
-                      </a:pPr>
-                      <a:r>
-                        <a:rPr/>
+                  <a:tcPr/>
+                </a:tc>
+                <a:tc>
+                  <a:txBody>
+                    <a:bodyPr/>
+                    <a:lstStyle/>
+                    <a:p>
+                      <a:pPr marL="0" lvl="0" indent="0" algn="r">
+                        <a:buNone/>
+                      </a:pPr>
+                      <a:r>
                         <a:t>7.06</a:t>
                       </a:r>
                     </a:p>
                   </a:txBody>
-                </a:tc>
-                <a:tc>
-                  <a:txBody>
-                    <a:bodyPr/>
-                    <a:lstStyle/>
-                    <a:p>
-                      <a:pPr lvl="0" indent="0" marL="0" algn="r">
-                        <a:buNone/>
-                      </a:pPr>
-                      <a:r>
-                        <a:rPr/>
+                  <a:tcPr/>
+                </a:tc>
+                <a:tc>
+                  <a:txBody>
+                    <a:bodyPr/>
+                    <a:lstStyle/>
+                    <a:p>
+                      <a:pPr marL="0" lvl="0" indent="0" algn="r">
+                        <a:buNone/>
+                      </a:pPr>
+                      <a:r>
                         <a:t>18.37</a:t>
                       </a:r>
                     </a:p>
                   </a:txBody>
-                </a:tc>
+                  <a:tcPr/>
+                </a:tc>
+                <a:extLst>
+                  <a:ext uri="{0D108BD9-81ED-4DB2-BD59-A6C34878D82A}">
+                    <a16:rowId xmlns:a16="http://schemas.microsoft.com/office/drawing/2014/main" val="10003"/>
+                  </a:ext>
+                </a:extLst>
               </a:tr>
               <a:tr h="0">
                 <a:tc>
@@ -7533,76 +8024,81 @@
                     <a:bodyPr/>
                     <a:lstStyle/>
                     <a:p>
-                      <a:pPr lvl="0" indent="0" marL="0" algn="l">
-                        <a:buNone/>
-                      </a:pPr>
-                      <a:r>
-                        <a:rPr/>
+                      <a:pPr marL="0" lvl="0" indent="0" algn="l">
+                        <a:buNone/>
+                      </a:pPr>
+                      <a:r>
                         <a:t>Medium-Dark</a:t>
                       </a:r>
                     </a:p>
                   </a:txBody>
-                </a:tc>
-                <a:tc>
-                  <a:txBody>
-                    <a:bodyPr/>
-                    <a:lstStyle/>
-                    <a:p>
-                      <a:pPr lvl="0" indent="0" marL="0" algn="r">
-                        <a:buNone/>
-                      </a:pPr>
-                      <a:r>
-                        <a:rPr/>
+                  <a:tcPr/>
+                </a:tc>
+                <a:tc>
+                  <a:txBody>
+                    <a:bodyPr/>
+                    <a:lstStyle/>
+                    <a:p>
+                      <a:pPr marL="0" lvl="0" indent="0" algn="r">
+                        <a:buNone/>
+                      </a:pPr>
+                      <a:r>
                         <a:t>39</a:t>
                       </a:r>
                     </a:p>
                   </a:txBody>
-                </a:tc>
-                <a:tc>
-                  <a:txBody>
-                    <a:bodyPr/>
-                    <a:lstStyle/>
-                    <a:p>
-                      <a:pPr lvl="0" indent="0" marL="0" algn="r">
-                        <a:buNone/>
-                      </a:pPr>
-                      <a:r>
-                        <a:rPr/>
+                  <a:tcPr/>
+                </a:tc>
+                <a:tc>
+                  <a:txBody>
+                    <a:bodyPr/>
+                    <a:lstStyle/>
+                    <a:p>
+                      <a:pPr marL="0" lvl="0" indent="0" algn="r">
+                        <a:buNone/>
+                      </a:pPr>
+                      <a:r>
                         <a:t>91.87</a:t>
                       </a:r>
                     </a:p>
                   </a:txBody>
-                </a:tc>
-                <a:tc>
-                  <a:txBody>
-                    <a:bodyPr/>
-                    <a:lstStyle/>
-                    <a:p>
-                      <a:pPr lvl="0" indent="0" marL="0" algn="r">
-                        <a:buNone/>
-                      </a:pPr>
-                      <a:r>
-                        <a:rPr/>
+                  <a:tcPr/>
+                </a:tc>
+                <a:tc>
+                  <a:txBody>
+                    <a:bodyPr/>
+                    <a:lstStyle/>
+                    <a:p>
+                      <a:pPr marL="0" lvl="0" indent="0" algn="r">
+                        <a:buNone/>
+                      </a:pPr>
+                      <a:r>
                         <a:t>9.51</a:t>
                       </a:r>
                     </a:p>
                   </a:txBody>
-                </a:tc>
-                <a:tc>
-                  <a:txBody>
-                    <a:bodyPr/>
-                    <a:lstStyle/>
-                    <a:p>
-                      <a:pPr lvl="0" indent="0" marL="0" algn="r">
-                        <a:buNone/>
-                      </a:pPr>
-                      <a:r>
-                        <a:rPr/>
+                  <a:tcPr/>
+                </a:tc>
+                <a:tc>
+                  <a:txBody>
+                    <a:bodyPr/>
+                    <a:lstStyle/>
+                    <a:p>
+                      <a:pPr marL="0" lvl="0" indent="0" algn="r">
+                        <a:buNone/>
+                      </a:pPr>
+                      <a:r>
                         <a:t>20.34</a:t>
                       </a:r>
                     </a:p>
                   </a:txBody>
-                </a:tc>
+                  <a:tcPr/>
+                </a:tc>
+                <a:extLst>
+                  <a:ext uri="{0D108BD9-81ED-4DB2-BD59-A6C34878D82A}">
+                    <a16:rowId xmlns:a16="http://schemas.microsoft.com/office/drawing/2014/main" val="10004"/>
+                  </a:ext>
+                </a:extLst>
               </a:tr>
               <a:tr h="0">
                 <a:tc>
@@ -7610,76 +8106,81 @@
                     <a:bodyPr/>
                     <a:lstStyle/>
                     <a:p>
-                      <a:pPr lvl="0" indent="0" marL="0" algn="l">
-                        <a:buNone/>
-                      </a:pPr>
-                      <a:r>
-                        <a:rPr/>
+                      <a:pPr marL="0" lvl="0" indent="0" algn="l">
+                        <a:buNone/>
+                      </a:pPr>
+                      <a:r>
                         <a:t>Dark</a:t>
                       </a:r>
                     </a:p>
                   </a:txBody>
-                </a:tc>
-                <a:tc>
-                  <a:txBody>
-                    <a:bodyPr/>
-                    <a:lstStyle/>
-                    <a:p>
-                      <a:pPr lvl="0" indent="0" marL="0" algn="r">
-                        <a:buNone/>
-                      </a:pPr>
-                      <a:r>
-                        <a:rPr/>
+                  <a:tcPr/>
+                </a:tc>
+                <a:tc>
+                  <a:txBody>
+                    <a:bodyPr/>
+                    <a:lstStyle/>
+                    <a:p>
+                      <a:pPr marL="0" lvl="0" indent="0" algn="r">
+                        <a:buNone/>
+                      </a:pPr>
+                      <a:r>
                         <a:t>5</a:t>
                       </a:r>
                     </a:p>
                   </a:txBody>
-                </a:tc>
-                <a:tc>
-                  <a:txBody>
-                    <a:bodyPr/>
-                    <a:lstStyle/>
-                    <a:p>
-                      <a:pPr lvl="0" indent="0" marL="0" algn="r">
-                        <a:buNone/>
-                      </a:pPr>
-                      <a:r>
-                        <a:rPr/>
+                  <a:tcPr/>
+                </a:tc>
+                <a:tc>
+                  <a:txBody>
+                    <a:bodyPr/>
+                    <a:lstStyle/>
+                    <a:p>
+                      <a:pPr marL="0" lvl="0" indent="0" algn="r">
+                        <a:buNone/>
+                      </a:pPr>
+                      <a:r>
                         <a:t>88.20</a:t>
                       </a:r>
                     </a:p>
                   </a:txBody>
-                </a:tc>
-                <a:tc>
-                  <a:txBody>
-                    <a:bodyPr/>
-                    <a:lstStyle/>
-                    <a:p>
-                      <a:pPr lvl="0" indent="0" marL="0" algn="r">
-                        <a:buNone/>
-                      </a:pPr>
-                      <a:r>
-                        <a:rPr/>
+                  <a:tcPr/>
+                </a:tc>
+                <a:tc>
+                  <a:txBody>
+                    <a:bodyPr/>
+                    <a:lstStyle/>
+                    <a:p>
+                      <a:pPr marL="0" lvl="0" indent="0" algn="r">
+                        <a:buNone/>
+                      </a:pPr>
+                      <a:r>
                         <a:t>4.46</a:t>
                       </a:r>
                     </a:p>
                   </a:txBody>
-                </a:tc>
-                <a:tc>
-                  <a:txBody>
-                    <a:bodyPr/>
-                    <a:lstStyle/>
-                    <a:p>
-                      <a:pPr lvl="0" indent="0" marL="0" algn="r">
-                        <a:buNone/>
-                      </a:pPr>
-                      <a:r>
-                        <a:rPr/>
+                  <a:tcPr/>
+                </a:tc>
+                <a:tc>
+                  <a:txBody>
+                    <a:bodyPr/>
+                    <a:lstStyle/>
+                    <a:p>
+                      <a:pPr marL="0" lvl="0" indent="0" algn="r">
+                        <a:buNone/>
+                      </a:pPr>
+                      <a:r>
                         <a:t>22.64</a:t>
                       </a:r>
                     </a:p>
                   </a:txBody>
-                </a:tc>
+                  <a:tcPr/>
+                </a:tc>
+                <a:extLst>
+                  <a:ext uri="{0D108BD9-81ED-4DB2-BD59-A6C34878D82A}">
+                    <a16:rowId xmlns:a16="http://schemas.microsoft.com/office/drawing/2014/main" val="10005"/>
+                  </a:ext>
+                </a:extLst>
               </a:tr>
             </a:tbl>
           </a:graphicData>
@@ -7687,6 +8188,9 @@
       </p:graphicFrame>
     </p:spTree>
   </p:cSld>
+  <p:clrMapOvr>
+    <a:masterClrMapping/>
+  </p:clrMapOvr>
 </p:sld>
 </file>
 
@@ -7724,7 +8228,6 @@
           <a:p>
             <a:pPr lvl="0"/>
             <a:r>
-              <a:rPr/>
               <a:t>Most reviewed coffees are </a:t>
             </a:r>
             <a:r>
@@ -7732,14 +8235,12 @@
               <a:t>Medium-Light</a:t>
             </a:r>
             <a:r>
-              <a:rPr/>
               <a:t> roasts, the local specialty default.</a:t>
             </a:r>
           </a:p>
           <a:p>
             <a:pPr lvl="0"/>
             <a:r>
-              <a:rPr/>
               <a:t>Best-rated roast: </a:t>
             </a:r>
             <a:r>
@@ -7747,14 +8248,12 @@
               <a:t>Light</a:t>
             </a:r>
             <a:r>
-              <a:rPr/>
               <a:t> (avg rating 93.52).</a:t>
             </a:r>
           </a:p>
           <a:p>
             <a:pPr lvl="0"/>
             <a:r>
-              <a:rPr/>
               <a:t>Lighter roasts score best at the specialty end; stock mainly Medium-Light with a Light option for the top scorers, and keep dark roasts minimal.</a:t>
             </a:r>
           </a:p>
@@ -7762,6 +8261,9 @@
       </p:sp>
     </p:spTree>
   </p:cSld>
+  <p:clrMapOvr>
+    <a:masterClrMapping/>
+  </p:clrMapOvr>
 </p:sld>
 </file>
 
@@ -8083,265 +8585,4 @@
   </a:objectDefaults>
   <a:extraClrSchemeLst/>
 </a:theme>
-</file>
-
-<file path=ppt/theme/theme2.xml><?xml version="1.0" encoding="utf-8"?>
-<a:theme xmlns:a="http://schemas.openxmlformats.org/drawingml/2006/main" name="Office Theme">
-  <a:themeElements>
-    <a:clrScheme name="Office">
-      <a:dk1>
-        <a:sysClr val="windowText" lastClr="000000"/>
-      </a:dk1>
-      <a:lt1>
-        <a:sysClr val="window" lastClr="FFFFFF"/>
-      </a:lt1>
-      <a:dk2>
-        <a:srgbClr val="44546A"/>
-      </a:dk2>
-      <a:lt2>
-        <a:srgbClr val="E7E6E6"/>
-      </a:lt2>
-      <a:accent1>
-        <a:srgbClr val="5B9BD5"/>
-      </a:accent1>
-      <a:accent2>
-        <a:srgbClr val="ED7D31"/>
-      </a:accent2>
-      <a:accent3>
-        <a:srgbClr val="A5A5A5"/>
-      </a:accent3>
-      <a:accent4>
-        <a:srgbClr val="FFC000"/>
-      </a:accent4>
-      <a:accent5>
-        <a:srgbClr val="4472C4"/>
-      </a:accent5>
-      <a:accent6>
-        <a:srgbClr val="70AD47"/>
-      </a:accent6>
-      <a:hlink>
-        <a:srgbClr val="0563C1"/>
-      </a:hlink>
-      <a:folHlink>
-        <a:srgbClr val="954F72"/>
-      </a:folHlink>
-    </a:clrScheme>
-    <a:fontScheme name="Office">
-      <a:majorFont>
-        <a:latin typeface="Calibri Light" panose="020F0302020204030204"/>
-        <a:ea typeface=""/>
-        <a:cs typeface=""/>
-        <a:font script="Jpan" typeface="ＭＳ Ｐゴシック"/>
-        <a:font script="Hang" typeface="맑은 고딕"/>
-        <a:font script="Hans" typeface="宋体"/>
-        <a:font script="Hant" typeface="新細明體"/>
-        <a:font script="Arab" typeface="Times New Roman"/>
-        <a:font script="Hebr" typeface="Times New Roman"/>
-        <a:font script="Thai" typeface="Angsana New"/>
-        <a:font script="Ethi" typeface="Nyala"/>
-        <a:font script="Beng" typeface="Vrinda"/>
-        <a:font script="Gujr" typeface="Shruti"/>
-        <a:font script="Khmr" typeface="MoolBoran"/>
-        <a:font script="Knda" typeface="Tunga"/>
-        <a:font script="Guru" typeface="Raavi"/>
-        <a:font script="Cans" typeface="Euphemia"/>
-        <a:font script="Cher" typeface="Plantagenet Cherokee"/>
-        <a:font script="Yiii" typeface="Microsoft Yi Baiti"/>
-        <a:font script="Tibt" typeface="Microsoft Himalaya"/>
-        <a:font script="Thaa" typeface="MV Boli"/>
-        <a:font script="Deva" typeface="Mangal"/>
-        <a:font script="Telu" typeface="Gautami"/>
-        <a:font script="Taml" typeface="Latha"/>
-        <a:font script="Syrc" typeface="Estrangelo Edessa"/>
-        <a:font script="Orya" typeface="Kalinga"/>
-        <a:font script="Mlym" typeface="Kartika"/>
-        <a:font script="Laoo" typeface="DokChampa"/>
-        <a:font script="Sinh" typeface="Iskoola Pota"/>
-        <a:font script="Mong" typeface="Mongolian Baiti"/>
-        <a:font script="Viet" typeface="Times New Roman"/>
-        <a:font script="Uigh" typeface="Microsoft Uighur"/>
-        <a:font script="Geor" typeface="Sylfaen"/>
-      </a:majorFont>
-      <a:minorFont>
-        <a:latin typeface="Calibri" panose="020F0502020204030204"/>
-        <a:ea typeface=""/>
-        <a:cs typeface=""/>
-        <a:font script="Jpan" typeface="ＭＳ Ｐゴシック"/>
-        <a:font script="Hang" typeface="맑은 고딕"/>
-        <a:font script="Hans" typeface="宋体"/>
-        <a:font script="Hant" typeface="新細明體"/>
-        <a:font script="Arab" typeface="Arial"/>
-        <a:font script="Hebr" typeface="Arial"/>
-        <a:font script="Thai" typeface="Cordia New"/>
-        <a:font script="Ethi" typeface="Nyala"/>
-        <a:font script="Beng" typeface="Vrinda"/>
-        <a:font script="Gujr" typeface="Shruti"/>
-        <a:font script="Khmr" typeface="DaunPenh"/>
-        <a:font script="Knda" typeface="Tunga"/>
-        <a:font script="Guru" typeface="Raavi"/>
-        <a:font script="Cans" typeface="Euphemia"/>
-        <a:font script="Cher" typeface="Plantagenet Cherokee"/>
-        <a:font script="Yiii" typeface="Microsoft Yi Baiti"/>
-        <a:font script="Tibt" typeface="Microsoft Himalaya"/>
-        <a:font script="Thaa" typeface="MV Boli"/>
-        <a:font script="Deva" typeface="Mangal"/>
-        <a:font script="Telu" typeface="Gautami"/>
-        <a:font script="Taml" typeface="Latha"/>
-        <a:font script="Syrc" typeface="Estrangelo Edessa"/>
-        <a:font script="Orya" typeface="Kalinga"/>
-        <a:font script="Mlym" typeface="Kartika"/>
-        <a:font script="Laoo" typeface="DokChampa"/>
-        <a:font script="Sinh" typeface="Iskoola Pota"/>
-        <a:font script="Mong" typeface="Mongolian Baiti"/>
-        <a:font script="Viet" typeface="Arial"/>
-        <a:font script="Uigh" typeface="Microsoft Uighur"/>
-        <a:font script="Geor" typeface="Sylfaen"/>
-      </a:minorFont>
-    </a:fontScheme>
-    <a:fmtScheme name="Office">
-      <a:fillStyleLst>
-        <a:solidFill>
-          <a:schemeClr val="phClr"/>
-        </a:solidFill>
-        <a:gradFill rotWithShape="1">
-          <a:gsLst>
-            <a:gs pos="0">
-              <a:schemeClr val="phClr">
-                <a:lumMod val="110000"/>
-                <a:satMod val="105000"/>
-                <a:tint val="67000"/>
-              </a:schemeClr>
-            </a:gs>
-            <a:gs pos="50000">
-              <a:schemeClr val="phClr">
-                <a:lumMod val="105000"/>
-                <a:satMod val="103000"/>
-                <a:tint val="73000"/>
-              </a:schemeClr>
-            </a:gs>
-            <a:gs pos="100000">
-              <a:schemeClr val="phClr">
-                <a:lumMod val="105000"/>
-                <a:satMod val="109000"/>
-                <a:tint val="81000"/>
-              </a:schemeClr>
-            </a:gs>
-          </a:gsLst>
-          <a:lin ang="5400000" scaled="0"/>
-        </a:gradFill>
-        <a:gradFill rotWithShape="1">
-          <a:gsLst>
-            <a:gs pos="0">
-              <a:schemeClr val="phClr">
-                <a:satMod val="103000"/>
-                <a:lumMod val="102000"/>
-                <a:tint val="94000"/>
-              </a:schemeClr>
-            </a:gs>
-            <a:gs pos="50000">
-              <a:schemeClr val="phClr">
-                <a:satMod val="110000"/>
-                <a:lumMod val="100000"/>
-                <a:shade val="100000"/>
-              </a:schemeClr>
-            </a:gs>
-            <a:gs pos="100000">
-              <a:schemeClr val="phClr">
-                <a:lumMod val="99000"/>
-                <a:satMod val="120000"/>
-                <a:shade val="78000"/>
-              </a:schemeClr>
-            </a:gs>
-          </a:gsLst>
-          <a:lin ang="5400000" scaled="0"/>
-        </a:gradFill>
-      </a:fillStyleLst>
-      <a:lnStyleLst>
-        <a:ln w="6350" cap="flat" cmpd="sng" algn="ctr">
-          <a:solidFill>
-            <a:schemeClr val="phClr"/>
-          </a:solidFill>
-          <a:prstDash val="solid"/>
-          <a:miter lim="800000"/>
-        </a:ln>
-        <a:ln w="12700" cap="flat" cmpd="sng" algn="ctr">
-          <a:solidFill>
-            <a:schemeClr val="phClr"/>
-          </a:solidFill>
-          <a:prstDash val="solid"/>
-          <a:miter lim="800000"/>
-        </a:ln>
-        <a:ln w="19050" cap="flat" cmpd="sng" algn="ctr">
-          <a:solidFill>
-            <a:schemeClr val="phClr"/>
-          </a:solidFill>
-          <a:prstDash val="solid"/>
-          <a:miter lim="800000"/>
-        </a:ln>
-      </a:lnStyleLst>
-      <a:effectStyleLst>
-        <a:effectStyle>
-          <a:effectLst/>
-        </a:effectStyle>
-        <a:effectStyle>
-          <a:effectLst/>
-        </a:effectStyle>
-        <a:effectStyle>
-          <a:effectLst>
-            <a:outerShdw blurRad="57150" dist="19050" dir="5400000" algn="ctr" rotWithShape="0">
-              <a:srgbClr val="000000">
-                <a:alpha val="63000"/>
-              </a:srgbClr>
-            </a:outerShdw>
-          </a:effectLst>
-        </a:effectStyle>
-      </a:effectStyleLst>
-      <a:bgFillStyleLst>
-        <a:solidFill>
-          <a:schemeClr val="phClr"/>
-        </a:solidFill>
-        <a:solidFill>
-          <a:schemeClr val="phClr">
-            <a:tint val="95000"/>
-            <a:satMod val="170000"/>
-          </a:schemeClr>
-        </a:solidFill>
-        <a:gradFill rotWithShape="1">
-          <a:gsLst>
-            <a:gs pos="0">
-              <a:schemeClr val="phClr">
-                <a:tint val="93000"/>
-                <a:satMod val="150000"/>
-                <a:shade val="98000"/>
-                <a:lumMod val="102000"/>
-              </a:schemeClr>
-            </a:gs>
-            <a:gs pos="50000">
-              <a:schemeClr val="phClr">
-                <a:tint val="98000"/>
-                <a:satMod val="130000"/>
-                <a:shade val="90000"/>
-                <a:lumMod val="103000"/>
-              </a:schemeClr>
-            </a:gs>
-            <a:gs pos="100000">
-              <a:schemeClr val="phClr">
-                <a:shade val="63000"/>
-                <a:satMod val="120000"/>
-              </a:schemeClr>
-            </a:gs>
-          </a:gsLst>
-          <a:lin ang="5400000" scaled="0"/>
-        </a:gradFill>
-      </a:bgFillStyleLst>
-    </a:fmtScheme>
-  </a:themeElements>
-  <a:objectDefaults/>
-  <a:extraClrSchemeLst/>
-  <a:extLst>
-    <a:ext uri="{05A4C25C-085E-4340-85A3-A5531E510DB2}">
-      <thm15:themeFamily xmlns:thm15="http://schemas.microsoft.com/office/thememl/2012/main" name="Office Theme" id="{62F939B6-93AF-4DB8-9C6B-D6C7DFDC589F}" vid="{4A3C46E8-61CC-4603-A589-7422A47A8E4A}"/>
-    </a:ext>
-  </a:extLst>
-</a:theme>
 </file>